--- a/KOR._CrowdStrike_Falcon_Proposal_for_Westin_Resort_Guam_SECUKOREA.pptx
+++ b/KOR._CrowdStrike_Falcon_Proposal_for_Westin_Resort_Guam_SECUKOREA.pptx
@@ -5,17 +5,17 @@
     <p:sldMasterId id="2147483648" r:id="rId1"/>
   </p:sldMasterIdLst>
   <p:notesMasterIdLst>
-    <p:notesMasterId r:id="rId20"/>
+    <p:notesMasterId r:id="rId10"/>
   </p:notesMasterIdLst>
   <p:sldIdLst>
     <p:sldId id="256" r:id="rId2"/>
-    <p:sldId id="259" r:id="rId5"/>
-    <p:sldId id="261" r:id="rId7"/>
-    <p:sldId id="268" r:id="rId13"/>
-    <p:sldId id="273" r:id="rId18"/>
-    <p:sldId id="270" r:id="rId15"/>
-    <p:sldId id="276" r:id="rId17"/>
-    <p:sldId id="275" r:id="rId19"/>
+    <p:sldId id="258" r:id="rId3"/>
+    <p:sldId id="259" r:id="rId4"/>
+    <p:sldId id="261" r:id="rId5"/>
+    <p:sldId id="268" r:id="rId6"/>
+    <p:sldId id="273" r:id="rId7"/>
+    <p:sldId id="276" r:id="rId8"/>
+    <p:sldId id="275" r:id="rId9"/>
   </p:sldIdLst>
   <p:sldSz cx="12192000" cy="6858000"/>
   <p:notesSz cx="6858000" cy="12192000"/>
@@ -331,7 +331,7 @@
 </p:notes>
 </file>
 
-<file path=ppt/notesSlides/notesSlide12.xml><?xml version="1.0" encoding="utf-8"?>
+<file path=ppt/notesSlides/notesSlide2.xml><?xml version="1.0" encoding="utf-8"?>
 <p:notes xmlns:a="http://schemas.openxmlformats.org/drawingml/2006/main" xmlns:r="http://schemas.openxmlformats.org/officeDocument/2006/relationships" xmlns:p="http://schemas.openxmlformats.org/presentationml/2006/main">
   <p:cSld>
     <p:spTree>
@@ -377,7 +377,7 @@
           <a:p>
             <a:r>
               <a:rPr lang="en-US" dirty="0"/>
-              <a:t>간단한 비교입니다. Nessus 같은 스캐너는 취약점을 찾아 보고합니다. CrowdStrike Falcon은 매 순간 자동으로 공격을 막고, 시큐코리아의 24시간 지원이 함께 제공됩니다.</a:t>
+              <a:t>배경 설명: 24시간 운영되는 리조트, 소규모 IT팀, 엔드포인트 보안 없음. 스캔 위주의 방식은 결과만 보여주고 스캔 사이에 공백이 생깁니다. 리조트에는 스스로 대응하는 보호가 필요합니다.</a:t>
             </a:r>
           </a:p>
         </p:txBody>
@@ -399,7 +399,7 @@
           <a:p>
             <a:fld id="{F7021451-1387-4CA6-816F-3879F97B5CBC}" type="slidenum">
               <a:rPr lang="en-US"/>
-              <a:t>12</a:t>
+              <a:t>2</a:t>
             </a:fld>
             <a:endParaRPr lang="en-US"/>
           </a:p>
@@ -418,7 +418,7 @@
 </p:notes>
 </file>
 
-<file path=ppt/notesSlides/notesSlide14.xml><?xml version="1.0" encoding="utf-8"?>
+<file path=ppt/notesSlides/notesSlide3.xml><?xml version="1.0" encoding="utf-8"?>
 <p:notes xmlns:a="http://schemas.openxmlformats.org/drawingml/2006/main" xmlns:r="http://schemas.openxmlformats.org/officeDocument/2006/relationships" xmlns:p="http://schemas.openxmlformats.org/presentationml/2006/main">
   <p:cSld>
     <p:spTree>
@@ -464,7 +464,7 @@
           <a:p>
             <a:r>
               <a:rPr lang="en-US" dirty="0"/>
-              <a:t>두 가지 증거입니다. 첫째, CrowdStrike가 공개한 실제 랜섬웨어 공격에서 Falcon은 침입자를 탐지하고 모든 단계를 막아 파일 하나도 암호화되지 않았습니다. 둘째, 호텔 체인을 포함한 고객 성과와 독립 기관 테스트 결과입니다.</a:t>
+              <a:t>지금 왜 중요한가: 역대 가장 빠른 확산은 27초였고, AI 활용 공격은 전년 대비 89%, 공개 전 악용된 제로데이는 42% 늘었으며, 설문 기업의 78%가 지난해 랜섬웨어 공격을 받았습니다.</a:t>
             </a:r>
           </a:p>
         </p:txBody>
@@ -486,268 +486,7 @@
           <a:p>
             <a:fld id="{F7021451-1387-4CA6-816F-3879F97B5CBC}" type="slidenum">
               <a:rPr lang="en-US"/>
-              <a:t>14</a:t>
-            </a:fld>
-            <a:endParaRPr lang="en-US"/>
-          </a:p>
-        </p:txBody>
-      </p:sp>
-    </p:spTree>
-    <p:extLst>
-      <p:ext uri="{BB962C8B-B14F-4D97-AF65-F5344CB8AC3E}">
-        <p14:creationId xmlns:p14="http://schemas.microsoft.com/office/powerpoint/2010/main" val="1024086991"/>
-      </p:ext>
-    </p:extLst>
-  </p:cSld>
-  <p:clrMapOvr>
-    <a:masterClrMapping/>
-  </p:clrMapOvr>
-</p:notes>
-</file>
-
-<file path=ppt/notesSlides/notesSlide16.xml><?xml version="1.0" encoding="utf-8"?>
-<p:notes xmlns:a="http://schemas.openxmlformats.org/drawingml/2006/main" xmlns:r="http://schemas.openxmlformats.org/officeDocument/2006/relationships" xmlns:p="http://schemas.openxmlformats.org/presentationml/2006/main">
-  <p:cSld>
-    <p:spTree>
-      <p:nvGrpSpPr>
-        <p:cNvPr id="1" name=""/>
-        <p:cNvGrpSpPr/>
-        <p:nvPr/>
-      </p:nvGrpSpPr>
-      <p:grpSpPr>
-        <a:xfrm>
-          <a:off x="0" y="0"/>
-          <a:ext cx="0" cy="0"/>
-          <a:chOff x="0" y="0"/>
-          <a:chExt cx="0" cy="0"/>
-        </a:xfrm>
-      </p:grpSpPr>
-      <p:sp>
-        <p:nvSpPr>
-          <p:cNvPr id="2" name="Slide Image Placeholder 1"/>
-          <p:cNvSpPr>
-            <a:spLocks noGrp="1" noRot="1" noChangeAspect="1"/>
-          </p:cNvSpPr>
-          <p:nvPr>
-            <p:ph type="sldImg"/>
-          </p:nvPr>
-        </p:nvSpPr>
-        <p:spPr/>
-      </p:sp>
-      <p:sp>
-        <p:nvSpPr>
-          <p:cNvPr id="3" name="Notes Placeholder 2"/>
-          <p:cNvSpPr>
-            <a:spLocks noGrp="1"/>
-          </p:cNvSpPr>
-          <p:nvPr>
-            <p:ph type="body" idx="1"/>
-          </p:nvPr>
-        </p:nvSpPr>
-        <p:spPr/>
-        <p:txBody>
-          <a:bodyPr/>
-          <a:lstStyle/>
-          <a:p>
-            <a:r>
-              <a:rPr lang="en-US" dirty="0"/>
-              <a:t>도입 후 시큐코리아가 24시간 원격으로 리조트를 지원하고, 전담 엔지니어가 단일 창구가 됩니다. 중대한 사고 시에는 CrowdStrike 파트너인 SK쉴더스가 침해사고 대응팀과 응답 시간 약속으로 함께 대응합니다.</a:t>
-            </a:r>
-          </a:p>
-        </p:txBody>
-      </p:sp>
-      <p:sp>
-        <p:nvSpPr>
-          <p:cNvPr id="4" name="Slide Number Placeholder 3"/>
-          <p:cNvSpPr>
-            <a:spLocks noGrp="1"/>
-          </p:cNvSpPr>
-          <p:nvPr>
-            <p:ph type="sldNum" sz="quarter" idx="10"/>
-          </p:nvPr>
-        </p:nvSpPr>
-        <p:spPr/>
-        <p:txBody>
-          <a:bodyPr/>
-          <a:lstStyle/>
-          <a:p>
-            <a:fld id="{F7021451-1387-4CA6-816F-3879F97B5CBC}" type="slidenum">
-              <a:rPr lang="en-US"/>
-              <a:t>16</a:t>
-            </a:fld>
-            <a:endParaRPr lang="en-US"/>
-          </a:p>
-        </p:txBody>
-      </p:sp>
-    </p:spTree>
-    <p:extLst>
-      <p:ext uri="{BB962C8B-B14F-4D97-AF65-F5344CB8AC3E}">
-        <p14:creationId xmlns:p14="http://schemas.microsoft.com/office/powerpoint/2010/main" val="1024086991"/>
-      </p:ext>
-    </p:extLst>
-  </p:cSld>
-  <p:clrMapOvr>
-    <a:masterClrMapping/>
-  </p:clrMapOvr>
-</p:notes>
-</file>
-
-<file path=ppt/notesSlides/notesSlide17.xml><?xml version="1.0" encoding="utf-8"?>
-<p:notes xmlns:a="http://schemas.openxmlformats.org/drawingml/2006/main" xmlns:r="http://schemas.openxmlformats.org/officeDocument/2006/relationships" xmlns:p="http://schemas.openxmlformats.org/presentationml/2006/main">
-  <p:cSld>
-    <p:spTree>
-      <p:nvGrpSpPr>
-        <p:cNvPr id="1" name=""/>
-        <p:cNvGrpSpPr/>
-        <p:nvPr/>
-      </p:nvGrpSpPr>
-      <p:grpSpPr>
-        <a:xfrm>
-          <a:off x="0" y="0"/>
-          <a:ext cx="0" cy="0"/>
-          <a:chOff x="0" y="0"/>
-          <a:chExt cx="0" cy="0"/>
-        </a:xfrm>
-      </p:grpSpPr>
-      <p:sp>
-        <p:nvSpPr>
-          <p:cNvPr id="2" name="Slide Image Placeholder 1"/>
-          <p:cNvSpPr>
-            <a:spLocks noGrp="1" noRot="1" noChangeAspect="1"/>
-          </p:cNvSpPr>
-          <p:nvPr>
-            <p:ph type="sldImg"/>
-          </p:nvPr>
-        </p:nvSpPr>
-        <p:spPr/>
-      </p:sp>
-      <p:sp>
-        <p:nvSpPr>
-          <p:cNvPr id="3" name="Notes Placeholder 2"/>
-          <p:cNvSpPr>
-            <a:spLocks noGrp="1"/>
-          </p:cNvSpPr>
-          <p:nvPr>
-            <p:ph type="body" idx="1"/>
-          </p:nvPr>
-        </p:nvSpPr>
-        <p:spPr/>
-        <p:txBody>
-          <a:bodyPr/>
-          <a:lstStyle/>
-          <a:p>
-            <a:r>
-              <a:rPr lang="en-US" dirty="0"/>
-              <a:t>도입 전후를 쉽게 비교하고, 호텔 경영진에게 중요한 네 가지 성과(고객 신뢰, 비즈니스 연속성, IT 업무 경감, 컴플라이언스)를 설명하십시오.</a:t>
-            </a:r>
-          </a:p>
-        </p:txBody>
-      </p:sp>
-      <p:sp>
-        <p:nvSpPr>
-          <p:cNvPr id="4" name="Slide Number Placeholder 3"/>
-          <p:cNvSpPr>
-            <a:spLocks noGrp="1"/>
-          </p:cNvSpPr>
-          <p:nvPr>
-            <p:ph type="sldNum" sz="quarter" idx="10"/>
-          </p:nvPr>
-        </p:nvSpPr>
-        <p:spPr/>
-        <p:txBody>
-          <a:bodyPr/>
-          <a:lstStyle/>
-          <a:p>
-            <a:fld id="{F7021451-1387-4CA6-816F-3879F97B5CBC}" type="slidenum">
-              <a:rPr lang="en-US"/>
-              <a:t>17</a:t>
-            </a:fld>
-            <a:endParaRPr lang="en-US"/>
-          </a:p>
-        </p:txBody>
-      </p:sp>
-    </p:spTree>
-    <p:extLst>
-      <p:ext uri="{BB962C8B-B14F-4D97-AF65-F5344CB8AC3E}">
-        <p14:creationId xmlns:p14="http://schemas.microsoft.com/office/powerpoint/2010/main" val="1024086991"/>
-      </p:ext>
-    </p:extLst>
-  </p:cSld>
-  <p:clrMapOvr>
-    <a:masterClrMapping/>
-  </p:clrMapOvr>
-</p:notes>
-</file>
-
-<file path=ppt/notesSlides/notesSlide18.xml><?xml version="1.0" encoding="utf-8"?>
-<p:notes xmlns:a="http://schemas.openxmlformats.org/drawingml/2006/main" xmlns:r="http://schemas.openxmlformats.org/officeDocument/2006/relationships" xmlns:p="http://schemas.openxmlformats.org/presentationml/2006/main">
-  <p:cSld>
-    <p:spTree>
-      <p:nvGrpSpPr>
-        <p:cNvPr id="1" name=""/>
-        <p:cNvGrpSpPr/>
-        <p:nvPr/>
-      </p:nvGrpSpPr>
-      <p:grpSpPr>
-        <a:xfrm>
-          <a:off x="0" y="0"/>
-          <a:ext cx="0" cy="0"/>
-          <a:chOff x="0" y="0"/>
-          <a:chExt cx="0" cy="0"/>
-        </a:xfrm>
-      </p:grpSpPr>
-      <p:sp>
-        <p:nvSpPr>
-          <p:cNvPr id="2" name="Slide Image Placeholder 1"/>
-          <p:cNvSpPr>
-            <a:spLocks noGrp="1" noRot="1" noChangeAspect="1"/>
-          </p:cNvSpPr>
-          <p:nvPr>
-            <p:ph type="sldImg"/>
-          </p:nvPr>
-        </p:nvSpPr>
-        <p:spPr/>
-      </p:sp>
-      <p:sp>
-        <p:nvSpPr>
-          <p:cNvPr id="3" name="Notes Placeholder 2"/>
-          <p:cNvSpPr>
-            <a:spLocks noGrp="1"/>
-          </p:cNvSpPr>
-          <p:nvPr>
-            <p:ph type="body" idx="1"/>
-          </p:nvPr>
-        </p:nvSpPr>
-        <p:spPr/>
-        <p:txBody>
-          <a:bodyPr/>
-          <a:lstStyle/>
-          <a:p>
-            <a:r>
-              <a:rPr lang="en-US" dirty="0"/>
-              <a:t>청중에게 감사를 전하고 질의응답을 진행하십시오.</a:t>
-            </a:r>
-          </a:p>
-        </p:txBody>
-      </p:sp>
-      <p:sp>
-        <p:nvSpPr>
-          <p:cNvPr id="4" name="Slide Number Placeholder 3"/>
-          <p:cNvSpPr>
-            <a:spLocks noGrp="1"/>
-          </p:cNvSpPr>
-          <p:nvPr>
-            <p:ph type="sldNum" sz="quarter" idx="10"/>
-          </p:nvPr>
-        </p:nvSpPr>
-        <p:spPr/>
-        <p:txBody>
-          <a:bodyPr/>
-          <a:lstStyle/>
-          <a:p>
-            <a:fld id="{F7021451-1387-4CA6-816F-3879F97B5CBC}" type="slidenum">
-              <a:rPr lang="en-US"/>
-              <a:t>18</a:t>
+              <a:t>3</a:t>
             </a:fld>
             <a:endParaRPr lang="en-US"/>
           </a:p>
@@ -812,7 +551,7 @@
           <a:p>
             <a:r>
               <a:rPr lang="en-US" dirty="0"/>
-              <a:t>지금 왜 중요한가: 해커는 몇 초 만에 퍼지고, AI를 활용하며, 대응책이 나오기 전에 취약점을 공격합니다. 지난해 대부분의 기업이 랜섬웨어 피해를 입었습니다. 보호는 자동으로, 항상 켜져 있어야 합니다.</a:t>
+              <a:t>비기술 관계자를 위한 비유: Nessus 같은 스캐너는 정기 소방점검입니다. Falcon은 실제로 불이 났을 때 작동하는 화재감지기, 스프링클러, 보안팀입니다.</a:t>
             </a:r>
           </a:p>
         </p:txBody>
@@ -835,6 +574,93 @@
             <a:fld id="{F7021451-1387-4CA6-816F-3879F97B5CBC}" type="slidenum">
               <a:rPr lang="en-US"/>
               <a:t>4</a:t>
+            </a:fld>
+            <a:endParaRPr lang="en-US"/>
+          </a:p>
+        </p:txBody>
+      </p:sp>
+    </p:spTree>
+    <p:extLst>
+      <p:ext uri="{BB962C8B-B14F-4D97-AF65-F5344CB8AC3E}">
+        <p14:creationId xmlns:p14="http://schemas.microsoft.com/office/powerpoint/2010/main" val="1024086991"/>
+      </p:ext>
+    </p:extLst>
+  </p:cSld>
+  <p:clrMapOvr>
+    <a:masterClrMapping/>
+  </p:clrMapOvr>
+</p:notes>
+</file>
+
+<file path=ppt/notesSlides/notesSlide5.xml><?xml version="1.0" encoding="utf-8"?>
+<p:notes xmlns:a="http://schemas.openxmlformats.org/drawingml/2006/main" xmlns:r="http://schemas.openxmlformats.org/officeDocument/2006/relationships" xmlns:p="http://schemas.openxmlformats.org/presentationml/2006/main">
+  <p:cSld>
+    <p:spTree>
+      <p:nvGrpSpPr>
+        <p:cNvPr id="1" name=""/>
+        <p:cNvGrpSpPr/>
+        <p:nvPr/>
+      </p:nvGrpSpPr>
+      <p:grpSpPr>
+        <a:xfrm>
+          <a:off x="0" y="0"/>
+          <a:ext cx="0" cy="0"/>
+          <a:chOff x="0" y="0"/>
+          <a:chExt cx="0" cy="0"/>
+        </a:xfrm>
+      </p:grpSpPr>
+      <p:sp>
+        <p:nvSpPr>
+          <p:cNvPr id="2" name="Slide Image Placeholder 1"/>
+          <p:cNvSpPr>
+            <a:spLocks noGrp="1" noRot="1" noChangeAspect="1"/>
+          </p:cNvSpPr>
+          <p:nvPr>
+            <p:ph type="sldImg"/>
+          </p:nvPr>
+        </p:nvSpPr>
+        <p:spPr/>
+      </p:sp>
+      <p:sp>
+        <p:nvSpPr>
+          <p:cNvPr id="3" name="Notes Placeholder 2"/>
+          <p:cNvSpPr>
+            <a:spLocks noGrp="1"/>
+          </p:cNvSpPr>
+          <p:nvPr>
+            <p:ph type="body" idx="1"/>
+          </p:nvPr>
+        </p:nvSpPr>
+        <p:spPr/>
+        <p:txBody>
+          <a:bodyPr/>
+          <a:lstStyle/>
+          <a:p>
+            <a:r>
+              <a:rPr lang="en-US" dirty="0"/>
+              <a:t>간단한 비교입니다. Nessus 같은 스캐너는 취약점을 찾아 보고합니다. CrowdStrike Falcon은 매 순간 자동으로 공격을 막고, 시큐코리아의 24시간 지원이 함께 제공됩니다.</a:t>
+            </a:r>
+          </a:p>
+        </p:txBody>
+      </p:sp>
+      <p:sp>
+        <p:nvSpPr>
+          <p:cNvPr id="4" name="Slide Number Placeholder 3"/>
+          <p:cNvSpPr>
+            <a:spLocks noGrp="1"/>
+          </p:cNvSpPr>
+          <p:nvPr>
+            <p:ph type="sldNum" sz="quarter" idx="10"/>
+          </p:nvPr>
+        </p:nvSpPr>
+        <p:spPr/>
+        <p:txBody>
+          <a:bodyPr/>
+          <a:lstStyle/>
+          <a:p>
+            <a:fld id="{F7021451-1387-4CA6-816F-3879F97B5CBC}" type="slidenum">
+              <a:rPr lang="en-US"/>
+              <a:t>5</a:t>
             </a:fld>
             <a:endParaRPr lang="en-US"/>
           </a:p>
@@ -899,7 +725,7 @@
           <a:p>
             <a:r>
               <a:rPr lang="en-US" dirty="0"/>
-              <a:t>비기술 관계자를 위한 비유: Nessus 같은 스캐너는 정기 소방점검입니다. Falcon은 실제로 불이 났을 때 작동하는 화재감지기, 스프링클러, 보안팀입니다.</a:t>
+              <a:t>도입 전후를 쉽게 비교하고, 호텔 경영진에게 중요한 네 가지 성과(고객 신뢰, 비즈니스 연속성, IT 업무 경감, 컴플라이언스)를 설명하십시오.</a:t>
             </a:r>
           </a:p>
         </p:txBody>
@@ -922,6 +748,180 @@
             <a:fld id="{F7021451-1387-4CA6-816F-3879F97B5CBC}" type="slidenum">
               <a:rPr lang="en-US"/>
               <a:t>6</a:t>
+            </a:fld>
+            <a:endParaRPr lang="en-US"/>
+          </a:p>
+        </p:txBody>
+      </p:sp>
+    </p:spTree>
+    <p:extLst>
+      <p:ext uri="{BB962C8B-B14F-4D97-AF65-F5344CB8AC3E}">
+        <p14:creationId xmlns:p14="http://schemas.microsoft.com/office/powerpoint/2010/main" val="1024086991"/>
+      </p:ext>
+    </p:extLst>
+  </p:cSld>
+  <p:clrMapOvr>
+    <a:masterClrMapping/>
+  </p:clrMapOvr>
+</p:notes>
+</file>
+
+<file path=ppt/notesSlides/notesSlide7.xml><?xml version="1.0" encoding="utf-8"?>
+<p:notes xmlns:a="http://schemas.openxmlformats.org/drawingml/2006/main" xmlns:r="http://schemas.openxmlformats.org/officeDocument/2006/relationships" xmlns:p="http://schemas.openxmlformats.org/presentationml/2006/main">
+  <p:cSld>
+    <p:spTree>
+      <p:nvGrpSpPr>
+        <p:cNvPr id="1" name=""/>
+        <p:cNvGrpSpPr/>
+        <p:nvPr/>
+      </p:nvGrpSpPr>
+      <p:grpSpPr>
+        <a:xfrm>
+          <a:off x="0" y="0"/>
+          <a:ext cx="0" cy="0"/>
+          <a:chOff x="0" y="0"/>
+          <a:chExt cx="0" cy="0"/>
+        </a:xfrm>
+      </p:grpSpPr>
+      <p:sp>
+        <p:nvSpPr>
+          <p:cNvPr id="2" name="Slide Image Placeholder 1"/>
+          <p:cNvSpPr>
+            <a:spLocks noGrp="1" noRot="1" noChangeAspect="1"/>
+          </p:cNvSpPr>
+          <p:nvPr>
+            <p:ph type="sldImg"/>
+          </p:nvPr>
+        </p:nvSpPr>
+        <p:spPr/>
+      </p:sp>
+      <p:sp>
+        <p:nvSpPr>
+          <p:cNvPr id="3" name="Notes Placeholder 2"/>
+          <p:cNvSpPr>
+            <a:spLocks noGrp="1"/>
+          </p:cNvSpPr>
+          <p:nvPr>
+            <p:ph type="body" idx="1"/>
+          </p:nvPr>
+        </p:nvSpPr>
+        <p:spPr/>
+        <p:txBody>
+          <a:bodyPr/>
+          <a:lstStyle/>
+          <a:p>
+            <a:r>
+              <a:rPr lang="en-US" dirty="0"/>
+              <a:t>도입 후 시큐코리아가 24시간 원격으로 지원하고, 전담 엔지니어가 첫 연락부터 해결까지 직접 책임집니다. 중대한 사고 시에는 CrowdStrike 파트너인 SK쉴더스가 침해사고 대응팀으로 함께 대응합니다.</a:t>
+            </a:r>
+          </a:p>
+        </p:txBody>
+      </p:sp>
+      <p:sp>
+        <p:nvSpPr>
+          <p:cNvPr id="4" name="Slide Number Placeholder 3"/>
+          <p:cNvSpPr>
+            <a:spLocks noGrp="1"/>
+          </p:cNvSpPr>
+          <p:nvPr>
+            <p:ph type="sldNum" sz="quarter" idx="10"/>
+          </p:nvPr>
+        </p:nvSpPr>
+        <p:spPr/>
+        <p:txBody>
+          <a:bodyPr/>
+          <a:lstStyle/>
+          <a:p>
+            <a:fld id="{F7021451-1387-4CA6-816F-3879F97B5CBC}" type="slidenum">
+              <a:rPr lang="en-US"/>
+              <a:t>7</a:t>
+            </a:fld>
+            <a:endParaRPr lang="en-US"/>
+          </a:p>
+        </p:txBody>
+      </p:sp>
+    </p:spTree>
+    <p:extLst>
+      <p:ext uri="{BB962C8B-B14F-4D97-AF65-F5344CB8AC3E}">
+        <p14:creationId xmlns:p14="http://schemas.microsoft.com/office/powerpoint/2010/main" val="1024086991"/>
+      </p:ext>
+    </p:extLst>
+  </p:cSld>
+  <p:clrMapOvr>
+    <a:masterClrMapping/>
+  </p:clrMapOvr>
+</p:notes>
+</file>
+
+<file path=ppt/notesSlides/notesSlide8.xml><?xml version="1.0" encoding="utf-8"?>
+<p:notes xmlns:a="http://schemas.openxmlformats.org/drawingml/2006/main" xmlns:r="http://schemas.openxmlformats.org/officeDocument/2006/relationships" xmlns:p="http://schemas.openxmlformats.org/presentationml/2006/main">
+  <p:cSld>
+    <p:spTree>
+      <p:nvGrpSpPr>
+        <p:cNvPr id="1" name=""/>
+        <p:cNvGrpSpPr/>
+        <p:nvPr/>
+      </p:nvGrpSpPr>
+      <p:grpSpPr>
+        <a:xfrm>
+          <a:off x="0" y="0"/>
+          <a:ext cx="0" cy="0"/>
+          <a:chOff x="0" y="0"/>
+          <a:chExt cx="0" cy="0"/>
+        </a:xfrm>
+      </p:grpSpPr>
+      <p:sp>
+        <p:nvSpPr>
+          <p:cNvPr id="2" name="Slide Image Placeholder 1"/>
+          <p:cNvSpPr>
+            <a:spLocks noGrp="1" noRot="1" noChangeAspect="1"/>
+          </p:cNvSpPr>
+          <p:nvPr>
+            <p:ph type="sldImg"/>
+          </p:nvPr>
+        </p:nvSpPr>
+        <p:spPr/>
+      </p:sp>
+      <p:sp>
+        <p:nvSpPr>
+          <p:cNvPr id="3" name="Notes Placeholder 2"/>
+          <p:cNvSpPr>
+            <a:spLocks noGrp="1"/>
+          </p:cNvSpPr>
+          <p:nvPr>
+            <p:ph type="body" idx="1"/>
+          </p:nvPr>
+        </p:nvSpPr>
+        <p:spPr/>
+        <p:txBody>
+          <a:bodyPr/>
+          <a:lstStyle/>
+          <a:p>
+            <a:r>
+              <a:rPr lang="en-US" dirty="0"/>
+              <a:t>청중에게 감사를 전하고 질의응답을 진행하십시오.</a:t>
+            </a:r>
+          </a:p>
+        </p:txBody>
+      </p:sp>
+      <p:sp>
+        <p:nvSpPr>
+          <p:cNvPr id="4" name="Slide Number Placeholder 3"/>
+          <p:cNvSpPr>
+            <a:spLocks noGrp="1"/>
+          </p:cNvSpPr>
+          <p:nvPr>
+            <p:ph type="sldNum" sz="quarter" idx="10"/>
+          </p:nvPr>
+        </p:nvSpPr>
+        <p:spPr/>
+        <p:txBody>
+          <a:bodyPr/>
+          <a:lstStyle/>
+          <a:p>
+            <a:fld id="{F7021451-1387-4CA6-816F-3879F97B5CBC}" type="slidenum">
+              <a:rPr lang="en-US"/>
+              <a:t>8</a:t>
             </a:fld>
             <a:endParaRPr lang="en-US"/>
           </a:p>
@@ -1537,7 +1537,18 @@
                 <a:ea typeface="Calibri" pitchFamily="34" charset="-122"/>
                 <a:cs typeface="Calibri" pitchFamily="34" charset="-120"/>
               </a:rPr>
-              <a:t>(주)시큐코리아</a:t>
+              <a:t>시큐코리아</a:t>
+            </a:r>
+            <a:r>
+              <a:rPr lang="ko-KR" altLang="en-US" sz="1500" dirty="0">
+                <a:solidFill>
+                  <a:srgbClr val="FFFFFF"/>
+                </a:solidFill>
+                <a:latin typeface="Calibri" pitchFamily="34" charset="0"/>
+                <a:ea typeface="Calibri" pitchFamily="34" charset="-122"/>
+                <a:cs typeface="Calibri" pitchFamily="34" charset="-120"/>
+              </a:rPr>
+              <a:t>㈜</a:t>
             </a:r>
             <a:endParaRPr lang="en-US" sz="1500" dirty="0"/>
           </a:p>
@@ -1795,6 +1806,1165 @@
 </file>
 
 <file path=ppt/slides/slide2.xml><?xml version="1.0" encoding="utf-8"?>
+<p:sld xmlns:a="http://schemas.openxmlformats.org/drawingml/2006/main" xmlns:r="http://schemas.openxmlformats.org/officeDocument/2006/relationships" xmlns:p="http://schemas.openxmlformats.org/presentationml/2006/main">
+  <p:cSld>
+    <p:spTree>
+      <p:nvGrpSpPr>
+        <p:cNvPr id="1" name=""/>
+        <p:cNvGrpSpPr/>
+        <p:nvPr/>
+      </p:nvGrpSpPr>
+      <p:grpSpPr>
+        <a:xfrm>
+          <a:off x="0" y="0"/>
+          <a:ext cx="0" cy="0"/>
+          <a:chOff x="0" y="0"/>
+          <a:chExt cx="0" cy="0"/>
+        </a:xfrm>
+      </p:grpSpPr>
+      <p:sp>
+        <p:nvSpPr>
+          <p:cNvPr id="2" name="Text 0"/>
+          <p:cNvSpPr txBox="1"/>
+          <p:nvPr/>
+        </p:nvSpPr>
+        <p:spPr>
+          <a:xfrm>
+            <a:off x="548640" y="384048"/>
+            <a:ext cx="8229600" cy="256032"/>
+          </a:xfrm>
+          <a:prstGeom prst="rect">
+            <a:avLst/>
+          </a:prstGeom>
+          <a:noFill/>
+          <a:ln/>
+        </p:spPr>
+        <p:txBody>
+          <a:bodyPr wrap="square" lIns="0" tIns="0" rIns="0" bIns="0" rtlCol="0" anchor="t"/>
+          <a:lstStyle/>
+          <a:p>
+            <a:pPr marL="0" indent="0">
+              <a:buNone/>
+            </a:pPr>
+            <a:r>
+              <a:rPr lang="ko-KR" sz="1100" b="1" kern="0" spc="200" dirty="0">
+                <a:solidFill>
+                  <a:srgbClr val="E3202A"/>
+                </a:solidFill>
+                <a:latin typeface="Arial" pitchFamily="34" charset="0"/>
+                <a:ea typeface="맑은 고딕" pitchFamily="34" charset="-122"/>
+                <a:cs typeface="Arial" pitchFamily="34" charset="-120"/>
+              </a:rPr>
+              <a:t>01   현황</a:t>
+            </a:r>
+            <a:endParaRPr lang="en-US" sz="1100" dirty="0"/>
+          </a:p>
+        </p:txBody>
+      </p:sp>
+      <p:sp>
+        <p:nvSpPr>
+          <p:cNvPr id="3" name="Text 1"/>
+          <p:cNvSpPr txBox="1"/>
+          <p:nvPr/>
+        </p:nvSpPr>
+        <p:spPr>
+          <a:xfrm>
+            <a:off x="548640" y="658368"/>
+            <a:ext cx="9692640" cy="658368"/>
+          </a:xfrm>
+          <a:prstGeom prst="rect">
+            <a:avLst/>
+          </a:prstGeom>
+          <a:noFill/>
+          <a:ln/>
+        </p:spPr>
+        <p:txBody>
+          <a:bodyPr wrap="square" lIns="0" tIns="0" rIns="0" bIns="0" rtlCol="0" anchor="ctr"/>
+          <a:lstStyle/>
+          <a:p>
+            <a:pPr marL="0" indent="0">
+              <a:buNone/>
+            </a:pPr>
+            <a:r>
+              <a:rPr lang="ko-KR" sz="2800" b="1" dirty="0">
+                <a:solidFill>
+                  <a:srgbClr val="151A21"/>
+                </a:solidFill>
+                <a:latin typeface="Arial" pitchFamily="34" charset="0"/>
+                <a:ea typeface="맑은 고딕" pitchFamily="34" charset="-122"/>
+                <a:cs typeface="Arial" pitchFamily="34" charset="-120"/>
+              </a:rPr>
+              <a:t>현재 환경 및 보안 과제</a:t>
+            </a:r>
+            <a:endParaRPr lang="en-US" sz="2800" dirty="0"/>
+          </a:p>
+        </p:txBody>
+      </p:sp>
+      <p:pic>
+        <p:nvPicPr>
+          <p:cNvPr id="4" name="Image 0" descr="/private/tmp/claude-501/-Users-jihanvin-Desktop-NIVNAH-AI/16a96446-d9b3-40e2-af9e-a3011ae3db84/scratchpad/assets/westin_grey.png"/>
+          <p:cNvPicPr>
+            <a:picLocks noChangeAspect="1"/>
+          </p:cNvPicPr>
+          <p:nvPr/>
+        </p:nvPicPr>
+        <p:blipFill>
+          <a:blip r:embed="rId3"/>
+          <a:stretch>
+            <a:fillRect/>
+          </a:stretch>
+        </p:blipFill>
+        <p:spPr>
+          <a:xfrm>
+            <a:off x="10634472" y="402336"/>
+            <a:ext cx="1005840" cy="301752"/>
+          </a:xfrm>
+          <a:prstGeom prst="rect">
+            <a:avLst/>
+          </a:prstGeom>
+        </p:spPr>
+      </p:pic>
+      <p:sp>
+        <p:nvSpPr>
+          <p:cNvPr id="5" name="Shape 2"/>
+          <p:cNvSpPr/>
+          <p:nvPr/>
+        </p:nvSpPr>
+        <p:spPr>
+          <a:xfrm>
+            <a:off x="548640" y="1600200"/>
+            <a:ext cx="566928" cy="566928"/>
+          </a:xfrm>
+          <a:prstGeom prst="roundRect">
+            <a:avLst>
+              <a:gd name="adj" fmla="val 16129"/>
+            </a:avLst>
+          </a:prstGeom>
+          <a:solidFill>
+            <a:srgbClr val="EAEEF3"/>
+          </a:solidFill>
+          <a:ln w="12700">
+            <a:solidFill>
+              <a:srgbClr val="EAEEF3"/>
+            </a:solidFill>
+            <a:prstDash val="solid"/>
+          </a:ln>
+        </p:spPr>
+      </p:sp>
+      <p:pic>
+        <p:nvPicPr>
+          <p:cNvPr id="6" name="Image 1" descr="preencoded.png"/>
+          <p:cNvPicPr>
+            <a:picLocks noChangeAspect="1"/>
+          </p:cNvPicPr>
+          <p:nvPr/>
+        </p:nvPicPr>
+        <p:blipFill>
+          <a:blip r:embed="rId4"/>
+          <a:stretch>
+            <a:fillRect/>
+          </a:stretch>
+        </p:blipFill>
+        <p:spPr>
+          <a:xfrm>
+            <a:off x="673364" y="1724924"/>
+            <a:ext cx="317480" cy="317480"/>
+          </a:xfrm>
+          <a:prstGeom prst="rect">
+            <a:avLst/>
+          </a:prstGeom>
+        </p:spPr>
+      </p:pic>
+      <p:sp>
+        <p:nvSpPr>
+          <p:cNvPr id="7" name="Text 3"/>
+          <p:cNvSpPr txBox="1"/>
+          <p:nvPr/>
+        </p:nvSpPr>
+        <p:spPr>
+          <a:xfrm>
+            <a:off x="1325880" y="1581912"/>
+            <a:ext cx="5760720" cy="310896"/>
+          </a:xfrm>
+          <a:prstGeom prst="rect">
+            <a:avLst/>
+          </a:prstGeom>
+          <a:noFill/>
+          <a:ln/>
+        </p:spPr>
+        <p:txBody>
+          <a:bodyPr wrap="square" lIns="0" tIns="0" rIns="0" bIns="0" rtlCol="0" anchor="t"/>
+          <a:lstStyle/>
+          <a:p>
+            <a:pPr marL="0" indent="0">
+              <a:buNone/>
+            </a:pPr>
+            <a:r>
+              <a:rPr lang="ko-KR" sz="1500" b="1" dirty="0">
+                <a:solidFill>
+                  <a:srgbClr val="151A21"/>
+                </a:solidFill>
+                <a:latin typeface="Arial" pitchFamily="34" charset="0"/>
+                <a:ea typeface="맑은 고딕" pitchFamily="34" charset="-122"/>
+                <a:cs typeface="Arial" pitchFamily="34" charset="-120"/>
+              </a:rPr>
+              <a:t>24시간 무중단 호텔 운영</a:t>
+            </a:r>
+            <a:endParaRPr lang="en-US" sz="1500" dirty="0"/>
+          </a:p>
+        </p:txBody>
+      </p:sp>
+      <p:sp>
+        <p:nvSpPr>
+          <p:cNvPr id="8" name="Text 4"/>
+          <p:cNvSpPr txBox="1"/>
+          <p:nvPr/>
+        </p:nvSpPr>
+        <p:spPr>
+          <a:xfrm>
+            <a:off x="1325880" y="1929384"/>
+            <a:ext cx="5760720" cy="621792"/>
+          </a:xfrm>
+          <a:prstGeom prst="rect">
+            <a:avLst/>
+          </a:prstGeom>
+          <a:noFill/>
+          <a:ln/>
+        </p:spPr>
+        <p:txBody>
+          <a:bodyPr wrap="square" lIns="0" tIns="0" rIns="0" bIns="0" rtlCol="0" anchor="t"/>
+          <a:lstStyle/>
+          <a:p>
+            <a:pPr marL="0" indent="0">
+              <a:buNone/>
+            </a:pPr>
+            <a:r>
+              <a:rPr lang="ko-KR" sz="1200" dirty="0">
+                <a:solidFill>
+                  <a:srgbClr val="5E6978"/>
+                </a:solidFill>
+                <a:latin typeface="Calibri" pitchFamily="34" charset="0"/>
+                <a:ea typeface="맑은 고딕" pitchFamily="34" charset="-122"/>
+                <a:cs typeface="Calibri" pitchFamily="34" charset="-120"/>
+              </a:rPr>
+              <a:t>고객 개인정보, 결제 처리, 프런트 및 백오피스 시스템은 24시간 가용성과 보호가 유지되어야 합니다.</a:t>
+            </a:r>
+            <a:endParaRPr lang="en-US" sz="1200" dirty="0"/>
+          </a:p>
+        </p:txBody>
+      </p:sp>
+      <p:sp>
+        <p:nvSpPr>
+          <p:cNvPr id="9" name="Shape 5"/>
+          <p:cNvSpPr/>
+          <p:nvPr/>
+        </p:nvSpPr>
+        <p:spPr>
+          <a:xfrm>
+            <a:off x="548640" y="2697480"/>
+            <a:ext cx="566928" cy="566928"/>
+          </a:xfrm>
+          <a:prstGeom prst="roundRect">
+            <a:avLst>
+              <a:gd name="adj" fmla="val 16129"/>
+            </a:avLst>
+          </a:prstGeom>
+          <a:solidFill>
+            <a:srgbClr val="EAEEF3"/>
+          </a:solidFill>
+          <a:ln w="12700">
+            <a:solidFill>
+              <a:srgbClr val="EAEEF3"/>
+            </a:solidFill>
+            <a:prstDash val="solid"/>
+          </a:ln>
+        </p:spPr>
+      </p:sp>
+      <p:pic>
+        <p:nvPicPr>
+          <p:cNvPr id="10" name="Image 2" descr="preencoded.png"/>
+          <p:cNvPicPr>
+            <a:picLocks noChangeAspect="1"/>
+          </p:cNvPicPr>
+          <p:nvPr/>
+        </p:nvPicPr>
+        <p:blipFill>
+          <a:blip r:embed="rId5"/>
+          <a:stretch>
+            <a:fillRect/>
+          </a:stretch>
+        </p:blipFill>
+        <p:spPr>
+          <a:xfrm>
+            <a:off x="673364" y="2822204"/>
+            <a:ext cx="317480" cy="317480"/>
+          </a:xfrm>
+          <a:prstGeom prst="rect">
+            <a:avLst/>
+          </a:prstGeom>
+        </p:spPr>
+      </p:pic>
+      <p:sp>
+        <p:nvSpPr>
+          <p:cNvPr id="11" name="Text 6"/>
+          <p:cNvSpPr txBox="1"/>
+          <p:nvPr/>
+        </p:nvSpPr>
+        <p:spPr>
+          <a:xfrm>
+            <a:off x="1325880" y="2679192"/>
+            <a:ext cx="5760720" cy="310896"/>
+          </a:xfrm>
+          <a:prstGeom prst="rect">
+            <a:avLst/>
+          </a:prstGeom>
+          <a:noFill/>
+          <a:ln/>
+        </p:spPr>
+        <p:txBody>
+          <a:bodyPr wrap="square" lIns="0" tIns="0" rIns="0" bIns="0" rtlCol="0" anchor="t"/>
+          <a:lstStyle/>
+          <a:p>
+            <a:pPr marL="0" indent="0">
+              <a:buNone/>
+            </a:pPr>
+            <a:r>
+              <a:rPr lang="ko-KR" sz="1500" b="1" dirty="0">
+                <a:solidFill>
+                  <a:srgbClr val="151A21"/>
+                </a:solidFill>
+                <a:latin typeface="Arial" pitchFamily="34" charset="0"/>
+                <a:ea typeface="맑은 고딕" pitchFamily="34" charset="-122"/>
+                <a:cs typeface="Arial" pitchFamily="34" charset="-120"/>
+              </a:rPr>
+              <a:t>제한적인 현장 보안 인력</a:t>
+            </a:r>
+            <a:endParaRPr lang="en-US" sz="1500" dirty="0"/>
+          </a:p>
+        </p:txBody>
+      </p:sp>
+      <p:sp>
+        <p:nvSpPr>
+          <p:cNvPr id="12" name="Text 7"/>
+          <p:cNvSpPr txBox="1"/>
+          <p:nvPr/>
+        </p:nvSpPr>
+        <p:spPr>
+          <a:xfrm>
+            <a:off x="1325880" y="3026664"/>
+            <a:ext cx="5760720" cy="621792"/>
+          </a:xfrm>
+          <a:prstGeom prst="rect">
+            <a:avLst/>
+          </a:prstGeom>
+          <a:noFill/>
+          <a:ln/>
+        </p:spPr>
+        <p:txBody>
+          <a:bodyPr wrap="square" lIns="0" tIns="0" rIns="0" bIns="0" rtlCol="0" anchor="t"/>
+          <a:lstStyle/>
+          <a:p>
+            <a:pPr marL="0" indent="0">
+              <a:buNone/>
+            </a:pPr>
+            <a:r>
+              <a:rPr lang="ko-KR" sz="1200" dirty="0">
+                <a:solidFill>
+                  <a:srgbClr val="5E6978"/>
+                </a:solidFill>
+                <a:latin typeface="Calibri" pitchFamily="34" charset="0"/>
+                <a:ea typeface="맑은 고딕" pitchFamily="34" charset="-122"/>
+                <a:cs typeface="Calibri" pitchFamily="34" charset="-120"/>
+              </a:rPr>
+              <a:t>전담 보안 운영팀이 없어 수동 패치와 건별 사고 조사를 지속하기 어렵습니다.</a:t>
+            </a:r>
+            <a:endParaRPr lang="en-US" sz="1200" dirty="0"/>
+          </a:p>
+        </p:txBody>
+      </p:sp>
+      <p:sp>
+        <p:nvSpPr>
+          <p:cNvPr id="13" name="Shape 8"/>
+          <p:cNvSpPr/>
+          <p:nvPr/>
+        </p:nvSpPr>
+        <p:spPr>
+          <a:xfrm>
+            <a:off x="548640" y="3794760"/>
+            <a:ext cx="566928" cy="566928"/>
+          </a:xfrm>
+          <a:prstGeom prst="roundRect">
+            <a:avLst>
+              <a:gd name="adj" fmla="val 16129"/>
+            </a:avLst>
+          </a:prstGeom>
+          <a:solidFill>
+            <a:srgbClr val="EAEEF3"/>
+          </a:solidFill>
+          <a:ln w="12700">
+            <a:solidFill>
+              <a:srgbClr val="EAEEF3"/>
+            </a:solidFill>
+            <a:prstDash val="solid"/>
+          </a:ln>
+        </p:spPr>
+      </p:sp>
+      <p:pic>
+        <p:nvPicPr>
+          <p:cNvPr id="14" name="Image 3" descr="preencoded.png"/>
+          <p:cNvPicPr>
+            <a:picLocks noChangeAspect="1"/>
+          </p:cNvPicPr>
+          <p:nvPr/>
+        </p:nvPicPr>
+        <p:blipFill>
+          <a:blip r:embed="rId6"/>
+          <a:stretch>
+            <a:fillRect/>
+          </a:stretch>
+        </p:blipFill>
+        <p:spPr>
+          <a:xfrm>
+            <a:off x="673364" y="3919484"/>
+            <a:ext cx="317480" cy="317480"/>
+          </a:xfrm>
+          <a:prstGeom prst="rect">
+            <a:avLst/>
+          </a:prstGeom>
+        </p:spPr>
+      </p:pic>
+      <p:sp>
+        <p:nvSpPr>
+          <p:cNvPr id="15" name="Text 9"/>
+          <p:cNvSpPr txBox="1"/>
+          <p:nvPr/>
+        </p:nvSpPr>
+        <p:spPr>
+          <a:xfrm>
+            <a:off x="1325880" y="3776472"/>
+            <a:ext cx="5760720" cy="310896"/>
+          </a:xfrm>
+          <a:prstGeom prst="rect">
+            <a:avLst/>
+          </a:prstGeom>
+          <a:noFill/>
+          <a:ln/>
+        </p:spPr>
+        <p:txBody>
+          <a:bodyPr wrap="square" lIns="0" tIns="0" rIns="0" bIns="0" rtlCol="0" anchor="t"/>
+          <a:lstStyle/>
+          <a:p>
+            <a:pPr marL="0" indent="0">
+              <a:buNone/>
+            </a:pPr>
+            <a:r>
+              <a:rPr lang="ko-KR" sz="1500" b="1" dirty="0">
+                <a:solidFill>
+                  <a:srgbClr val="151A21"/>
+                </a:solidFill>
+                <a:latin typeface="Arial" pitchFamily="34" charset="0"/>
+                <a:ea typeface="맑은 고딕" pitchFamily="34" charset="-122"/>
+                <a:cs typeface="Arial" pitchFamily="34" charset="-120"/>
+              </a:rPr>
+              <a:t>스캔 위주의 보호</a:t>
+            </a:r>
+            <a:endParaRPr lang="en-US" sz="1500" dirty="0"/>
+          </a:p>
+        </p:txBody>
+      </p:sp>
+      <p:sp>
+        <p:nvSpPr>
+          <p:cNvPr id="16" name="Text 10"/>
+          <p:cNvSpPr txBox="1"/>
+          <p:nvPr/>
+        </p:nvSpPr>
+        <p:spPr>
+          <a:xfrm>
+            <a:off x="1325880" y="4123944"/>
+            <a:ext cx="5760720" cy="621792"/>
+          </a:xfrm>
+          <a:prstGeom prst="rect">
+            <a:avLst/>
+          </a:prstGeom>
+          <a:noFill/>
+          <a:ln/>
+        </p:spPr>
+        <p:txBody>
+          <a:bodyPr wrap="square" lIns="0" tIns="0" rIns="0" bIns="0" rtlCol="0" anchor="t"/>
+          <a:lstStyle/>
+          <a:p>
+            <a:pPr marL="0" indent="0">
+              <a:buNone/>
+            </a:pPr>
+            <a:r>
+              <a:rPr lang="ko-KR" sz="1200" dirty="0">
+                <a:solidFill>
+                  <a:srgbClr val="5E6978"/>
+                </a:solidFill>
+                <a:latin typeface="Calibri" pitchFamily="34" charset="0"/>
+                <a:ea typeface="맑은 고딕" pitchFamily="34" charset="-122"/>
+                <a:cs typeface="Calibri" pitchFamily="34" charset="-120"/>
+              </a:rPr>
+              <a:t>Nessus는 취약점을 식별하지만 악성코드를 차단하거나 진행 중인 공격을 막지는 못합니다. 모든 후속 조치는 수작업입니다.</a:t>
+            </a:r>
+            <a:r>
+              <a:rPr lang="en-US" altLang="ko-KR" sz="1200" dirty="0">
+                <a:solidFill>
+                  <a:srgbClr val="5E6978"/>
+                </a:solidFill>
+                <a:latin typeface="Calibri" pitchFamily="34" charset="0"/>
+                <a:ea typeface="맑은 고딕" pitchFamily="34" charset="-122"/>
+                <a:cs typeface="Calibri" pitchFamily="34" charset="-120"/>
+              </a:rPr>
+              <a:t> </a:t>
+            </a:r>
+            <a:r>
+              <a:rPr lang="ko-KR" altLang="en-US" sz="1200" dirty="0">
+                <a:solidFill>
+                  <a:srgbClr val="5E6978"/>
+                </a:solidFill>
+                <a:latin typeface="Calibri" pitchFamily="34" charset="0"/>
+                <a:ea typeface="맑은 고딕" pitchFamily="34" charset="-122"/>
+                <a:cs typeface="Calibri" pitchFamily="34" charset="-120"/>
+              </a:rPr>
+              <a:t>추가적으로 스캔과 스캔사이의 무방비 시간이 존재합니다</a:t>
+            </a:r>
+            <a:r>
+              <a:rPr lang="en-US" altLang="ko-KR" sz="1200" dirty="0">
+                <a:solidFill>
+                  <a:srgbClr val="5E6978"/>
+                </a:solidFill>
+                <a:latin typeface="Calibri" pitchFamily="34" charset="0"/>
+                <a:ea typeface="맑은 고딕" pitchFamily="34" charset="-122"/>
+                <a:cs typeface="Calibri" pitchFamily="34" charset="-120"/>
+              </a:rPr>
+              <a:t>.</a:t>
+            </a:r>
+            <a:endParaRPr lang="en-US" sz="1200" dirty="0"/>
+          </a:p>
+        </p:txBody>
+      </p:sp>
+      <p:sp>
+        <p:nvSpPr>
+          <p:cNvPr id="17" name="Shape 11"/>
+          <p:cNvSpPr/>
+          <p:nvPr/>
+        </p:nvSpPr>
+        <p:spPr>
+          <a:xfrm>
+            <a:off x="548640" y="4892040"/>
+            <a:ext cx="566928" cy="566928"/>
+          </a:xfrm>
+          <a:prstGeom prst="roundRect">
+            <a:avLst>
+              <a:gd name="adj" fmla="val 16129"/>
+            </a:avLst>
+          </a:prstGeom>
+          <a:solidFill>
+            <a:srgbClr val="EAEEF3"/>
+          </a:solidFill>
+          <a:ln w="12700">
+            <a:solidFill>
+              <a:srgbClr val="EAEEF3"/>
+            </a:solidFill>
+            <a:prstDash val="solid"/>
+          </a:ln>
+        </p:spPr>
+      </p:sp>
+      <p:pic>
+        <p:nvPicPr>
+          <p:cNvPr id="18" name="Image 4" descr="preencoded.png"/>
+          <p:cNvPicPr>
+            <a:picLocks noChangeAspect="1"/>
+          </p:cNvPicPr>
+          <p:nvPr/>
+        </p:nvPicPr>
+        <p:blipFill>
+          <a:blip r:embed="rId7"/>
+          <a:stretch>
+            <a:fillRect/>
+          </a:stretch>
+        </p:blipFill>
+        <p:spPr>
+          <a:xfrm>
+            <a:off x="673364" y="5016764"/>
+            <a:ext cx="317480" cy="317480"/>
+          </a:xfrm>
+          <a:prstGeom prst="rect">
+            <a:avLst/>
+          </a:prstGeom>
+        </p:spPr>
+      </p:pic>
+      <p:sp>
+        <p:nvSpPr>
+          <p:cNvPr id="19" name="Text 12"/>
+          <p:cNvSpPr txBox="1"/>
+          <p:nvPr/>
+        </p:nvSpPr>
+        <p:spPr>
+          <a:xfrm>
+            <a:off x="1325880" y="4873752"/>
+            <a:ext cx="5760720" cy="310896"/>
+          </a:xfrm>
+          <a:prstGeom prst="rect">
+            <a:avLst/>
+          </a:prstGeom>
+          <a:noFill/>
+          <a:ln/>
+        </p:spPr>
+        <p:txBody>
+          <a:bodyPr wrap="square" lIns="0" tIns="0" rIns="0" bIns="0" rtlCol="0" anchor="t"/>
+          <a:lstStyle/>
+          <a:p>
+            <a:pPr marL="0" indent="0">
+              <a:buNone/>
+            </a:pPr>
+            <a:r>
+              <a:rPr lang="ko-KR" sz="1500" b="1" dirty="0">
+                <a:solidFill>
+                  <a:srgbClr val="151A21"/>
+                </a:solidFill>
+                <a:latin typeface="Arial" pitchFamily="34" charset="0"/>
+                <a:ea typeface="맑은 고딕" pitchFamily="34" charset="-122"/>
+                <a:cs typeface="Arial" pitchFamily="34" charset="-120"/>
+              </a:rPr>
+              <a:t>공격자에게 가치 높은 표적</a:t>
+            </a:r>
+            <a:endParaRPr lang="en-US" sz="1500" dirty="0"/>
+          </a:p>
+        </p:txBody>
+      </p:sp>
+      <p:sp>
+        <p:nvSpPr>
+          <p:cNvPr id="20" name="Text 13"/>
+          <p:cNvSpPr txBox="1"/>
+          <p:nvPr/>
+        </p:nvSpPr>
+        <p:spPr>
+          <a:xfrm>
+            <a:off x="1325880" y="5221224"/>
+            <a:ext cx="5760720" cy="621792"/>
+          </a:xfrm>
+          <a:prstGeom prst="rect">
+            <a:avLst/>
+          </a:prstGeom>
+          <a:noFill/>
+          <a:ln/>
+        </p:spPr>
+        <p:txBody>
+          <a:bodyPr wrap="square" lIns="0" tIns="0" rIns="0" bIns="0" rtlCol="0" anchor="t"/>
+          <a:lstStyle/>
+          <a:p>
+            <a:pPr marL="0" indent="0">
+              <a:buNone/>
+            </a:pPr>
+            <a:r>
+              <a:rPr lang="ko-KR" sz="1200" dirty="0">
+                <a:solidFill>
+                  <a:srgbClr val="5E6978"/>
+                </a:solidFill>
+                <a:latin typeface="Calibri" pitchFamily="34" charset="0"/>
+                <a:ea typeface="맑은 고딕" pitchFamily="34" charset="-122"/>
+                <a:cs typeface="Calibri" pitchFamily="34" charset="-120"/>
+              </a:rPr>
+              <a:t>호텔은 결제카드 정보와 고객 신원정보를 보유하고 있어 랜섬웨어와 정보 탈취의 주요 표적이 되며, 이는 브랜드 신뢰도에 직접적인 영향을 줍니다.</a:t>
+            </a:r>
+            <a:endParaRPr lang="en-US" sz="1200" dirty="0"/>
+          </a:p>
+        </p:txBody>
+      </p:sp>
+      <p:sp>
+        <p:nvSpPr>
+          <p:cNvPr id="21" name="Shape 14"/>
+          <p:cNvSpPr/>
+          <p:nvPr/>
+        </p:nvSpPr>
+        <p:spPr>
+          <a:xfrm>
+            <a:off x="7452360" y="1554480"/>
+            <a:ext cx="4190695" cy="4434840"/>
+          </a:xfrm>
+          <a:prstGeom prst="roundRect">
+            <a:avLst>
+              <a:gd name="adj" fmla="val 2182"/>
+            </a:avLst>
+          </a:prstGeom>
+          <a:solidFill>
+            <a:srgbClr val="0B0D12"/>
+          </a:solidFill>
+          <a:ln w="12700">
+            <a:solidFill>
+              <a:srgbClr val="0B0D12"/>
+            </a:solidFill>
+            <a:prstDash val="solid"/>
+          </a:ln>
+        </p:spPr>
+      </p:sp>
+      <p:sp>
+        <p:nvSpPr>
+          <p:cNvPr id="22" name="Text 15"/>
+          <p:cNvSpPr txBox="1"/>
+          <p:nvPr/>
+        </p:nvSpPr>
+        <p:spPr>
+          <a:xfrm>
+            <a:off x="7818120" y="1828800"/>
+            <a:ext cx="3459175" cy="274320"/>
+          </a:xfrm>
+          <a:prstGeom prst="rect">
+            <a:avLst/>
+          </a:prstGeom>
+          <a:noFill/>
+          <a:ln/>
+        </p:spPr>
+        <p:txBody>
+          <a:bodyPr wrap="square" lIns="0" tIns="0" rIns="0" bIns="0" rtlCol="0" anchor="t"/>
+          <a:lstStyle/>
+          <a:p>
+            <a:pPr marL="0" indent="0">
+              <a:buNone/>
+            </a:pPr>
+            <a:r>
+              <a:rPr lang="ko-KR" sz="1100" b="1" kern="0" spc="200" dirty="0">
+                <a:solidFill>
+                  <a:srgbClr val="E3202A"/>
+                </a:solidFill>
+                <a:latin typeface="Calibri" pitchFamily="34" charset="0"/>
+                <a:ea typeface="맑은 고딕" pitchFamily="34" charset="-122"/>
+                <a:cs typeface="Calibri" pitchFamily="34" charset="-120"/>
+              </a:rPr>
+              <a:t>리조트에 필요한 것</a:t>
+            </a:r>
+            <a:endParaRPr lang="en-US" sz="1100" dirty="0"/>
+          </a:p>
+        </p:txBody>
+      </p:sp>
+      <p:pic>
+        <p:nvPicPr>
+          <p:cNvPr id="23" name="Image 5" descr="preencoded.png"/>
+          <p:cNvPicPr>
+            <a:picLocks noChangeAspect="1"/>
+          </p:cNvPicPr>
+          <p:nvPr/>
+        </p:nvPicPr>
+        <p:blipFill>
+          <a:blip r:embed="rId8"/>
+          <a:stretch>
+            <a:fillRect/>
+          </a:stretch>
+        </p:blipFill>
+        <p:spPr>
+          <a:xfrm>
+            <a:off x="7818120" y="2322576"/>
+            <a:ext cx="237744" cy="237744"/>
+          </a:xfrm>
+          <a:prstGeom prst="rect">
+            <a:avLst/>
+          </a:prstGeom>
+        </p:spPr>
+      </p:pic>
+      <p:sp>
+        <p:nvSpPr>
+          <p:cNvPr id="24" name="Text 16"/>
+          <p:cNvSpPr txBox="1"/>
+          <p:nvPr/>
+        </p:nvSpPr>
+        <p:spPr>
+          <a:xfrm>
+            <a:off x="8183880" y="2286000"/>
+            <a:ext cx="3093415" cy="329184"/>
+          </a:xfrm>
+          <a:prstGeom prst="rect">
+            <a:avLst/>
+          </a:prstGeom>
+          <a:noFill/>
+          <a:ln/>
+        </p:spPr>
+        <p:txBody>
+          <a:bodyPr wrap="square" lIns="0" tIns="0" rIns="0" bIns="0" rtlCol="0" anchor="ctr"/>
+          <a:lstStyle/>
+          <a:p>
+            <a:pPr marL="0" indent="0">
+              <a:buNone/>
+            </a:pPr>
+            <a:r>
+              <a:rPr lang="ko-KR" sz="1300" dirty="0">
+                <a:solidFill>
+                  <a:srgbClr val="FFFFFF"/>
+                </a:solidFill>
+                <a:latin typeface="Calibri" pitchFamily="34" charset="0"/>
+                <a:ea typeface="맑은 고딕" pitchFamily="34" charset="-122"/>
+                <a:cs typeface="Calibri" pitchFamily="34" charset="-120"/>
+              </a:rPr>
+              <a:t>악성코드·랜섬웨어 자동 차단</a:t>
+            </a:r>
+            <a:endParaRPr lang="en-US" sz="1300" dirty="0"/>
+          </a:p>
+        </p:txBody>
+      </p:sp>
+      <p:pic>
+        <p:nvPicPr>
+          <p:cNvPr id="25" name="Image 6" descr="preencoded.png"/>
+          <p:cNvPicPr>
+            <a:picLocks noChangeAspect="1"/>
+          </p:cNvPicPr>
+          <p:nvPr/>
+        </p:nvPicPr>
+        <p:blipFill>
+          <a:blip r:embed="rId8"/>
+          <a:stretch>
+            <a:fillRect/>
+          </a:stretch>
+        </p:blipFill>
+        <p:spPr>
+          <a:xfrm>
+            <a:off x="7818120" y="2852928"/>
+            <a:ext cx="237744" cy="237744"/>
+          </a:xfrm>
+          <a:prstGeom prst="rect">
+            <a:avLst/>
+          </a:prstGeom>
+        </p:spPr>
+      </p:pic>
+      <p:sp>
+        <p:nvSpPr>
+          <p:cNvPr id="26" name="Text 17"/>
+          <p:cNvSpPr txBox="1"/>
+          <p:nvPr/>
+        </p:nvSpPr>
+        <p:spPr>
+          <a:xfrm>
+            <a:off x="8183880" y="2816352"/>
+            <a:ext cx="3093415" cy="329184"/>
+          </a:xfrm>
+          <a:prstGeom prst="rect">
+            <a:avLst/>
+          </a:prstGeom>
+          <a:noFill/>
+          <a:ln/>
+        </p:spPr>
+        <p:txBody>
+          <a:bodyPr wrap="square" lIns="0" tIns="0" rIns="0" bIns="0" rtlCol="0" anchor="ctr"/>
+          <a:lstStyle/>
+          <a:p>
+            <a:pPr marL="0" indent="0">
+              <a:buNone/>
+            </a:pPr>
+            <a:r>
+              <a:rPr lang="ko-KR" sz="1300" dirty="0">
+                <a:solidFill>
+                  <a:srgbClr val="FFFFFF"/>
+                </a:solidFill>
+                <a:latin typeface="Calibri" pitchFamily="34" charset="0"/>
+                <a:ea typeface="맑은 고딕" pitchFamily="34" charset="-122"/>
+                <a:cs typeface="Calibri" pitchFamily="34" charset="-120"/>
+              </a:rPr>
+              <a:t>공격의 실시간 탐지 및 격리</a:t>
+            </a:r>
+            <a:endParaRPr lang="en-US" sz="1300" dirty="0"/>
+          </a:p>
+        </p:txBody>
+      </p:sp>
+      <p:pic>
+        <p:nvPicPr>
+          <p:cNvPr id="27" name="Image 7" descr="preencoded.png"/>
+          <p:cNvPicPr>
+            <a:picLocks noChangeAspect="1"/>
+          </p:cNvPicPr>
+          <p:nvPr/>
+        </p:nvPicPr>
+        <p:blipFill>
+          <a:blip r:embed="rId8"/>
+          <a:stretch>
+            <a:fillRect/>
+          </a:stretch>
+        </p:blipFill>
+        <p:spPr>
+          <a:xfrm>
+            <a:off x="7818120" y="3383280"/>
+            <a:ext cx="237744" cy="237744"/>
+          </a:xfrm>
+          <a:prstGeom prst="rect">
+            <a:avLst/>
+          </a:prstGeom>
+        </p:spPr>
+      </p:pic>
+      <p:sp>
+        <p:nvSpPr>
+          <p:cNvPr id="28" name="Text 18"/>
+          <p:cNvSpPr txBox="1"/>
+          <p:nvPr/>
+        </p:nvSpPr>
+        <p:spPr>
+          <a:xfrm>
+            <a:off x="8183880" y="3346704"/>
+            <a:ext cx="3093415" cy="329184"/>
+          </a:xfrm>
+          <a:prstGeom prst="rect">
+            <a:avLst/>
+          </a:prstGeom>
+          <a:noFill/>
+          <a:ln/>
+        </p:spPr>
+        <p:txBody>
+          <a:bodyPr wrap="square" lIns="0" tIns="0" rIns="0" bIns="0" rtlCol="0" anchor="ctr"/>
+          <a:lstStyle/>
+          <a:p>
+            <a:pPr marL="0" indent="0">
+              <a:buNone/>
+            </a:pPr>
+            <a:r>
+              <a:rPr lang="ko-KR" sz="1300" dirty="0">
+                <a:solidFill>
+                  <a:srgbClr val="FFFFFF"/>
+                </a:solidFill>
+                <a:latin typeface="Calibri" pitchFamily="34" charset="0"/>
+                <a:ea typeface="맑은 고딕" pitchFamily="34" charset="-122"/>
+                <a:cs typeface="Calibri" pitchFamily="34" charset="-120"/>
+              </a:rPr>
+              <a:t>IT팀의 일상 업무 부담 최소화</a:t>
+            </a:r>
+            <a:endParaRPr lang="en-US" sz="1300" dirty="0"/>
+          </a:p>
+        </p:txBody>
+      </p:sp>
+      <p:pic>
+        <p:nvPicPr>
+          <p:cNvPr id="29" name="Image 8" descr="preencoded.png"/>
+          <p:cNvPicPr>
+            <a:picLocks noChangeAspect="1"/>
+          </p:cNvPicPr>
+          <p:nvPr/>
+        </p:nvPicPr>
+        <p:blipFill>
+          <a:blip r:embed="rId8"/>
+          <a:stretch>
+            <a:fillRect/>
+          </a:stretch>
+        </p:blipFill>
+        <p:spPr>
+          <a:xfrm>
+            <a:off x="7818120" y="3913632"/>
+            <a:ext cx="237744" cy="237744"/>
+          </a:xfrm>
+          <a:prstGeom prst="rect">
+            <a:avLst/>
+          </a:prstGeom>
+        </p:spPr>
+      </p:pic>
+      <p:sp>
+        <p:nvSpPr>
+          <p:cNvPr id="30" name="Text 19"/>
+          <p:cNvSpPr txBox="1"/>
+          <p:nvPr/>
+        </p:nvSpPr>
+        <p:spPr>
+          <a:xfrm>
+            <a:off x="8183880" y="3877056"/>
+            <a:ext cx="3093415" cy="329184"/>
+          </a:xfrm>
+          <a:prstGeom prst="rect">
+            <a:avLst/>
+          </a:prstGeom>
+          <a:noFill/>
+          <a:ln/>
+        </p:spPr>
+        <p:txBody>
+          <a:bodyPr wrap="square" lIns="0" tIns="0" rIns="0" bIns="0" rtlCol="0" anchor="ctr"/>
+          <a:lstStyle/>
+          <a:p>
+            <a:pPr marL="0" indent="0">
+              <a:buNone/>
+            </a:pPr>
+            <a:r>
+              <a:rPr lang="ko-KR" sz="1300" dirty="0">
+                <a:solidFill>
+                  <a:srgbClr val="FFFFFF"/>
+                </a:solidFill>
+                <a:latin typeface="Calibri" pitchFamily="34" charset="0"/>
+                <a:ea typeface="맑은 고딕" pitchFamily="34" charset="-122"/>
+                <a:cs typeface="Calibri" pitchFamily="34" charset="-120"/>
+              </a:rPr>
+              <a:t>24시간 전문가 지원</a:t>
+            </a:r>
+            <a:endParaRPr lang="en-US" sz="1300" dirty="0"/>
+          </a:p>
+        </p:txBody>
+      </p:sp>
+      <p:pic>
+        <p:nvPicPr>
+          <p:cNvPr id="31" name="Image 9" descr="preencoded.png"/>
+          <p:cNvPicPr>
+            <a:picLocks noChangeAspect="1"/>
+          </p:cNvPicPr>
+          <p:nvPr/>
+        </p:nvPicPr>
+        <p:blipFill>
+          <a:blip r:embed="rId8"/>
+          <a:stretch>
+            <a:fillRect/>
+          </a:stretch>
+        </p:blipFill>
+        <p:spPr>
+          <a:xfrm>
+            <a:off x="7818120" y="4443984"/>
+            <a:ext cx="237744" cy="237744"/>
+          </a:xfrm>
+          <a:prstGeom prst="rect">
+            <a:avLst/>
+          </a:prstGeom>
+        </p:spPr>
+      </p:pic>
+      <p:sp>
+        <p:nvSpPr>
+          <p:cNvPr id="32" name="Text 20"/>
+          <p:cNvSpPr txBox="1"/>
+          <p:nvPr/>
+        </p:nvSpPr>
+        <p:spPr>
+          <a:xfrm>
+            <a:off x="8183880" y="4407408"/>
+            <a:ext cx="3093415" cy="329184"/>
+          </a:xfrm>
+          <a:prstGeom prst="rect">
+            <a:avLst/>
+          </a:prstGeom>
+          <a:noFill/>
+          <a:ln/>
+        </p:spPr>
+        <p:txBody>
+          <a:bodyPr wrap="square" lIns="0" tIns="0" rIns="0" bIns="0" rtlCol="0" anchor="ctr"/>
+          <a:lstStyle/>
+          <a:p>
+            <a:pPr marL="0" indent="0">
+              <a:buNone/>
+            </a:pPr>
+            <a:r>
+              <a:rPr lang="ko-KR" sz="1300" dirty="0">
+                <a:solidFill>
+                  <a:srgbClr val="FFFFFF"/>
+                </a:solidFill>
+                <a:latin typeface="Calibri" pitchFamily="34" charset="0"/>
+                <a:ea typeface="맑은 고딕" pitchFamily="34" charset="-122"/>
+                <a:cs typeface="Calibri" pitchFamily="34" charset="-120"/>
+              </a:rPr>
+              <a:t>경영진 및 감사를 위한 명확한 보고</a:t>
+            </a:r>
+            <a:endParaRPr lang="en-US" sz="1300" dirty="0"/>
+          </a:p>
+        </p:txBody>
+      </p:sp>
+      <p:sp>
+        <p:nvSpPr>
+          <p:cNvPr id="33" name="Text 21"/>
+          <p:cNvSpPr txBox="1"/>
+          <p:nvPr/>
+        </p:nvSpPr>
+        <p:spPr>
+          <a:xfrm>
+            <a:off x="7818120" y="5120640"/>
+            <a:ext cx="3459175" cy="548640"/>
+          </a:xfrm>
+          <a:prstGeom prst="rect">
+            <a:avLst/>
+          </a:prstGeom>
+          <a:noFill/>
+          <a:ln/>
+        </p:spPr>
+        <p:txBody>
+          <a:bodyPr wrap="square" lIns="0" tIns="0" rIns="0" bIns="0" rtlCol="0" anchor="ctr"/>
+          <a:lstStyle/>
+          <a:p>
+            <a:pPr marL="0" indent="0">
+              <a:buNone/>
+            </a:pPr>
+            <a:r>
+              <a:rPr lang="ko-KR" sz="1400" b="1" i="1" dirty="0">
+                <a:solidFill>
+                  <a:srgbClr val="FFFFFF"/>
+                </a:solidFill>
+                <a:latin typeface="Calibri" pitchFamily="34" charset="0"/>
+                <a:ea typeface="맑은 고딕" pitchFamily="34" charset="-122"/>
+                <a:cs typeface="Calibri" pitchFamily="34" charset="-120"/>
+              </a:rPr>
+              <a:t>목표는 더 많은 보고서가 아니라, 더 적은 사고입니다.</a:t>
+            </a:r>
+            <a:endParaRPr lang="en-US" sz="1400" dirty="0"/>
+          </a:p>
+        </p:txBody>
+      </p:sp>
+      <p:sp>
+        <p:nvSpPr>
+          <p:cNvPr id="34" name="Text 22"/>
+          <p:cNvSpPr txBox="1"/>
+          <p:nvPr/>
+        </p:nvSpPr>
+        <p:spPr>
+          <a:xfrm>
+            <a:off x="548640" y="6446520"/>
+            <a:ext cx="7315200" cy="219456"/>
+          </a:xfrm>
+          <a:prstGeom prst="rect">
+            <a:avLst/>
+          </a:prstGeom>
+          <a:noFill/>
+          <a:ln/>
+        </p:spPr>
+        <p:txBody>
+          <a:bodyPr wrap="square" lIns="0" tIns="0" rIns="0" bIns="0" rtlCol="0" anchor="ctr"/>
+          <a:lstStyle/>
+          <a:p>
+            <a:pPr marL="0" indent="0">
+              <a:buNone/>
+            </a:pPr>
+            <a:r>
+              <a:rPr lang="ko-KR" sz="900" dirty="0">
+                <a:solidFill>
+                  <a:srgbClr val="5E6978"/>
+                </a:solidFill>
+                <a:latin typeface="Calibri" pitchFamily="34" charset="0"/>
+                <a:ea typeface="맑은 고딕" pitchFamily="34" charset="-122"/>
+                <a:cs typeface="Calibri" pitchFamily="34" charset="-120"/>
+              </a:rPr>
+              <a:t>02   |   CrowdStrike Falcon 제안서  ·  웨스틴 리조트 괌</a:t>
+            </a:r>
+            <a:endParaRPr lang="en-US" sz="900" dirty="0"/>
+          </a:p>
+        </p:txBody>
+      </p:sp>
+      <p:pic>
+        <p:nvPicPr>
+          <p:cNvPr id="35" name="Image 10" descr="/private/tmp/claude-501/-Users-jihanvin-Desktop-NIVNAH-AI/16a96446-d9b3-40e2-af9e-a3011ae3db84/scratchpad/assets/secukorea_dark.png"/>
+          <p:cNvPicPr>
+            <a:picLocks noChangeAspect="1"/>
+          </p:cNvPicPr>
+          <p:nvPr/>
+        </p:nvPicPr>
+        <p:blipFill>
+          <a:blip r:embed="rId9"/>
+          <a:stretch>
+            <a:fillRect/>
+          </a:stretch>
+        </p:blipFill>
+        <p:spPr>
+          <a:xfrm>
+            <a:off x="10661904" y="6400800"/>
+            <a:ext cx="978408" cy="233172"/>
+          </a:xfrm>
+          <a:prstGeom prst="rect">
+            <a:avLst/>
+          </a:prstGeom>
+        </p:spPr>
+      </p:pic>
+    </p:spTree>
+  </p:cSld>
+  <p:clrMapOvr>
+    <a:masterClrMapping/>
+  </p:clrMapOvr>
+</p:sld>
+</file>
+
+<file path=ppt/slides/slide3.xml><?xml version="1.0" encoding="utf-8"?>
 <p:sld xmlns:a="http://schemas.openxmlformats.org/drawingml/2006/main" xmlns:r="http://schemas.openxmlformats.org/officeDocument/2006/relationships" xmlns:p="http://schemas.openxmlformats.org/presentationml/2006/main">
   <p:cSld name="Slide 4">
     <p:bg>
@@ -1852,7 +3022,7 @@
                 <a:ea typeface="Arial" pitchFamily="34" charset="-122"/>
                 <a:cs typeface="Arial" pitchFamily="34" charset="-120"/>
               </a:rPr>
-              <a:t>01   보안 공격 트렌드</a:t>
+              <a:t>02   보안 공격 트렌드</a:t>
             </a:r>
             <a:endParaRPr lang="en-US" sz="1100" dirty="0"/>
           </a:p>
@@ -2020,7 +3190,7 @@
                 <a:ea typeface="Calibri" pitchFamily="34" charset="-122"/>
                 <a:cs typeface="Calibri" pitchFamily="34" charset="-120"/>
               </a:rPr>
-              <a:t>해커가 PC 한 대에서 다른 시스템으로 퍼지는 최단 시간</a:t>
+              <a:t>해커가 PC 한 대에서 다른 시스템으로 퍼진 역대 최단 시간 (평균 29분)</a:t>
             </a:r>
             <a:endParaRPr lang="en-US" sz="1200" dirty="0"/>
           </a:p>
@@ -2125,7 +3295,7 @@
                 <a:ea typeface="Calibri" pitchFamily="34" charset="-122"/>
                 <a:cs typeface="Calibri" pitchFamily="34" charset="-120"/>
               </a:rPr>
-              <a:t>AI를 활용한 해커 공격 증가율 (2025)</a:t>
+              <a:t>AI를 활용한 해커 공격의 전년 대비 증가율 (2025년)</a:t>
             </a:r>
             <a:endParaRPr lang="en-US" sz="1200" dirty="0"/>
           </a:p>
@@ -2230,7 +3400,7 @@
                 <a:ea typeface="Calibri" pitchFamily="34" charset="-122"/>
                 <a:cs typeface="Calibri" pitchFamily="34" charset="-120"/>
               </a:rPr>
-              <a:t>아직 알려지지 않은 보안 허점을 노린 공격 증가율</a:t>
+              <a:t>공개 전 보안 허점(제로데이)을 노린 공격의 전년 대비 증가율</a:t>
             </a:r>
             <a:endParaRPr lang="en-US" sz="1200" dirty="0"/>
           </a:p>
@@ -2335,7 +3505,7 @@
                 <a:ea typeface="Calibri" pitchFamily="34" charset="-122"/>
                 <a:cs typeface="Calibri" pitchFamily="34" charset="-120"/>
               </a:rPr>
-              <a:t>지난 1년간 랜섬웨어 피해를 입은 기업 비율</a:t>
+              <a:t>설문 기업 1,100곳 중 지난 1년간 랜섬웨어 공격을 받은 비율</a:t>
             </a:r>
             <a:endParaRPr lang="en-US" sz="1200" dirty="0"/>
           </a:p>
@@ -2800,7 +3970,7 @@
                 <a:ea typeface="Calibri" pitchFamily="34" charset="-122"/>
                 <a:cs typeface="Calibri" pitchFamily="34" charset="-120"/>
               </a:rPr>
-              <a:t>출처: CrowdStrike 2026 Global Threat Report; CrowdStrike State of Ransomware Survey.</a:t>
+              <a:t>출처: CrowdStrike 2026 Global Threat Report (2025년 데이터); CrowdStrike 2025 State of Ransomware Survey (보안 책임자 1,100명).</a:t>
             </a:r>
             <a:endParaRPr lang="en-US" sz="800" dirty="0"/>
           </a:p>
@@ -2839,7 +4009,7 @@
                 <a:ea typeface="Calibri" pitchFamily="34" charset="-122"/>
                 <a:cs typeface="Calibri" pitchFamily="34" charset="-120"/>
               </a:rPr>
-              <a:t>02   |   CrowdStrike Falcon 제안서  ·  웨스틴 리조트 괌</a:t>
+              <a:t>03   |   CrowdStrike Falcon 제안서  ·  웨스틴 리조트 괌</a:t>
             </a:r>
             <a:endParaRPr lang="en-US" sz="900" dirty="0"/>
           </a:p>
@@ -2877,7 +4047,7 @@
 </p:sld>
 </file>
 
-<file path=ppt/slides/slide3.xml><?xml version="1.0" encoding="utf-8"?>
+<file path=ppt/slides/slide4.xml><?xml version="1.0" encoding="utf-8"?>
 <p:sld xmlns:a="http://schemas.openxmlformats.org/drawingml/2006/main" xmlns:r="http://schemas.openxmlformats.org/officeDocument/2006/relationships" xmlns:p="http://schemas.openxmlformats.org/presentationml/2006/main">
   <p:cSld name="Slide 6">
     <p:bg>
@@ -2935,7 +4105,7 @@
                 <a:ea typeface="Arial" pitchFamily="34" charset="-122"/>
                 <a:cs typeface="Arial" pitchFamily="34" charset="-120"/>
               </a:rPr>
-              <a:t>02   쉽게 이해하기</a:t>
+              <a:t>03   쉽게 이해하기</a:t>
             </a:r>
             <a:endParaRPr lang="en-US" sz="1100" dirty="0"/>
           </a:p>
@@ -3577,9 +4747,49 @@
                 <a:ea typeface="Calibri" pitchFamily="34" charset="-122"/>
                 <a:cs typeface="Calibri" pitchFamily="34" charset="-120"/>
               </a:rPr>
-              <a:t>모든 PC의 센서가 위험을 즉시 포착해 자동으로 막고, 24시간 대기 중인 전문가에게 바로 알립니다.</a:t>
-            </a:r>
-            <a:endParaRPr lang="en-US" sz="1250" dirty="0"/>
+              <a:t>모든 PC의 센서가 위험을 즉시 포착해 자동으로 막고, 24시간 대기 중인 전문가에게 </a:t>
+            </a:r>
+            <a:r>
+              <a:rPr lang="en-US" sz="1250" dirty="0" err="1">
+                <a:solidFill>
+                  <a:srgbClr val="5E6978"/>
+                </a:solidFill>
+                <a:latin typeface="Calibri" pitchFamily="34" charset="0"/>
+                <a:ea typeface="Calibri" pitchFamily="34" charset="-122"/>
+                <a:cs typeface="Calibri" pitchFamily="34" charset="-120"/>
+              </a:rPr>
+              <a:t>바로</a:t>
+            </a:r>
+            <a:r>
+              <a:rPr lang="en-US" sz="1250" dirty="0">
+                <a:solidFill>
+                  <a:srgbClr val="5E6978"/>
+                </a:solidFill>
+                <a:latin typeface="Calibri" pitchFamily="34" charset="0"/>
+                <a:ea typeface="Calibri" pitchFamily="34" charset="-122"/>
+                <a:cs typeface="Calibri" pitchFamily="34" charset="-120"/>
+              </a:rPr>
+              <a:t> </a:t>
+            </a:r>
+            <a:r>
+              <a:rPr lang="en-US" sz="1250" dirty="0" err="1">
+                <a:solidFill>
+                  <a:srgbClr val="5E6978"/>
+                </a:solidFill>
+                <a:latin typeface="Calibri" pitchFamily="34" charset="0"/>
+                <a:ea typeface="Calibri" pitchFamily="34" charset="-122"/>
+                <a:cs typeface="Calibri" pitchFamily="34" charset="-120"/>
+              </a:rPr>
+              <a:t>알립니다</a:t>
+            </a:r>
+            <a:endParaRPr lang="en-US" sz="1250" dirty="0">
+              <a:solidFill>
+                <a:srgbClr val="5E6978"/>
+              </a:solidFill>
+              <a:latin typeface="Calibri" pitchFamily="34" charset="0"/>
+              <a:ea typeface="Calibri" pitchFamily="34" charset="-122"/>
+              <a:cs typeface="Calibri" pitchFamily="34" charset="-120"/>
+            </a:endParaRPr>
           </a:p>
         </p:txBody>
       </p:sp>
@@ -3857,7 +5067,7 @@
           <a:bodyPr wrap="square" lIns="0" tIns="0" rIns="0" bIns="0" rtlCol="0" anchor="ctr"/>
           <a:lstStyle/>
           <a:p>
-            <a:pPr algn="ctr" marL="0" indent="0">
+            <a:pPr marL="0" indent="0" algn="ctr">
               <a:buNone/>
             </a:pPr>
             <a:r>
@@ -3880,21 +5090,21 @@
                 <a:ea typeface="Calibri" pitchFamily="34" charset="-122"/>
                 <a:cs typeface="Calibri" pitchFamily="34" charset="-120"/>
               </a:rPr>
-              <a:t>는 무엇이 문제인지 알려주고,  </a:t>
-            </a:r>
-            <a:r>
-              <a:rPr lang="en-US" sz="1600" b="1" dirty="0">
-                <a:solidFill>
-                  <a:srgbClr val="E3202A"/>
+              <a:t>는 무엇이 </a:t>
+            </a:r>
+            <a:r>
+              <a:rPr lang="en-US" sz="1600">
+                <a:solidFill>
+                  <a:srgbClr val="5E6978"/>
                 </a:solidFill>
                 <a:latin typeface="Calibri" pitchFamily="34" charset="0"/>
                 <a:ea typeface="Calibri" pitchFamily="34" charset="-122"/>
                 <a:cs typeface="Calibri" pitchFamily="34" charset="-120"/>
               </a:rPr>
-              <a:t>Falcon</a:t>
-            </a:r>
-            <a:r>
-              <a:rPr lang="en-US" sz="1600" dirty="0">
+              <a:t>문제인지 알려</a:t>
+            </a:r>
+            <a:r>
+              <a:rPr lang="ko-KR" altLang="en-US" sz="1600">
                 <a:solidFill>
                   <a:srgbClr val="5E6978"/>
                 </a:solidFill>
@@ -3902,38 +5112,10 @@
                 <a:ea typeface="Calibri" pitchFamily="34" charset="-122"/>
                 <a:cs typeface="Calibri" pitchFamily="34" charset="-120"/>
               </a:rPr>
-              <a:t>은 24시간 공격을 막아냅니다.</a:t>
-            </a:r>
-            <a:endParaRPr lang="en-US" sz="1600" dirty="0"/>
-          </a:p>
-        </p:txBody>
-      </p:sp>
-      <p:sp>
-        <p:nvSpPr>
-          <p:cNvPr id="43" name="Text 32"/>
-          <p:cNvSpPr txBox="1"/>
-          <p:nvPr/>
-        </p:nvSpPr>
-        <p:spPr>
-          <a:xfrm>
-            <a:off x="548640" y="6446520"/>
-            <a:ext cx="7315200" cy="219456"/>
-          </a:xfrm>
-          <a:prstGeom prst="rect">
-            <a:avLst/>
-          </a:prstGeom>
-          <a:noFill/>
-          <a:ln/>
-        </p:spPr>
-        <p:txBody>
-          <a:bodyPr wrap="square" lIns="0" tIns="0" rIns="0" bIns="0" rtlCol="0" anchor="ctr"/>
-          <a:lstStyle/>
-          <a:p>
-            <a:pPr marL="0" indent="0">
-              <a:buNone/>
-            </a:pPr>
-            <a:r>
-              <a:rPr lang="en-US" sz="900" dirty="0">
+              <a:t>만</a:t>
+            </a:r>
+            <a:r>
+              <a:rPr lang="en-US" sz="1600">
                 <a:solidFill>
                   <a:srgbClr val="5E6978"/>
                 </a:solidFill>
@@ -3941,7 +5123,79 @@
                 <a:ea typeface="Calibri" pitchFamily="34" charset="-122"/>
                 <a:cs typeface="Calibri" pitchFamily="34" charset="-120"/>
               </a:rPr>
-              <a:t>03   |   CrowdStrike Falcon 제안서  ·  웨스틴 리조트 괌</a:t>
+              <a:t>주고</a:t>
+            </a:r>
+            <a:r>
+              <a:rPr lang="en-US" sz="1600" dirty="0">
+                <a:solidFill>
+                  <a:srgbClr val="5E6978"/>
+                </a:solidFill>
+                <a:latin typeface="Calibri" pitchFamily="34" charset="0"/>
+                <a:ea typeface="Calibri" pitchFamily="34" charset="-122"/>
+                <a:cs typeface="Calibri" pitchFamily="34" charset="-120"/>
+              </a:rPr>
+              <a:t>,  </a:t>
+            </a:r>
+            <a:r>
+              <a:rPr lang="en-US" sz="1600" b="1" dirty="0">
+                <a:solidFill>
+                  <a:srgbClr val="E3202A"/>
+                </a:solidFill>
+                <a:latin typeface="Calibri" pitchFamily="34" charset="0"/>
+                <a:ea typeface="Calibri" pitchFamily="34" charset="-122"/>
+                <a:cs typeface="Calibri" pitchFamily="34" charset="-120"/>
+              </a:rPr>
+              <a:t>Falcon</a:t>
+            </a:r>
+            <a:r>
+              <a:rPr lang="en-US" sz="1600" dirty="0">
+                <a:solidFill>
+                  <a:srgbClr val="5E6978"/>
+                </a:solidFill>
+                <a:latin typeface="Calibri" pitchFamily="34" charset="0"/>
+                <a:ea typeface="Calibri" pitchFamily="34" charset="-122"/>
+                <a:cs typeface="Calibri" pitchFamily="34" charset="-120"/>
+              </a:rPr>
+              <a:t>은 24시간 공격을 막아냅니다.</a:t>
+            </a:r>
+            <a:endParaRPr lang="en-US" sz="1600" dirty="0"/>
+          </a:p>
+        </p:txBody>
+      </p:sp>
+      <p:sp>
+        <p:nvSpPr>
+          <p:cNvPr id="43" name="Text 32"/>
+          <p:cNvSpPr txBox="1"/>
+          <p:nvPr/>
+        </p:nvSpPr>
+        <p:spPr>
+          <a:xfrm>
+            <a:off x="548640" y="6446520"/>
+            <a:ext cx="7315200" cy="219456"/>
+          </a:xfrm>
+          <a:prstGeom prst="rect">
+            <a:avLst/>
+          </a:prstGeom>
+          <a:noFill/>
+          <a:ln/>
+        </p:spPr>
+        <p:txBody>
+          <a:bodyPr wrap="square" lIns="0" tIns="0" rIns="0" bIns="0" rtlCol="0" anchor="ctr"/>
+          <a:lstStyle/>
+          <a:p>
+            <a:pPr marL="0" indent="0">
+              <a:buNone/>
+            </a:pPr>
+            <a:r>
+              <a:rPr lang="en-US" sz="900" dirty="0">
+                <a:solidFill>
+                  <a:srgbClr val="5E6978"/>
+                </a:solidFill>
+                <a:latin typeface="Calibri" pitchFamily="34" charset="0"/>
+                <a:ea typeface="Calibri" pitchFamily="34" charset="-122"/>
+                <a:cs typeface="Calibri" pitchFamily="34" charset="-120"/>
+              </a:rPr>
+              <a:t>04   |   CrowdStrike Falcon 제안서  ·  웨스틴 리조트 괌</a:t>
             </a:r>
             <a:endParaRPr lang="en-US" sz="900" dirty="0"/>
           </a:p>
@@ -3979,7 +5233,7 @@
 </p:sld>
 </file>
 
-<file path=ppt/slides/slide4.xml><?xml version="1.0" encoding="utf-8"?>
+<file path=ppt/slides/slide5.xml><?xml version="1.0" encoding="utf-8"?>
 <p:sld xmlns:a="http://schemas.openxmlformats.org/drawingml/2006/main" xmlns:r="http://schemas.openxmlformats.org/officeDocument/2006/relationships" xmlns:p="http://schemas.openxmlformats.org/presentationml/2006/main">
   <p:cSld name="Slide 13">
     <p:bg>
@@ -4029,7 +5283,7 @@
               <a:buNone/>
             </a:pPr>
             <a:r>
-              <a:rPr lang="en-US" sz="1350" b="1" kern="0" spc="200" dirty="0">
+              <a:rPr lang="en-US" sz="1100" b="1" kern="0" spc="200" dirty="0">
                 <a:solidFill>
                   <a:srgbClr val="E3202A"/>
                 </a:solidFill>
@@ -4037,9 +5291,9 @@
                 <a:ea typeface="Arial" pitchFamily="34" charset="-122"/>
                 <a:cs typeface="Arial" pitchFamily="34" charset="-120"/>
               </a:rPr>
-              <a:t>03   기능 비교</a:t>
-            </a:r>
-            <a:endParaRPr lang="en-US" sz="1350" dirty="0"/>
+              <a:t>04   기능 비교</a:t>
+            </a:r>
+            <a:endParaRPr lang="en-US" sz="1100" dirty="0"/>
           </a:p>
         </p:txBody>
       </p:sp>
@@ -4122,7 +5376,7 @@
         </p:nvGraphicFramePr>
         <p:xfrm>
           <a:off x="548640" y="1481328"/>
-          <a:ext cx="11094415" cy="4526280"/>
+          <a:ext cx="11094415" cy="4526277"/>
         </p:xfrm>
         <a:graphic>
           <a:graphicData uri="http://schemas.openxmlformats.org/drawingml/2006/table">
@@ -5695,7 +6949,7 @@
                 <a:ea typeface="Calibri" pitchFamily="34" charset="-122"/>
                 <a:cs typeface="Calibri" pitchFamily="34" charset="-120"/>
               </a:rPr>
-              <a:t>04   |   CrowdStrike Falcon 제안서  ·  웨스틴 리조트 괌</a:t>
+              <a:t>05   |   CrowdStrike Falcon 제안서  ·  웨스틴 리조트 괌</a:t>
             </a:r>
             <a:endParaRPr lang="en-US" sz="900" dirty="0"/>
           </a:p>
@@ -5733,7 +6987,7 @@
 </p:sld>
 </file>
 
-<file path=ppt/slides/slide5.xml><?xml version="1.0" encoding="utf-8"?>
+<file path=ppt/slides/slide6.xml><?xml version="1.0" encoding="utf-8"?>
 <p:sld xmlns:a="http://schemas.openxmlformats.org/drawingml/2006/main" xmlns:r="http://schemas.openxmlformats.org/officeDocument/2006/relationships" xmlns:p="http://schemas.openxmlformats.org/presentationml/2006/main">
   <p:cSld name="Slide 18">
     <p:bg>
@@ -5791,7 +7045,7 @@
                 <a:ea typeface="Arial" pitchFamily="34" charset="-122"/>
                 <a:cs typeface="Arial" pitchFamily="34" charset="-120"/>
               </a:rPr>
-              <a:t>04   기대 효과</a:t>
+              <a:t>05   기대 효과</a:t>
             </a:r>
             <a:endParaRPr lang="en-US" sz="1100" dirty="0"/>
           </a:p>
@@ -7331,7 +8585,7 @@
                 <a:ea typeface="Calibri" pitchFamily="34" charset="-122"/>
                 <a:cs typeface="Calibri" pitchFamily="34" charset="-120"/>
               </a:rPr>
-              <a:t>05   |   CrowdStrike Falcon 제안서  ·  웨스틴 리조트 괌</a:t>
+              <a:t>06   |   CrowdStrike Falcon 제안서  ·  웨스틴 리조트 괌</a:t>
             </a:r>
             <a:endParaRPr lang="en-US" sz="900" dirty="0"/>
           </a:p>
@@ -7378,7 +8632,7 @@
           <a:noFill/>
         </p:spPr>
         <p:txBody>
-          <a:bodyPr wrap="square" lIns="0" rIns="0" tIns="0" bIns="0" anchor="t">
+          <a:bodyPr wrap="square" lIns="0" tIns="0" rIns="0" bIns="0" anchor="t">
             <a:spAutoFit/>
           </a:bodyPr>
           <a:lstStyle/>
@@ -7403,2136 +8657,6 @@
                 <a:ea typeface="Malgun Gothic"/>
               </a:rPr>
               <a:t>Falcon Prevent (차세대 백신) + Falcon Insight (탐지·대응), 시큐코리아 24시간 기술지원 포함.</a:t>
-            </a:r>
-          </a:p>
-        </p:txBody>
-      </p:sp>
-    </p:spTree>
-  </p:cSld>
-  <p:clrMapOvr>
-    <a:masterClrMapping/>
-  </p:clrMapOvr>
-</p:sld>
-</file>
-
-<file path=ppt/slides/slide6.xml><?xml version="1.0" encoding="utf-8"?>
-<p:sld xmlns:a="http://schemas.openxmlformats.org/drawingml/2006/main" xmlns:r="http://schemas.openxmlformats.org/officeDocument/2006/relationships" xmlns:p="http://schemas.openxmlformats.org/presentationml/2006/main">
-  <p:cSld name="Slide 15">
-    <p:bg>
-      <p:bgPr>
-        <a:solidFill>
-          <a:srgbClr val="FFFFFF"/>
-        </a:solidFill>
-        <a:effectLst/>
-      </p:bgPr>
-    </p:bg>
-    <p:spTree>
-      <p:nvGrpSpPr>
-        <p:cNvPr id="1" name=""/>
-        <p:cNvGrpSpPr/>
-        <p:nvPr/>
-      </p:nvGrpSpPr>
-      <p:grpSpPr>
-        <a:xfrm>
-          <a:off x="0" y="0"/>
-          <a:ext cx="0" cy="0"/>
-          <a:chOff x="0" y="0"/>
-          <a:chExt cx="0" cy="0"/>
-        </a:xfrm>
-      </p:grpSpPr>
-      <p:sp>
-        <p:nvSpPr>
-          <p:cNvPr id="2" name="Text 0"/>
-          <p:cNvSpPr txBox="1"/>
-          <p:nvPr/>
-        </p:nvSpPr>
-        <p:spPr>
-          <a:xfrm>
-            <a:off x="548640" y="384048"/>
-            <a:ext cx="8229600" cy="256032"/>
-          </a:xfrm>
-          <a:prstGeom prst="rect">
-            <a:avLst/>
-          </a:prstGeom>
-          <a:noFill/>
-          <a:ln/>
-        </p:spPr>
-        <p:txBody>
-          <a:bodyPr wrap="square" lIns="0" tIns="0" rIns="0" bIns="0" rtlCol="0" anchor="t"/>
-          <a:lstStyle/>
-          <a:p>
-            <a:pPr marL="0" indent="0">
-              <a:buNone/>
-            </a:pPr>
-            <a:r>
-              <a:rPr lang="en-US" sz="1100" b="1" kern="0" spc="200" dirty="0">
-                <a:solidFill>
-                  <a:srgbClr val="E3202A"/>
-                </a:solidFill>
-                <a:latin typeface="Arial" pitchFamily="34" charset="0"/>
-                <a:ea typeface="Arial" pitchFamily="34" charset="-122"/>
-                <a:cs typeface="Arial" pitchFamily="34" charset="-120"/>
-              </a:rPr>
-              <a:t>05   도입 사례 및 효과</a:t>
-            </a:r>
-            <a:endParaRPr lang="en-US" sz="1100" dirty="0"/>
-          </a:p>
-        </p:txBody>
-      </p:sp>
-      <p:sp>
-        <p:nvSpPr>
-          <p:cNvPr id="3" name="Text 1"/>
-          <p:cNvSpPr txBox="1"/>
-          <p:nvPr/>
-        </p:nvSpPr>
-        <p:spPr>
-          <a:xfrm>
-            <a:off x="548640" y="658368"/>
-            <a:ext cx="9692640" cy="658368"/>
-          </a:xfrm>
-          <a:prstGeom prst="rect">
-            <a:avLst/>
-          </a:prstGeom>
-          <a:noFill/>
-          <a:ln/>
-        </p:spPr>
-        <p:txBody>
-          <a:bodyPr wrap="square" lIns="0" tIns="0" rIns="0" bIns="0" rtlCol="0" anchor="ctr"/>
-          <a:lstStyle/>
-          <a:p>
-            <a:pPr marL="0" indent="0">
-              <a:buNone/>
-            </a:pPr>
-            <a:r>
-              <a:rPr lang="en-US" sz="2800" b="1" dirty="0">
-                <a:solidFill>
-                  <a:srgbClr val="151A21"/>
-                </a:solidFill>
-                <a:latin typeface="Arial" pitchFamily="34" charset="0"/>
-                <a:ea typeface="Arial" pitchFamily="34" charset="-122"/>
-                <a:cs typeface="Arial" pitchFamily="34" charset="-120"/>
-              </a:rPr>
-              <a:t>실제 공격과 실제 고객이 증명한 성능</a:t>
-            </a:r>
-            <a:endParaRPr lang="en-US" sz="2800" dirty="0"/>
-          </a:p>
-        </p:txBody>
-      </p:sp>
-      <p:pic>
-        <p:nvPicPr>
-          <p:cNvPr id="4" name="Image 0" descr="/private/tmp/claude-501/-Users-jihanvin-Desktop-NIVNAH-AI/16a96446-d9b3-40e2-af9e-a3011ae3db84/scratchpad/assets/westin_grey.png"/>
-          <p:cNvPicPr>
-            <a:picLocks noChangeAspect="1"/>
-          </p:cNvPicPr>
-          <p:nvPr/>
-        </p:nvPicPr>
-        <p:blipFill>
-          <a:blip r:embed="rId3"/>
-          <a:stretch>
-            <a:fillRect/>
-          </a:stretch>
-        </p:blipFill>
-        <p:spPr>
-          <a:xfrm>
-            <a:off x="10634472" y="402336"/>
-            <a:ext cx="1005840" cy="301752"/>
-          </a:xfrm>
-          <a:prstGeom prst="rect">
-            <a:avLst/>
-          </a:prstGeom>
-        </p:spPr>
-      </p:pic>
-      <p:sp>
-        <p:nvSpPr>
-          <p:cNvPr id="5" name="Shape 2"/>
-          <p:cNvSpPr/>
-          <p:nvPr/>
-        </p:nvSpPr>
-        <p:spPr>
-          <a:xfrm>
-            <a:off x="548640" y="3080000"/>
-            <a:ext cx="3515258" cy="1900000"/>
-          </a:xfrm>
-          <a:prstGeom prst="roundRect">
-            <a:avLst>
-              <a:gd name="adj" fmla="val 2601"/>
-            </a:avLst>
-          </a:prstGeom>
-          <a:solidFill>
-            <a:srgbClr val="FDECEC"/>
-          </a:solidFill>
-          <a:ln w="9525">
-            <a:solidFill>
-              <a:srgbClr val="F6C9CB"/>
-            </a:solidFill>
-            <a:prstDash val="solid"/>
-          </a:ln>
-        </p:spPr>
-      </p:sp>
-      <p:sp>
-        <p:nvSpPr>
-          <p:cNvPr id="6" name="Shape 3"/>
-          <p:cNvSpPr/>
-          <p:nvPr/>
-        </p:nvSpPr>
-        <p:spPr>
-          <a:xfrm>
-            <a:off x="868680" y="3240000"/>
-            <a:ext cx="457200" cy="457200"/>
-          </a:xfrm>
-          <a:prstGeom prst="roundRect">
-            <a:avLst>
-              <a:gd name="adj" fmla="val 16667"/>
-            </a:avLst>
-          </a:prstGeom>
-          <a:solidFill>
-            <a:srgbClr val="E3202A"/>
-          </a:solidFill>
-          <a:ln w="12700">
-            <a:solidFill>
-              <a:srgbClr val="E3202A"/>
-            </a:solidFill>
-            <a:prstDash val="solid"/>
-          </a:ln>
-        </p:spPr>
-      </p:sp>
-      <p:pic>
-        <p:nvPicPr>
-          <p:cNvPr id="7" name="Image 1" descr="preencoded.png"/>
-          <p:cNvPicPr>
-            <a:picLocks noChangeAspect="1"/>
-          </p:cNvPicPr>
-          <p:nvPr/>
-        </p:nvPicPr>
-        <p:blipFill>
-          <a:blip r:embed="rId4"/>
-          <a:stretch>
-            <a:fillRect/>
-          </a:stretch>
-        </p:blipFill>
-        <p:spPr>
-          <a:xfrm>
-            <a:off x="943680" y="3315000"/>
-            <a:ext cx="307238" cy="307238"/>
-          </a:xfrm>
-          <a:prstGeom prst="rect">
-            <a:avLst/>
-          </a:prstGeom>
-        </p:spPr>
-      </p:pic>
-      <p:sp>
-        <p:nvSpPr>
-          <p:cNvPr id="8" name="Text 4"/>
-          <p:cNvSpPr txBox="1"/>
-          <p:nvPr/>
-        </p:nvSpPr>
-        <p:spPr>
-          <a:xfrm>
-            <a:off x="1468680" y="3245000"/>
-            <a:ext cx="2235098" cy="237744"/>
-          </a:xfrm>
-          <a:prstGeom prst="rect">
-            <a:avLst/>
-          </a:prstGeom>
-          <a:noFill/>
-          <a:ln/>
-        </p:spPr>
-        <p:txBody>
-          <a:bodyPr wrap="square" lIns="0" tIns="0" rIns="0" bIns="0" rtlCol="0" anchor="t"/>
-          <a:lstStyle/>
-          <a:p>
-            <a:pPr marL="0" indent="0">
-              <a:buNone/>
-            </a:pPr>
-            <a:r>
-              <a:rPr lang="en-US" sz="950" b="1" kern="0" spc="150" dirty="0">
-                <a:solidFill>
-                  <a:srgbClr val="E3202A"/>
-                </a:solidFill>
-                <a:latin typeface="Calibri" pitchFamily="34" charset="0"/>
-                <a:ea typeface="Calibri" pitchFamily="34" charset="-122"/>
-                <a:cs typeface="Calibri" pitchFamily="34" charset="-120"/>
-              </a:rPr>
-              <a:t>호스피탈리티</a:t>
-            </a:r>
-            <a:endParaRPr lang="en-US" sz="950" dirty="0"/>
-          </a:p>
-        </p:txBody>
-      </p:sp>
-      <p:sp>
-        <p:nvSpPr>
-          <p:cNvPr id="9" name="Text 5"/>
-          <p:cNvSpPr txBox="1"/>
-          <p:nvPr/>
-        </p:nvSpPr>
-        <p:spPr>
-          <a:xfrm>
-            <a:off x="1468680" y="3470000"/>
-            <a:ext cx="2235098" cy="310896"/>
-          </a:xfrm>
-          <a:prstGeom prst="rect">
-            <a:avLst/>
-          </a:prstGeom>
-          <a:noFill/>
-          <a:ln/>
-        </p:spPr>
-        <p:txBody>
-          <a:bodyPr wrap="square" lIns="0" tIns="0" rIns="0" bIns="0" rtlCol="0" anchor="t"/>
-          <a:lstStyle/>
-          <a:p>
-            <a:pPr marL="0" indent="0">
-              <a:buNone/>
-            </a:pPr>
-            <a:r>
-              <a:rPr lang="en-US" sz="1500" b="1" dirty="0">
-                <a:solidFill>
-                  <a:srgbClr val="151A21"/>
-                </a:solidFill>
-                <a:latin typeface="Arial" pitchFamily="34" charset="0"/>
-                <a:ea typeface="Arial" pitchFamily="34" charset="-122"/>
-                <a:cs typeface="Arial" pitchFamily="34" charset="-120"/>
-              </a:rPr>
-              <a:t>호텔 체인</a:t>
-            </a:r>
-            <a:endParaRPr lang="en-US" sz="1500" dirty="0"/>
-          </a:p>
-        </p:txBody>
-      </p:sp>
-      <p:sp>
-        <p:nvSpPr>
-          <p:cNvPr id="10" name="Text 6"/>
-          <p:cNvSpPr txBox="1"/>
-          <p:nvPr/>
-        </p:nvSpPr>
-        <p:spPr>
-          <a:xfrm>
-            <a:off x="868680" y="3760000"/>
-            <a:ext cx="2875178" cy="520000"/>
-          </a:xfrm>
-          <a:prstGeom prst="rect">
-            <a:avLst/>
-          </a:prstGeom>
-          <a:noFill/>
-          <a:ln/>
-        </p:spPr>
-        <p:txBody>
-          <a:bodyPr wrap="square" lIns="0" tIns="0" rIns="0" bIns="0" rtlCol="0" anchor="ctr"/>
-          <a:lstStyle/>
-          <a:p>
-            <a:pPr marL="0" indent="0">
-              <a:buNone/>
-            </a:pPr>
-            <a:r>
-              <a:rPr lang="en-US" sz="3200" b="1" dirty="0">
-                <a:solidFill>
-                  <a:srgbClr val="E3202A"/>
-                </a:solidFill>
-                <a:latin typeface="Arial" pitchFamily="34" charset="0"/>
-                <a:ea typeface="Arial" pitchFamily="34" charset="-122"/>
-                <a:cs typeface="Arial" pitchFamily="34" charset="-120"/>
-              </a:rPr>
-              <a:t>10만 대</a:t>
-            </a:r>
-            <a:endParaRPr lang="en-US" sz="4800" dirty="0"/>
-          </a:p>
-        </p:txBody>
-      </p:sp>
-      <p:sp>
-        <p:nvSpPr>
-          <p:cNvPr id="11" name="Text 7"/>
-          <p:cNvSpPr txBox="1"/>
-          <p:nvPr/>
-        </p:nvSpPr>
-        <p:spPr>
-          <a:xfrm>
-            <a:off x="868680" y="4280000"/>
-            <a:ext cx="2875178" cy="292608"/>
-          </a:xfrm>
-          <a:prstGeom prst="rect">
-            <a:avLst/>
-          </a:prstGeom>
-          <a:noFill/>
-          <a:ln/>
-        </p:spPr>
-        <p:txBody>
-          <a:bodyPr wrap="square" lIns="0" tIns="0" rIns="0" bIns="0" rtlCol="0" anchor="t"/>
-          <a:lstStyle/>
-          <a:p>
-            <a:pPr marL="0" indent="0">
-              <a:buNone/>
-            </a:pPr>
-            <a:r>
-              <a:rPr lang="en-US" sz="1300" b="1" dirty="0">
-                <a:solidFill>
-                  <a:srgbClr val="151A21"/>
-                </a:solidFill>
-                <a:latin typeface="Calibri" pitchFamily="34" charset="0"/>
-                <a:ea typeface="Calibri" pitchFamily="34" charset="-122"/>
-                <a:cs typeface="Calibri" pitchFamily="34" charset="-120"/>
-              </a:rPr>
-              <a:t>하루 만에 배포된 에이전트</a:t>
-            </a:r>
-            <a:endParaRPr lang="en-US" sz="1300" dirty="0"/>
-          </a:p>
-        </p:txBody>
-      </p:sp>
-      <p:sp>
-        <p:nvSpPr>
-          <p:cNvPr id="12" name="Text 8"/>
-          <p:cNvSpPr txBox="1"/>
-          <p:nvPr/>
-        </p:nvSpPr>
-        <p:spPr>
-          <a:xfrm>
-            <a:off x="868680" y="4550000"/>
-            <a:ext cx="2875178" cy="340000"/>
-          </a:xfrm>
-          <a:prstGeom prst="rect">
-            <a:avLst/>
-          </a:prstGeom>
-          <a:noFill/>
-          <a:ln/>
-        </p:spPr>
-        <p:txBody>
-          <a:bodyPr wrap="square" lIns="0" tIns="0" rIns="0" bIns="0" rtlCol="0" anchor="t"/>
-          <a:lstStyle/>
-          <a:p>
-            <a:pPr marL="0" indent="0">
-              <a:buNone/>
-            </a:pPr>
-            <a:r>
-              <a:rPr lang="en-US" sz="1150" dirty="0">
-                <a:solidFill>
-                  <a:srgbClr val="5E6978"/>
-                </a:solidFill>
-                <a:latin typeface="Calibri" pitchFamily="34" charset="0"/>
-                <a:ea typeface="Calibri" pitchFamily="34" charset="-122"/>
-                <a:cs typeface="Calibri" pitchFamily="34" charset="-120"/>
-              </a:rPr>
-              <a:t>침해사고 대응 중 하루 만에 배포.</a:t>
-            </a:r>
-            <a:endParaRPr lang="en-US" sz="1150" dirty="0"/>
-          </a:p>
-        </p:txBody>
-      </p:sp>
-      <p:sp>
-        <p:nvSpPr>
-          <p:cNvPr id="13" name="Shape 9"/>
-          <p:cNvSpPr/>
-          <p:nvPr/>
-        </p:nvSpPr>
-        <p:spPr>
-          <a:xfrm>
-            <a:off x="4338218" y="3080000"/>
-            <a:ext cx="3515258" cy="1900000"/>
-          </a:xfrm>
-          <a:prstGeom prst="roundRect">
-            <a:avLst>
-              <a:gd name="adj" fmla="val 2601"/>
-            </a:avLst>
-          </a:prstGeom>
-          <a:solidFill>
-            <a:srgbClr val="F3F5F8"/>
-          </a:solidFill>
-          <a:ln w="9525">
-            <a:solidFill>
-              <a:srgbClr val="DCE1E7"/>
-            </a:solidFill>
-            <a:prstDash val="solid"/>
-          </a:ln>
-        </p:spPr>
-      </p:sp>
-      <p:sp>
-        <p:nvSpPr>
-          <p:cNvPr id="14" name="Shape 10"/>
-          <p:cNvSpPr/>
-          <p:nvPr/>
-        </p:nvSpPr>
-        <p:spPr>
-          <a:xfrm>
-            <a:off x="4658258" y="3240000"/>
-            <a:ext cx="457200" cy="457200"/>
-          </a:xfrm>
-          <a:prstGeom prst="roundRect">
-            <a:avLst>
-              <a:gd name="adj" fmla="val 16667"/>
-            </a:avLst>
-          </a:prstGeom>
-          <a:solidFill>
-            <a:srgbClr val="EAEEF3"/>
-          </a:solidFill>
-          <a:ln w="12700">
-            <a:solidFill>
-              <a:srgbClr val="EAEEF3"/>
-            </a:solidFill>
-            <a:prstDash val="solid"/>
-          </a:ln>
-        </p:spPr>
-      </p:sp>
-      <p:pic>
-        <p:nvPicPr>
-          <p:cNvPr id="15" name="Image 2" descr="preencoded.png"/>
-          <p:cNvPicPr>
-            <a:picLocks noChangeAspect="1"/>
-          </p:cNvPicPr>
-          <p:nvPr/>
-        </p:nvPicPr>
-        <p:blipFill>
-          <a:blip r:embed="rId5"/>
-          <a:stretch>
-            <a:fillRect/>
-          </a:stretch>
-        </p:blipFill>
-        <p:spPr>
-          <a:xfrm>
-            <a:off x="4733258" y="3315000"/>
-            <a:ext cx="307238" cy="307238"/>
-          </a:xfrm>
-          <a:prstGeom prst="rect">
-            <a:avLst/>
-          </a:prstGeom>
-        </p:spPr>
-      </p:pic>
-      <p:sp>
-        <p:nvSpPr>
-          <p:cNvPr id="16" name="Text 11"/>
-          <p:cNvSpPr txBox="1"/>
-          <p:nvPr/>
-        </p:nvSpPr>
-        <p:spPr>
-          <a:xfrm>
-            <a:off x="5258258" y="3245000"/>
-            <a:ext cx="2235098" cy="237744"/>
-          </a:xfrm>
-          <a:prstGeom prst="rect">
-            <a:avLst/>
-          </a:prstGeom>
-          <a:noFill/>
-          <a:ln/>
-        </p:spPr>
-        <p:txBody>
-          <a:bodyPr wrap="square" lIns="0" tIns="0" rIns="0" bIns="0" rtlCol="0" anchor="t"/>
-          <a:lstStyle/>
-          <a:p>
-            <a:pPr marL="0" indent="0">
-              <a:buNone/>
-            </a:pPr>
-            <a:r>
-              <a:rPr lang="en-US" sz="950" b="1" kern="0" spc="150" dirty="0">
-                <a:solidFill>
-                  <a:srgbClr val="5D6B7E"/>
-                </a:solidFill>
-                <a:latin typeface="Calibri" pitchFamily="34" charset="0"/>
-                <a:ea typeface="Calibri" pitchFamily="34" charset="-122"/>
-                <a:cs typeface="Calibri" pitchFamily="34" charset="-120"/>
-              </a:rPr>
-              <a:t>교육</a:t>
-            </a:r>
-            <a:endParaRPr lang="en-US" sz="950" dirty="0"/>
-          </a:p>
-        </p:txBody>
-      </p:sp>
-      <p:sp>
-        <p:nvSpPr>
-          <p:cNvPr id="17" name="Text 12"/>
-          <p:cNvSpPr txBox="1"/>
-          <p:nvPr/>
-        </p:nvSpPr>
-        <p:spPr>
-          <a:xfrm>
-            <a:off x="5258258" y="3470000"/>
-            <a:ext cx="2235098" cy="310896"/>
-          </a:xfrm>
-          <a:prstGeom prst="rect">
-            <a:avLst/>
-          </a:prstGeom>
-          <a:noFill/>
-          <a:ln/>
-        </p:spPr>
-        <p:txBody>
-          <a:bodyPr wrap="square" lIns="0" tIns="0" rIns="0" bIns="0" rtlCol="0" anchor="t"/>
-          <a:lstStyle/>
-          <a:p>
-            <a:pPr marL="0" indent="0">
-              <a:buNone/>
-            </a:pPr>
-            <a:r>
-              <a:rPr lang="en-US" sz="1500" b="1" dirty="0">
-                <a:solidFill>
-                  <a:srgbClr val="151A21"/>
-                </a:solidFill>
-                <a:latin typeface="Arial" pitchFamily="34" charset="0"/>
-                <a:ea typeface="Arial" pitchFamily="34" charset="-122"/>
-                <a:cs typeface="Arial" pitchFamily="34" charset="-120"/>
-              </a:rPr>
-              <a:t>코번트리 대학교</a:t>
-            </a:r>
-            <a:endParaRPr lang="en-US" sz="1500" dirty="0"/>
-          </a:p>
-        </p:txBody>
-      </p:sp>
-      <p:sp>
-        <p:nvSpPr>
-          <p:cNvPr id="18" name="Text 13"/>
-          <p:cNvSpPr txBox="1"/>
-          <p:nvPr/>
-        </p:nvSpPr>
-        <p:spPr>
-          <a:xfrm>
-            <a:off x="4658258" y="3760000"/>
-            <a:ext cx="2875178" cy="520000"/>
-          </a:xfrm>
-          <a:prstGeom prst="rect">
-            <a:avLst/>
-          </a:prstGeom>
-          <a:noFill/>
-          <a:ln/>
-        </p:spPr>
-        <p:txBody>
-          <a:bodyPr wrap="square" lIns="0" tIns="0" rIns="0" bIns="0" rtlCol="0" anchor="ctr"/>
-          <a:lstStyle/>
-          <a:p>
-            <a:pPr marL="0" indent="0">
-              <a:buNone/>
-            </a:pPr>
-            <a:r>
-              <a:rPr lang="en-US" sz="3200" b="1" dirty="0">
-                <a:solidFill>
-                  <a:srgbClr val="E3202A"/>
-                </a:solidFill>
-                <a:latin typeface="Arial" pitchFamily="34" charset="0"/>
-                <a:ea typeface="Arial" pitchFamily="34" charset="-122"/>
-                <a:cs typeface="Arial" pitchFamily="34" charset="-120"/>
-              </a:rPr>
-              <a:t>94%</a:t>
-            </a:r>
-            <a:endParaRPr lang="en-US" sz="4800" dirty="0"/>
-          </a:p>
-        </p:txBody>
-      </p:sp>
-      <p:sp>
-        <p:nvSpPr>
-          <p:cNvPr id="19" name="Text 14"/>
-          <p:cNvSpPr txBox="1"/>
-          <p:nvPr/>
-        </p:nvSpPr>
-        <p:spPr>
-          <a:xfrm>
-            <a:off x="4658258" y="4280000"/>
-            <a:ext cx="2875178" cy="292608"/>
-          </a:xfrm>
-          <a:prstGeom prst="rect">
-            <a:avLst/>
-          </a:prstGeom>
-          <a:noFill/>
-          <a:ln/>
-        </p:spPr>
-        <p:txBody>
-          <a:bodyPr wrap="square" lIns="0" tIns="0" rIns="0" bIns="0" rtlCol="0" anchor="t"/>
-          <a:lstStyle/>
-          <a:p>
-            <a:pPr marL="0" indent="0">
-              <a:buNone/>
-            </a:pPr>
-            <a:r>
-              <a:rPr lang="en-US" sz="1300" b="1" dirty="0">
-                <a:solidFill>
-                  <a:srgbClr val="151A21"/>
-                </a:solidFill>
-                <a:latin typeface="Calibri" pitchFamily="34" charset="0"/>
-                <a:ea typeface="Calibri" pitchFamily="34" charset="-122"/>
-                <a:cs typeface="Calibri" pitchFamily="34" charset="-120"/>
-              </a:rPr>
-              <a:t>위협 해결 시간 단축</a:t>
-            </a:r>
-            <a:endParaRPr lang="en-US" sz="1300" dirty="0"/>
-          </a:p>
-        </p:txBody>
-      </p:sp>
-      <p:sp>
-        <p:nvSpPr>
-          <p:cNvPr id="20" name="Text 15"/>
-          <p:cNvSpPr txBox="1"/>
-          <p:nvPr/>
-        </p:nvSpPr>
-        <p:spPr>
-          <a:xfrm>
-            <a:off x="4658258" y="4550000"/>
-            <a:ext cx="2875178" cy="340000"/>
-          </a:xfrm>
-          <a:prstGeom prst="rect">
-            <a:avLst/>
-          </a:prstGeom>
-          <a:noFill/>
-          <a:ln/>
-        </p:spPr>
-        <p:txBody>
-          <a:bodyPr wrap="square" lIns="0" tIns="0" rIns="0" bIns="0" rtlCol="0" anchor="t"/>
-          <a:lstStyle/>
-          <a:p>
-            <a:pPr marL="0" indent="0">
-              <a:buNone/>
-            </a:pPr>
-            <a:r>
-              <a:rPr lang="en-US" sz="1150" dirty="0">
-                <a:solidFill>
-                  <a:srgbClr val="5E6978"/>
-                </a:solidFill>
-                <a:latin typeface="Calibri" pitchFamily="34" charset="0"/>
-                <a:ea typeface="Calibri" pitchFamily="34" charset="-122"/>
-                <a:cs typeface="Calibri" pitchFamily="34" charset="-120"/>
-              </a:rPr>
-              <a:t>사고 해결 시간 2–3일 → 1시간 미만.</a:t>
-            </a:r>
-            <a:endParaRPr lang="en-US" sz="1150" dirty="0"/>
-          </a:p>
-        </p:txBody>
-      </p:sp>
-      <p:sp>
-        <p:nvSpPr>
-          <p:cNvPr id="21" name="Shape 16"/>
-          <p:cNvSpPr/>
-          <p:nvPr/>
-        </p:nvSpPr>
-        <p:spPr>
-          <a:xfrm>
-            <a:off x="8127797" y="3080000"/>
-            <a:ext cx="3515258" cy="1900000"/>
-          </a:xfrm>
-          <a:prstGeom prst="roundRect">
-            <a:avLst>
-              <a:gd name="adj" fmla="val 2601"/>
-            </a:avLst>
-          </a:prstGeom>
-          <a:solidFill>
-            <a:srgbClr val="F3F5F8"/>
-          </a:solidFill>
-          <a:ln w="9525">
-            <a:solidFill>
-              <a:srgbClr val="DCE1E7"/>
-            </a:solidFill>
-            <a:prstDash val="solid"/>
-          </a:ln>
-        </p:spPr>
-      </p:sp>
-      <p:sp>
-        <p:nvSpPr>
-          <p:cNvPr id="22" name="Shape 17"/>
-          <p:cNvSpPr/>
-          <p:nvPr/>
-        </p:nvSpPr>
-        <p:spPr>
-          <a:xfrm>
-            <a:off x="8447837" y="3240000"/>
-            <a:ext cx="457200" cy="457200"/>
-          </a:xfrm>
-          <a:prstGeom prst="roundRect">
-            <a:avLst>
-              <a:gd name="adj" fmla="val 16667"/>
-            </a:avLst>
-          </a:prstGeom>
-          <a:solidFill>
-            <a:srgbClr val="EAEEF3"/>
-          </a:solidFill>
-          <a:ln w="12700">
-            <a:solidFill>
-              <a:srgbClr val="EAEEF3"/>
-            </a:solidFill>
-            <a:prstDash val="solid"/>
-          </a:ln>
-        </p:spPr>
-      </p:sp>
-      <p:pic>
-        <p:nvPicPr>
-          <p:cNvPr id="23" name="Image 3" descr="preencoded.png"/>
-          <p:cNvPicPr>
-            <a:picLocks noChangeAspect="1"/>
-          </p:cNvPicPr>
-          <p:nvPr/>
-        </p:nvPicPr>
-        <p:blipFill>
-          <a:blip r:embed="rId6"/>
-          <a:stretch>
-            <a:fillRect/>
-          </a:stretch>
-        </p:blipFill>
-        <p:spPr>
-          <a:xfrm>
-            <a:off x="8522837" y="3315000"/>
-            <a:ext cx="307238" cy="307238"/>
-          </a:xfrm>
-          <a:prstGeom prst="rect">
-            <a:avLst/>
-          </a:prstGeom>
-        </p:spPr>
-      </p:pic>
-      <p:sp>
-        <p:nvSpPr>
-          <p:cNvPr id="24" name="Text 18"/>
-          <p:cNvSpPr txBox="1"/>
-          <p:nvPr/>
-        </p:nvSpPr>
-        <p:spPr>
-          <a:xfrm>
-            <a:off x="9047837" y="3245000"/>
-            <a:ext cx="2235098" cy="237744"/>
-          </a:xfrm>
-          <a:prstGeom prst="rect">
-            <a:avLst/>
-          </a:prstGeom>
-          <a:noFill/>
-          <a:ln/>
-        </p:spPr>
-        <p:txBody>
-          <a:bodyPr wrap="square" lIns="0" tIns="0" rIns="0" bIns="0" rtlCol="0" anchor="t"/>
-          <a:lstStyle/>
-          <a:p>
-            <a:pPr marL="0" indent="0">
-              <a:buNone/>
-            </a:pPr>
-            <a:r>
-              <a:rPr lang="en-US" sz="950" b="1" kern="0" spc="150" dirty="0">
-                <a:solidFill>
-                  <a:srgbClr val="5D6B7E"/>
-                </a:solidFill>
-                <a:latin typeface="Calibri" pitchFamily="34" charset="0"/>
-                <a:ea typeface="Calibri" pitchFamily="34" charset="-122"/>
-                <a:cs typeface="Calibri" pitchFamily="34" charset="-120"/>
-              </a:rPr>
-              <a:t>멀티 브랜드 기업</a:t>
-            </a:r>
-            <a:endParaRPr lang="en-US" sz="950" dirty="0"/>
-          </a:p>
-        </p:txBody>
-      </p:sp>
-      <p:sp>
-        <p:nvSpPr>
-          <p:cNvPr id="25" name="Text 19"/>
-          <p:cNvSpPr txBox="1"/>
-          <p:nvPr/>
-        </p:nvSpPr>
-        <p:spPr>
-          <a:xfrm>
-            <a:off x="9047837" y="3470000"/>
-            <a:ext cx="2235098" cy="310896"/>
-          </a:xfrm>
-          <a:prstGeom prst="rect">
-            <a:avLst/>
-          </a:prstGeom>
-          <a:noFill/>
-          <a:ln/>
-        </p:spPr>
-        <p:txBody>
-          <a:bodyPr wrap="square" lIns="0" tIns="0" rIns="0" bIns="0" rtlCol="0" anchor="t"/>
-          <a:lstStyle/>
-          <a:p>
-            <a:pPr marL="0" indent="0">
-              <a:buNone/>
-            </a:pPr>
-            <a:r>
-              <a:rPr lang="en-US" sz="1500" b="1" dirty="0">
-                <a:solidFill>
-                  <a:srgbClr val="151A21"/>
-                </a:solidFill>
-                <a:latin typeface="Arial" pitchFamily="34" charset="0"/>
-                <a:ea typeface="Arial" pitchFamily="34" charset="-122"/>
-                <a:cs typeface="Arial" pitchFamily="34" charset="-120"/>
-              </a:rPr>
-              <a:t>Anywhere Real Estate</a:t>
-            </a:r>
-            <a:endParaRPr lang="en-US" sz="1500" dirty="0"/>
-          </a:p>
-        </p:txBody>
-      </p:sp>
-      <p:sp>
-        <p:nvSpPr>
-          <p:cNvPr id="26" name="Text 20"/>
-          <p:cNvSpPr txBox="1"/>
-          <p:nvPr/>
-        </p:nvSpPr>
-        <p:spPr>
-          <a:xfrm>
-            <a:off x="8447837" y="3760000"/>
-            <a:ext cx="2875178" cy="520000"/>
-          </a:xfrm>
-          <a:prstGeom prst="rect">
-            <a:avLst/>
-          </a:prstGeom>
-          <a:noFill/>
-          <a:ln/>
-        </p:spPr>
-        <p:txBody>
-          <a:bodyPr wrap="square" lIns="0" tIns="0" rIns="0" bIns="0" rtlCol="0" anchor="ctr"/>
-          <a:lstStyle/>
-          <a:p>
-            <a:pPr marL="0" indent="0">
-              <a:buNone/>
-            </a:pPr>
-            <a:r>
-              <a:rPr lang="en-US" sz="3200" b="1" dirty="0">
-                <a:solidFill>
-                  <a:srgbClr val="E3202A"/>
-                </a:solidFill>
-                <a:latin typeface="Arial" pitchFamily="34" charset="0"/>
-                <a:ea typeface="Arial" pitchFamily="34" charset="-122"/>
-                <a:cs typeface="Arial" pitchFamily="34" charset="-120"/>
-              </a:rPr>
-              <a:t>500×</a:t>
-            </a:r>
-            <a:endParaRPr lang="en-US" sz="4800" dirty="0"/>
-          </a:p>
-        </p:txBody>
-      </p:sp>
-      <p:sp>
-        <p:nvSpPr>
-          <p:cNvPr id="27" name="Text 21"/>
-          <p:cNvSpPr txBox="1"/>
-          <p:nvPr/>
-        </p:nvSpPr>
-        <p:spPr>
-          <a:xfrm>
-            <a:off x="8447837" y="4280000"/>
-            <a:ext cx="2875178" cy="292608"/>
-          </a:xfrm>
-          <a:prstGeom prst="rect">
-            <a:avLst/>
-          </a:prstGeom>
-          <a:noFill/>
-          <a:ln/>
-        </p:spPr>
-        <p:txBody>
-          <a:bodyPr wrap="square" lIns="0" tIns="0" rIns="0" bIns="0" rtlCol="0" anchor="t"/>
-          <a:lstStyle/>
-          <a:p>
-            <a:pPr marL="0" indent="0">
-              <a:buNone/>
-            </a:pPr>
-            <a:r>
-              <a:rPr lang="en-US" sz="1300" b="1" dirty="0">
-                <a:solidFill>
-                  <a:srgbClr val="151A21"/>
-                </a:solidFill>
-                <a:latin typeface="Calibri" pitchFamily="34" charset="0"/>
-                <a:ea typeface="Calibri" pitchFamily="34" charset="-122"/>
-                <a:cs typeface="Calibri" pitchFamily="34" charset="-120"/>
-              </a:rPr>
-              <a:t>경보 감소</a:t>
-            </a:r>
-            <a:endParaRPr lang="en-US" sz="1300" dirty="0"/>
-          </a:p>
-        </p:txBody>
-      </p:sp>
-      <p:sp>
-        <p:nvSpPr>
-          <p:cNvPr id="28" name="Text 22"/>
-          <p:cNvSpPr txBox="1"/>
-          <p:nvPr/>
-        </p:nvSpPr>
-        <p:spPr>
-          <a:xfrm>
-            <a:off x="8447837" y="4550000"/>
-            <a:ext cx="2875178" cy="340000"/>
-          </a:xfrm>
-          <a:prstGeom prst="rect">
-            <a:avLst/>
-          </a:prstGeom>
-          <a:noFill/>
-          <a:ln/>
-        </p:spPr>
-        <p:txBody>
-          <a:bodyPr wrap="square" lIns="0" tIns="0" rIns="0" bIns="0" rtlCol="0" anchor="t"/>
-          <a:lstStyle/>
-          <a:p>
-            <a:pPr marL="0" indent="0">
-              <a:buNone/>
-            </a:pPr>
-            <a:r>
-              <a:rPr lang="en-US" sz="1150" dirty="0">
-                <a:solidFill>
-                  <a:srgbClr val="5E6978"/>
-                </a:solidFill>
-                <a:latin typeface="Calibri" pitchFamily="34" charset="0"/>
-                <a:ea typeface="Calibri" pitchFamily="34" charset="-122"/>
-                <a:cs typeface="Calibri" pitchFamily="34" charset="-120"/>
-              </a:rPr>
-              <a:t>남은 경보의 98%가 실제 위협.</a:t>
-            </a:r>
-            <a:endParaRPr lang="en-US" sz="1150" dirty="0"/>
-          </a:p>
-        </p:txBody>
-      </p:sp>
-      <p:sp>
-        <p:nvSpPr>
-          <p:cNvPr id="31" name="Text 24"/>
-          <p:cNvSpPr txBox="1"/>
-          <p:nvPr/>
-        </p:nvSpPr>
-        <p:spPr>
-          <a:xfrm>
-            <a:off x="548640" y="6446520"/>
-            <a:ext cx="7315200" cy="219456"/>
-          </a:xfrm>
-          <a:prstGeom prst="rect">
-            <a:avLst/>
-          </a:prstGeom>
-          <a:noFill/>
-          <a:ln/>
-        </p:spPr>
-        <p:txBody>
-          <a:bodyPr wrap="square" lIns="0" tIns="0" rIns="0" bIns="0" rtlCol="0" anchor="ctr"/>
-          <a:lstStyle/>
-          <a:p>
-            <a:pPr marL="0" indent="0">
-              <a:buNone/>
-            </a:pPr>
-            <a:r>
-              <a:rPr lang="en-US" sz="900" dirty="0">
-                <a:solidFill>
-                  <a:srgbClr val="5E6978"/>
-                </a:solidFill>
-                <a:latin typeface="Calibri" pitchFamily="34" charset="0"/>
-                <a:ea typeface="Calibri" pitchFamily="34" charset="-122"/>
-                <a:cs typeface="Calibri" pitchFamily="34" charset="-120"/>
-              </a:rPr>
-              <a:t>06   |   CrowdStrike Falcon 제안서  ·  웨스틴 리조트 괌</a:t>
-            </a:r>
-            <a:endParaRPr lang="en-US" sz="900" dirty="0"/>
-          </a:p>
-        </p:txBody>
-      </p:sp>
-      <p:pic>
-        <p:nvPicPr>
-          <p:cNvPr id="32" name="Image 5" descr="/private/tmp/claude-501/-Users-jihanvin-Desktop-NIVNAH-AI/16a96446-d9b3-40e2-af9e-a3011ae3db84/scratchpad/assets/secukorea_dark.png"/>
-          <p:cNvPicPr>
-            <a:picLocks noChangeAspect="1"/>
-          </p:cNvPicPr>
-          <p:nvPr/>
-        </p:nvPicPr>
-        <p:blipFill>
-          <a:blip r:embed="rId8"/>
-          <a:stretch>
-            <a:fillRect/>
-          </a:stretch>
-        </p:blipFill>
-        <p:spPr>
-          <a:xfrm>
-            <a:off x="10661904" y="6400800"/>
-            <a:ext cx="978408" cy="233172"/>
-          </a:xfrm>
-          <a:prstGeom prst="rect">
-            <a:avLst/>
-          </a:prstGeom>
-        </p:spPr>
-      </p:pic>
-      <p:sp>
-        <p:nvSpPr>
-          <p:cNvPr id="33" name="TextBox 32"/>
-          <p:cNvSpPr txBox="1"/>
-          <p:nvPr/>
-        </p:nvSpPr>
-        <p:spPr>
-          <a:xfrm>
-            <a:off x="548640" y="1330000"/>
-            <a:ext cx="11094415" cy="240000"/>
-          </a:xfrm>
-          <a:prstGeom prst="rect">
-            <a:avLst/>
-          </a:prstGeom>
-          <a:noFill/>
-        </p:spPr>
-        <p:txBody>
-          <a:bodyPr wrap="square" lIns="0" rIns="0" tIns="0" bIns="0" anchor="t">
-            <a:spAutoFit/>
-          </a:bodyPr>
-          <a:lstStyle/>
-          <a:p>
-            <a:pPr algn="l"/>
-            <a:r>
-              <a:rPr sz="1000" b="1">
-                <a:solidFill>
-                  <a:srgbClr val="E3202A"/>
-                </a:solidFill>
-                <a:latin typeface="Calibri"/>
-                <a:ea typeface="Malgun Gothic"/>
-              </a:rPr>
-              <a:t>실제 공격 사례  ·  </a:t>
-            </a:r>
-            <a:r>
-              <a:rPr sz="1200" b="1">
-                <a:solidFill>
-                  <a:srgbClr val="1D2025"/>
-                </a:solidFill>
-                <a:latin typeface="Calibri"/>
-                <a:ea typeface="Malgun Gothic"/>
-              </a:rPr>
-              <a:t>랜섬웨어 해커 조직이 북미 기업을 공격  —  </a:t>
-            </a:r>
-            <a:r>
-              <a:rPr sz="1200" b="1">
-                <a:solidFill>
-                  <a:srgbClr val="E3202A"/>
-                </a:solidFill>
-                <a:latin typeface="Calibri"/>
-                <a:ea typeface="Malgun Gothic"/>
-              </a:rPr>
-              <a:t>결과: 파일 하나도 암호화되기 전에 차단</a:t>
-            </a:r>
-          </a:p>
-        </p:txBody>
-      </p:sp>
-      <p:sp>
-        <p:nvSpPr>
-          <p:cNvPr id="34" name="Rounded Rectangle 33"/>
-          <p:cNvSpPr/>
-          <p:nvPr/>
-        </p:nvSpPr>
-        <p:spPr>
-          <a:xfrm>
-            <a:off x="548640" y="1640000"/>
-            <a:ext cx="2398603" cy="1100000"/>
-          </a:xfrm>
-          <a:prstGeom prst="roundRect">
-            <a:avLst>
-              <a:gd name="adj" fmla="val 8000"/>
-            </a:avLst>
-          </a:prstGeom>
-          <a:solidFill>
-            <a:srgbClr val="F3F5F8"/>
-          </a:solidFill>
-          <a:ln w="9525">
-            <a:solidFill>
-              <a:srgbClr val="DCE1E7"/>
-            </a:solidFill>
-          </a:ln>
-          <a:effectLst/>
-        </p:spPr>
-        <p:style>
-          <a:lnRef idx="1">
-            <a:schemeClr val="accent1"/>
-          </a:lnRef>
-          <a:fillRef idx="3">
-            <a:schemeClr val="accent1"/>
-          </a:fillRef>
-          <a:effectRef idx="2">
-            <a:schemeClr val="accent1"/>
-          </a:effectRef>
-          <a:fontRef idx="minor">
-            <a:schemeClr val="lt1"/>
-          </a:fontRef>
-        </p:style>
-        <p:txBody>
-          <a:bodyPr rtlCol="0" anchor="ctr"/>
-          <a:lstStyle/>
-          <a:p>
-            <a:pPr algn="ctr"/>
-          </a:p>
-        </p:txBody>
-      </p:sp>
-      <p:sp>
-        <p:nvSpPr>
-          <p:cNvPr id="35" name="Oval 34"/>
-          <p:cNvSpPr/>
-          <p:nvPr/>
-        </p:nvSpPr>
-        <p:spPr>
-          <a:xfrm>
-            <a:off x="698640" y="1790000"/>
-            <a:ext cx="320000" cy="320000"/>
-          </a:xfrm>
-          <a:prstGeom prst="ellipse">
-            <a:avLst/>
-          </a:prstGeom>
-          <a:solidFill>
-            <a:srgbClr val="5E6978"/>
-          </a:solidFill>
-          <a:ln>
-            <a:noFill/>
-          </a:ln>
-          <a:effectLst/>
-        </p:spPr>
-        <p:style>
-          <a:lnRef idx="1">
-            <a:schemeClr val="accent1"/>
-          </a:lnRef>
-          <a:fillRef idx="3">
-            <a:schemeClr val="accent1"/>
-          </a:fillRef>
-          <a:effectRef idx="2">
-            <a:schemeClr val="accent1"/>
-          </a:effectRef>
-          <a:fontRef idx="minor">
-            <a:schemeClr val="lt1"/>
-          </a:fontRef>
-        </p:style>
-        <p:txBody>
-          <a:bodyPr rtlCol="0" anchor="ctr" lIns="0" rIns="0" tIns="0" bIns="0"/>
-          <a:lstStyle/>
-          <a:p>
-            <a:pPr algn="ctr"/>
-            <a:r>
-              <a:rPr sz="1200" b="1">
-                <a:solidFill>
-                  <a:srgbClr val="FFFFFF"/>
-                </a:solidFill>
-                <a:latin typeface="Arial"/>
-                <a:ea typeface="Malgun Gothic"/>
-              </a:rPr>
-              <a:t>1</a:t>
-            </a:r>
-          </a:p>
-        </p:txBody>
-      </p:sp>
-      <p:sp>
-        <p:nvSpPr>
-          <p:cNvPr id="36" name="TextBox 35"/>
-          <p:cNvSpPr txBox="1"/>
-          <p:nvPr/>
-        </p:nvSpPr>
-        <p:spPr>
-          <a:xfrm>
-            <a:off x="1108640" y="1790000"/>
-            <a:ext cx="1758603" cy="320000"/>
-          </a:xfrm>
-          <a:prstGeom prst="rect">
-            <a:avLst/>
-          </a:prstGeom>
-          <a:noFill/>
-        </p:spPr>
-        <p:txBody>
-          <a:bodyPr wrap="square" lIns="0" rIns="0" tIns="0" bIns="0" anchor="ctr">
-            <a:spAutoFit/>
-          </a:bodyPr>
-          <a:lstStyle/>
-          <a:p>
-            <a:pPr algn="l"/>
-            <a:r>
-              <a:rPr sz="1250" b="1">
-                <a:solidFill>
-                  <a:srgbClr val="1D2025"/>
-                </a:solidFill>
-                <a:latin typeface="Calibri"/>
-                <a:ea typeface="Malgun Gothic"/>
-              </a:rPr>
-              <a:t>침입 시도</a:t>
-            </a:r>
-          </a:p>
-        </p:txBody>
-      </p:sp>
-      <p:sp>
-        <p:nvSpPr>
-          <p:cNvPr id="37" name="TextBox 36"/>
-          <p:cNvSpPr txBox="1"/>
-          <p:nvPr/>
-        </p:nvSpPr>
-        <p:spPr>
-          <a:xfrm>
-            <a:off x="698640" y="2200000"/>
-            <a:ext cx="2098603" cy="480000"/>
-          </a:xfrm>
-          <a:prstGeom prst="rect">
-            <a:avLst/>
-          </a:prstGeom>
-          <a:noFill/>
-        </p:spPr>
-        <p:txBody>
-          <a:bodyPr wrap="square" lIns="0" rIns="0" tIns="0" bIns="0" anchor="t">
-            <a:spAutoFit/>
-          </a:bodyPr>
-          <a:lstStyle/>
-          <a:p>
-            <a:pPr algn="l"/>
-            <a:r>
-              <a:rPr sz="1050" b="0">
-                <a:solidFill>
-                  <a:srgbClr val="5E6978"/>
-                </a:solidFill>
-                <a:latin typeface="Calibri"/>
-                <a:ea typeface="Malgun Gothic"/>
-              </a:rPr>
-              <a:t>훔친 비밀번호로 네트워크에 침입</a:t>
-            </a:r>
-          </a:p>
-        </p:txBody>
-      </p:sp>
-      <p:sp>
-        <p:nvSpPr>
-          <p:cNvPr id="38" name="Right Arrow 37"/>
-          <p:cNvSpPr/>
-          <p:nvPr/>
-        </p:nvSpPr>
-        <p:spPr>
-          <a:xfrm>
-            <a:off x="3097243" y="2090000"/>
-            <a:ext cx="200000" cy="200000"/>
-          </a:xfrm>
-          <a:prstGeom prst="rightArrow">
-            <a:avLst/>
-          </a:prstGeom>
-          <a:solidFill>
-            <a:srgbClr val="E3202A"/>
-          </a:solidFill>
-          <a:ln>
-            <a:noFill/>
-          </a:ln>
-          <a:effectLst/>
-        </p:spPr>
-        <p:style>
-          <a:lnRef idx="1">
-            <a:schemeClr val="accent1"/>
-          </a:lnRef>
-          <a:fillRef idx="3">
-            <a:schemeClr val="accent1"/>
-          </a:fillRef>
-          <a:effectRef idx="2">
-            <a:schemeClr val="accent1"/>
-          </a:effectRef>
-          <a:fontRef idx="minor">
-            <a:schemeClr val="lt1"/>
-          </a:fontRef>
-        </p:style>
-        <p:txBody>
-          <a:bodyPr rtlCol="0" anchor="ctr"/>
-          <a:lstStyle/>
-          <a:p>
-            <a:pPr algn="ctr"/>
-          </a:p>
-        </p:txBody>
-      </p:sp>
-      <p:sp>
-        <p:nvSpPr>
-          <p:cNvPr id="39" name="Rounded Rectangle 38"/>
-          <p:cNvSpPr/>
-          <p:nvPr/>
-        </p:nvSpPr>
-        <p:spPr>
-          <a:xfrm>
-            <a:off x="3447243" y="1640000"/>
-            <a:ext cx="2398603" cy="1100000"/>
-          </a:xfrm>
-          <a:prstGeom prst="roundRect">
-            <a:avLst>
-              <a:gd name="adj" fmla="val 8000"/>
-            </a:avLst>
-          </a:prstGeom>
-          <a:solidFill>
-            <a:srgbClr val="FDECEC"/>
-          </a:solidFill>
-          <a:ln w="9525">
-            <a:solidFill>
-              <a:srgbClr val="F6C9CB"/>
-            </a:solidFill>
-          </a:ln>
-          <a:effectLst/>
-        </p:spPr>
-        <p:style>
-          <a:lnRef idx="1">
-            <a:schemeClr val="accent1"/>
-          </a:lnRef>
-          <a:fillRef idx="3">
-            <a:schemeClr val="accent1"/>
-          </a:fillRef>
-          <a:effectRef idx="2">
-            <a:schemeClr val="accent1"/>
-          </a:effectRef>
-          <a:fontRef idx="minor">
-            <a:schemeClr val="lt1"/>
-          </a:fontRef>
-        </p:style>
-        <p:txBody>
-          <a:bodyPr rtlCol="0" anchor="ctr"/>
-          <a:lstStyle/>
-          <a:p>
-            <a:pPr algn="ctr"/>
-          </a:p>
-        </p:txBody>
-      </p:sp>
-      <p:sp>
-        <p:nvSpPr>
-          <p:cNvPr id="40" name="Oval 39"/>
-          <p:cNvSpPr/>
-          <p:nvPr/>
-        </p:nvSpPr>
-        <p:spPr>
-          <a:xfrm>
-            <a:off x="3597243" y="1790000"/>
-            <a:ext cx="320000" cy="320000"/>
-          </a:xfrm>
-          <a:prstGeom prst="ellipse">
-            <a:avLst/>
-          </a:prstGeom>
-          <a:solidFill>
-            <a:srgbClr val="E3202A"/>
-          </a:solidFill>
-          <a:ln>
-            <a:noFill/>
-          </a:ln>
-          <a:effectLst/>
-        </p:spPr>
-        <p:style>
-          <a:lnRef idx="1">
-            <a:schemeClr val="accent1"/>
-          </a:lnRef>
-          <a:fillRef idx="3">
-            <a:schemeClr val="accent1"/>
-          </a:fillRef>
-          <a:effectRef idx="2">
-            <a:schemeClr val="accent1"/>
-          </a:effectRef>
-          <a:fontRef idx="minor">
-            <a:schemeClr val="lt1"/>
-          </a:fontRef>
-        </p:style>
-        <p:txBody>
-          <a:bodyPr rtlCol="0" anchor="ctr" lIns="0" rIns="0" tIns="0" bIns="0"/>
-          <a:lstStyle/>
-          <a:p>
-            <a:pPr algn="ctr"/>
-            <a:r>
-              <a:rPr sz="1200" b="1">
-                <a:solidFill>
-                  <a:srgbClr val="FFFFFF"/>
-                </a:solidFill>
-                <a:latin typeface="Arial"/>
-                <a:ea typeface="Malgun Gothic"/>
-              </a:rPr>
-              <a:t>2</a:t>
-            </a:r>
-          </a:p>
-        </p:txBody>
-      </p:sp>
-      <p:sp>
-        <p:nvSpPr>
-          <p:cNvPr id="41" name="TextBox 40"/>
-          <p:cNvSpPr txBox="1"/>
-          <p:nvPr/>
-        </p:nvSpPr>
-        <p:spPr>
-          <a:xfrm>
-            <a:off x="4007243" y="1790000"/>
-            <a:ext cx="1758603" cy="320000"/>
-          </a:xfrm>
-          <a:prstGeom prst="rect">
-            <a:avLst/>
-          </a:prstGeom>
-          <a:noFill/>
-        </p:spPr>
-        <p:txBody>
-          <a:bodyPr wrap="square" lIns="0" rIns="0" tIns="0" bIns="0" anchor="ctr">
-            <a:spAutoFit/>
-          </a:bodyPr>
-          <a:lstStyle/>
-          <a:p>
-            <a:pPr algn="l"/>
-            <a:r>
-              <a:rPr sz="1250" b="1">
-                <a:solidFill>
-                  <a:srgbClr val="1D2025"/>
-                </a:solidFill>
-                <a:latin typeface="Calibri"/>
-                <a:ea typeface="Malgun Gothic"/>
-              </a:rPr>
-              <a:t>즉시 발견</a:t>
-            </a:r>
-          </a:p>
-        </p:txBody>
-      </p:sp>
-      <p:sp>
-        <p:nvSpPr>
-          <p:cNvPr id="42" name="TextBox 41"/>
-          <p:cNvSpPr txBox="1"/>
-          <p:nvPr/>
-        </p:nvSpPr>
-        <p:spPr>
-          <a:xfrm>
-            <a:off x="3597243" y="2200000"/>
-            <a:ext cx="2098603" cy="480000"/>
-          </a:xfrm>
-          <a:prstGeom prst="rect">
-            <a:avLst/>
-          </a:prstGeom>
-          <a:noFill/>
-        </p:spPr>
-        <p:txBody>
-          <a:bodyPr wrap="square" lIns="0" rIns="0" tIns="0" bIns="0" anchor="t">
-            <a:spAutoFit/>
-          </a:bodyPr>
-          <a:lstStyle/>
-          <a:p>
-            <a:pPr algn="l"/>
-            <a:r>
-              <a:rPr sz="1050" b="0">
-                <a:solidFill>
-                  <a:srgbClr val="5E6978"/>
-                </a:solidFill>
-                <a:latin typeface="Calibri"/>
-                <a:ea typeface="Malgun Gothic"/>
-              </a:rPr>
-              <a:t>다른 PC로 이동하는 침입자를 Falcon이 탐지</a:t>
-            </a:r>
-          </a:p>
-        </p:txBody>
-      </p:sp>
-      <p:sp>
-        <p:nvSpPr>
-          <p:cNvPr id="43" name="Right Arrow 42"/>
-          <p:cNvSpPr/>
-          <p:nvPr/>
-        </p:nvSpPr>
-        <p:spPr>
-          <a:xfrm>
-            <a:off x="5995846" y="2090000"/>
-            <a:ext cx="200000" cy="200000"/>
-          </a:xfrm>
-          <a:prstGeom prst="rightArrow">
-            <a:avLst/>
-          </a:prstGeom>
-          <a:solidFill>
-            <a:srgbClr val="E3202A"/>
-          </a:solidFill>
-          <a:ln>
-            <a:noFill/>
-          </a:ln>
-          <a:effectLst/>
-        </p:spPr>
-        <p:style>
-          <a:lnRef idx="1">
-            <a:schemeClr val="accent1"/>
-          </a:lnRef>
-          <a:fillRef idx="3">
-            <a:schemeClr val="accent1"/>
-          </a:fillRef>
-          <a:effectRef idx="2">
-            <a:schemeClr val="accent1"/>
-          </a:effectRef>
-          <a:fontRef idx="minor">
-            <a:schemeClr val="lt1"/>
-          </a:fontRef>
-        </p:style>
-        <p:txBody>
-          <a:bodyPr rtlCol="0" anchor="ctr"/>
-          <a:lstStyle/>
-          <a:p>
-            <a:pPr algn="ctr"/>
-          </a:p>
-        </p:txBody>
-      </p:sp>
-      <p:sp>
-        <p:nvSpPr>
-          <p:cNvPr id="44" name="Rounded Rectangle 43"/>
-          <p:cNvSpPr/>
-          <p:nvPr/>
-        </p:nvSpPr>
-        <p:spPr>
-          <a:xfrm>
-            <a:off x="6345846" y="1640000"/>
-            <a:ext cx="2398603" cy="1100000"/>
-          </a:xfrm>
-          <a:prstGeom prst="roundRect">
-            <a:avLst>
-              <a:gd name="adj" fmla="val 8000"/>
-            </a:avLst>
-          </a:prstGeom>
-          <a:solidFill>
-            <a:srgbClr val="FDECEC"/>
-          </a:solidFill>
-          <a:ln w="9525">
-            <a:solidFill>
-              <a:srgbClr val="F6C9CB"/>
-            </a:solidFill>
-          </a:ln>
-          <a:effectLst/>
-        </p:spPr>
-        <p:style>
-          <a:lnRef idx="1">
-            <a:schemeClr val="accent1"/>
-          </a:lnRef>
-          <a:fillRef idx="3">
-            <a:schemeClr val="accent1"/>
-          </a:fillRef>
-          <a:effectRef idx="2">
-            <a:schemeClr val="accent1"/>
-          </a:effectRef>
-          <a:fontRef idx="minor">
-            <a:schemeClr val="lt1"/>
-          </a:fontRef>
-        </p:style>
-        <p:txBody>
-          <a:bodyPr rtlCol="0" anchor="ctr"/>
-          <a:lstStyle/>
-          <a:p>
-            <a:pPr algn="ctr"/>
-          </a:p>
-        </p:txBody>
-      </p:sp>
-      <p:sp>
-        <p:nvSpPr>
-          <p:cNvPr id="45" name="Oval 44"/>
-          <p:cNvSpPr/>
-          <p:nvPr/>
-        </p:nvSpPr>
-        <p:spPr>
-          <a:xfrm>
-            <a:off x="6495846" y="1790000"/>
-            <a:ext cx="320000" cy="320000"/>
-          </a:xfrm>
-          <a:prstGeom prst="ellipse">
-            <a:avLst/>
-          </a:prstGeom>
-          <a:solidFill>
-            <a:srgbClr val="E3202A"/>
-          </a:solidFill>
-          <a:ln>
-            <a:noFill/>
-          </a:ln>
-          <a:effectLst/>
-        </p:spPr>
-        <p:style>
-          <a:lnRef idx="1">
-            <a:schemeClr val="accent1"/>
-          </a:lnRef>
-          <a:fillRef idx="3">
-            <a:schemeClr val="accent1"/>
-          </a:fillRef>
-          <a:effectRef idx="2">
-            <a:schemeClr val="accent1"/>
-          </a:effectRef>
-          <a:fontRef idx="minor">
-            <a:schemeClr val="lt1"/>
-          </a:fontRef>
-        </p:style>
-        <p:txBody>
-          <a:bodyPr rtlCol="0" anchor="ctr" lIns="0" rIns="0" tIns="0" bIns="0"/>
-          <a:lstStyle/>
-          <a:p>
-            <a:pPr algn="ctr"/>
-            <a:r>
-              <a:rPr sz="1200" b="1">
-                <a:solidFill>
-                  <a:srgbClr val="FFFFFF"/>
-                </a:solidFill>
-                <a:latin typeface="Arial"/>
-                <a:ea typeface="Malgun Gothic"/>
-              </a:rPr>
-              <a:t>3</a:t>
-            </a:r>
-          </a:p>
-        </p:txBody>
-      </p:sp>
-      <p:sp>
-        <p:nvSpPr>
-          <p:cNvPr id="46" name="TextBox 45"/>
-          <p:cNvSpPr txBox="1"/>
-          <p:nvPr/>
-        </p:nvSpPr>
-        <p:spPr>
-          <a:xfrm>
-            <a:off x="6905846" y="1790000"/>
-            <a:ext cx="1758603" cy="320000"/>
-          </a:xfrm>
-          <a:prstGeom prst="rect">
-            <a:avLst/>
-          </a:prstGeom>
-          <a:noFill/>
-        </p:spPr>
-        <p:txBody>
-          <a:bodyPr wrap="square" lIns="0" rIns="0" tIns="0" bIns="0" anchor="ctr">
-            <a:spAutoFit/>
-          </a:bodyPr>
-          <a:lstStyle/>
-          <a:p>
-            <a:pPr algn="l"/>
-            <a:r>
-              <a:rPr sz="1250" b="1">
-                <a:solidFill>
-                  <a:srgbClr val="1D2025"/>
-                </a:solidFill>
-                <a:latin typeface="Calibri"/>
-                <a:ea typeface="Malgun Gothic"/>
-              </a:rPr>
-              <a:t>해킹 도구 차단</a:t>
-            </a:r>
-          </a:p>
-        </p:txBody>
-      </p:sp>
-      <p:sp>
-        <p:nvSpPr>
-          <p:cNvPr id="47" name="TextBox 46"/>
-          <p:cNvSpPr txBox="1"/>
-          <p:nvPr/>
-        </p:nvSpPr>
-        <p:spPr>
-          <a:xfrm>
-            <a:off x="6495846" y="2200000"/>
-            <a:ext cx="2098603" cy="480000"/>
-          </a:xfrm>
-          <a:prstGeom prst="rect">
-            <a:avLst/>
-          </a:prstGeom>
-          <a:noFill/>
-        </p:spPr>
-        <p:txBody>
-          <a:bodyPr wrap="square" lIns="0" rIns="0" tIns="0" bIns="0" anchor="t">
-            <a:spAutoFit/>
-          </a:bodyPr>
-          <a:lstStyle/>
-          <a:p>
-            <a:pPr algn="l"/>
-            <a:r>
-              <a:rPr sz="1050" b="0">
-                <a:solidFill>
-                  <a:srgbClr val="5E6978"/>
-                </a:solidFill>
-                <a:latin typeface="Calibri"/>
-                <a:ea typeface="Malgun Gothic"/>
-              </a:rPr>
-              <a:t>비밀번호 탈취와 해킹 도구 실행을 차단</a:t>
-            </a:r>
-          </a:p>
-        </p:txBody>
-      </p:sp>
-      <p:sp>
-        <p:nvSpPr>
-          <p:cNvPr id="48" name="Right Arrow 47"/>
-          <p:cNvSpPr/>
-          <p:nvPr/>
-        </p:nvSpPr>
-        <p:spPr>
-          <a:xfrm>
-            <a:off x="8894449" y="2090000"/>
-            <a:ext cx="200000" cy="200000"/>
-          </a:xfrm>
-          <a:prstGeom prst="rightArrow">
-            <a:avLst/>
-          </a:prstGeom>
-          <a:solidFill>
-            <a:srgbClr val="E3202A"/>
-          </a:solidFill>
-          <a:ln>
-            <a:noFill/>
-          </a:ln>
-          <a:effectLst/>
-        </p:spPr>
-        <p:style>
-          <a:lnRef idx="1">
-            <a:schemeClr val="accent1"/>
-          </a:lnRef>
-          <a:fillRef idx="3">
-            <a:schemeClr val="accent1"/>
-          </a:fillRef>
-          <a:effectRef idx="2">
-            <a:schemeClr val="accent1"/>
-          </a:effectRef>
-          <a:fontRef idx="minor">
-            <a:schemeClr val="lt1"/>
-          </a:fontRef>
-        </p:style>
-        <p:txBody>
-          <a:bodyPr rtlCol="0" anchor="ctr"/>
-          <a:lstStyle/>
-          <a:p>
-            <a:pPr algn="ctr"/>
-          </a:p>
-        </p:txBody>
-      </p:sp>
-      <p:sp>
-        <p:nvSpPr>
-          <p:cNvPr id="49" name="Rounded Rectangle 48"/>
-          <p:cNvSpPr/>
-          <p:nvPr/>
-        </p:nvSpPr>
-        <p:spPr>
-          <a:xfrm>
-            <a:off x="9244449" y="1640000"/>
-            <a:ext cx="2398603" cy="1100000"/>
-          </a:xfrm>
-          <a:prstGeom prst="roundRect">
-            <a:avLst>
-              <a:gd name="adj" fmla="val 8000"/>
-            </a:avLst>
-          </a:prstGeom>
-          <a:solidFill>
-            <a:srgbClr val="FDECEC"/>
-          </a:solidFill>
-          <a:ln w="9525">
-            <a:solidFill>
-              <a:srgbClr val="F6C9CB"/>
-            </a:solidFill>
-          </a:ln>
-          <a:effectLst/>
-        </p:spPr>
-        <p:style>
-          <a:lnRef idx="1">
-            <a:schemeClr val="accent1"/>
-          </a:lnRef>
-          <a:fillRef idx="3">
-            <a:schemeClr val="accent1"/>
-          </a:fillRef>
-          <a:effectRef idx="2">
-            <a:schemeClr val="accent1"/>
-          </a:effectRef>
-          <a:fontRef idx="minor">
-            <a:schemeClr val="lt1"/>
-          </a:fontRef>
-        </p:style>
-        <p:txBody>
-          <a:bodyPr rtlCol="0" anchor="ctr"/>
-          <a:lstStyle/>
-          <a:p>
-            <a:pPr algn="ctr"/>
-          </a:p>
-        </p:txBody>
-      </p:sp>
-      <p:sp>
-        <p:nvSpPr>
-          <p:cNvPr id="50" name="Oval 49"/>
-          <p:cNvSpPr/>
-          <p:nvPr/>
-        </p:nvSpPr>
-        <p:spPr>
-          <a:xfrm>
-            <a:off x="9394449" y="1790000"/>
-            <a:ext cx="320000" cy="320000"/>
-          </a:xfrm>
-          <a:prstGeom prst="ellipse">
-            <a:avLst/>
-          </a:prstGeom>
-          <a:solidFill>
-            <a:srgbClr val="E3202A"/>
-          </a:solidFill>
-          <a:ln>
-            <a:noFill/>
-          </a:ln>
-          <a:effectLst/>
-        </p:spPr>
-        <p:style>
-          <a:lnRef idx="1">
-            <a:schemeClr val="accent1"/>
-          </a:lnRef>
-          <a:fillRef idx="3">
-            <a:schemeClr val="accent1"/>
-          </a:fillRef>
-          <a:effectRef idx="2">
-            <a:schemeClr val="accent1"/>
-          </a:effectRef>
-          <a:fontRef idx="minor">
-            <a:schemeClr val="lt1"/>
-          </a:fontRef>
-        </p:style>
-        <p:txBody>
-          <a:bodyPr rtlCol="0" anchor="ctr" lIns="0" rIns="0" tIns="0" bIns="0"/>
-          <a:lstStyle/>
-          <a:p>
-            <a:pPr algn="ctr"/>
-            <a:r>
-              <a:rPr sz="1200" b="1">
-                <a:solidFill>
-                  <a:srgbClr val="FFFFFF"/>
-                </a:solidFill>
-                <a:latin typeface="Arial"/>
-                <a:ea typeface="Malgun Gothic"/>
-              </a:rPr>
-              <a:t>4</a:t>
-            </a:r>
-          </a:p>
-        </p:txBody>
-      </p:sp>
-      <p:sp>
-        <p:nvSpPr>
-          <p:cNvPr id="51" name="TextBox 50"/>
-          <p:cNvSpPr txBox="1"/>
-          <p:nvPr/>
-        </p:nvSpPr>
-        <p:spPr>
-          <a:xfrm>
-            <a:off x="9804449" y="1790000"/>
-            <a:ext cx="1758603" cy="320000"/>
-          </a:xfrm>
-          <a:prstGeom prst="rect">
-            <a:avLst/>
-          </a:prstGeom>
-          <a:noFill/>
-        </p:spPr>
-        <p:txBody>
-          <a:bodyPr wrap="square" lIns="0" rIns="0" tIns="0" bIns="0" anchor="ctr">
-            <a:spAutoFit/>
-          </a:bodyPr>
-          <a:lstStyle/>
-          <a:p>
-            <a:pPr algn="l"/>
-            <a:r>
-              <a:rPr sz="1250" b="1">
-                <a:solidFill>
-                  <a:srgbClr val="1D2025"/>
-                </a:solidFill>
-                <a:latin typeface="Calibri"/>
-                <a:ea typeface="Malgun Gothic"/>
-              </a:rPr>
-              <a:t>랜섬웨어 차단</a:t>
-            </a:r>
-          </a:p>
-        </p:txBody>
-      </p:sp>
-      <p:sp>
-        <p:nvSpPr>
-          <p:cNvPr id="52" name="TextBox 51"/>
-          <p:cNvSpPr txBox="1"/>
-          <p:nvPr/>
-        </p:nvSpPr>
-        <p:spPr>
-          <a:xfrm>
-            <a:off x="9394449" y="2200000"/>
-            <a:ext cx="2098603" cy="480000"/>
-          </a:xfrm>
-          <a:prstGeom prst="rect">
-            <a:avLst/>
-          </a:prstGeom>
-          <a:noFill/>
-        </p:spPr>
-        <p:txBody>
-          <a:bodyPr wrap="square" lIns="0" rIns="0" tIns="0" bIns="0" anchor="t">
-            <a:spAutoFit/>
-          </a:bodyPr>
-          <a:lstStyle/>
-          <a:p>
-            <a:pPr algn="l"/>
-            <a:r>
-              <a:rPr sz="1050" b="0">
-                <a:solidFill>
-                  <a:srgbClr val="5E6978"/>
-                </a:solidFill>
-                <a:latin typeface="Calibri"/>
-                <a:ea typeface="Malgun Gothic"/>
-              </a:rPr>
-              <a:t>파일이 암호화되기 전에 해당 PC를 격리</a:t>
-            </a:r>
-          </a:p>
-        </p:txBody>
-      </p:sp>
-      <p:sp>
-        <p:nvSpPr>
-          <p:cNvPr id="53" name="TextBox 52"/>
-          <p:cNvSpPr txBox="1"/>
-          <p:nvPr/>
-        </p:nvSpPr>
-        <p:spPr>
-          <a:xfrm>
-            <a:off x="548640" y="2800000"/>
-            <a:ext cx="11094415" cy="180000"/>
-          </a:xfrm>
-          <a:prstGeom prst="rect">
-            <a:avLst/>
-          </a:prstGeom>
-          <a:noFill/>
-        </p:spPr>
-        <p:txBody>
-          <a:bodyPr wrap="square" lIns="0" rIns="0" tIns="0" bIns="0" anchor="t">
-            <a:spAutoFit/>
-          </a:bodyPr>
-          <a:lstStyle/>
-          <a:p>
-            <a:pPr algn="l"/>
-            <a:r>
-              <a:rPr sz="850" b="0">
-                <a:solidFill>
-                  <a:srgbClr val="5E6978"/>
-                </a:solidFill>
-                <a:latin typeface="Calibri"/>
-                <a:ea typeface="Malgun Gothic"/>
-              </a:rPr>
-              <a:t>출처: CrowdStrike 사례 연구 (PUNK SPIDER, Akira 랜섬웨어). 이해를 돕기 위해 단계를 간략화함.</a:t>
-            </a:r>
-          </a:p>
-        </p:txBody>
-      </p:sp>
-      <p:sp>
-        <p:nvSpPr>
-          <p:cNvPr id="54" name="Rounded Rectangle 53"/>
-          <p:cNvSpPr/>
-          <p:nvPr/>
-        </p:nvSpPr>
-        <p:spPr>
-          <a:xfrm>
-            <a:off x="548640" y="5120000"/>
-            <a:ext cx="11094415" cy="720000"/>
-          </a:xfrm>
-          <a:prstGeom prst="roundRect">
-            <a:avLst>
-              <a:gd name="adj" fmla="val 15000"/>
-            </a:avLst>
-          </a:prstGeom>
-          <a:solidFill>
-            <a:srgbClr val="1D2025"/>
-          </a:solidFill>
-          <a:ln>
-            <a:noFill/>
-          </a:ln>
-          <a:effectLst/>
-        </p:spPr>
-        <p:style>
-          <a:lnRef idx="1">
-            <a:schemeClr val="accent1"/>
-          </a:lnRef>
-          <a:fillRef idx="3">
-            <a:schemeClr val="accent1"/>
-          </a:fillRef>
-          <a:effectRef idx="2">
-            <a:schemeClr val="accent1"/>
-          </a:effectRef>
-          <a:fontRef idx="minor">
-            <a:schemeClr val="lt1"/>
-          </a:fontRef>
-        </p:style>
-        <p:txBody>
-          <a:bodyPr rtlCol="0" anchor="ctr"/>
-          <a:lstStyle/>
-          <a:p>
-            <a:pPr algn="ctr"/>
-          </a:p>
-        </p:txBody>
-      </p:sp>
-      <p:sp>
-        <p:nvSpPr>
-          <p:cNvPr id="55" name="TextBox 54"/>
-          <p:cNvSpPr txBox="1"/>
-          <p:nvPr/>
-        </p:nvSpPr>
-        <p:spPr>
-          <a:xfrm>
-            <a:off x="548640" y="5120000"/>
-            <a:ext cx="3698138" cy="720000"/>
-          </a:xfrm>
-          <a:prstGeom prst="rect">
-            <a:avLst/>
-          </a:prstGeom>
-          <a:noFill/>
-        </p:spPr>
-        <p:txBody>
-          <a:bodyPr wrap="square" lIns="0" rIns="0" tIns="0" bIns="0" anchor="ctr">
-            <a:spAutoFit/>
-          </a:bodyPr>
-          <a:lstStyle/>
-          <a:p>
-            <a:pPr algn="ctr"/>
-            <a:r>
-              <a:rPr sz="1600" b="1">
-                <a:solidFill>
-                  <a:srgbClr val="FF5A60"/>
-                </a:solidFill>
-                <a:latin typeface="Calibri"/>
-                <a:ea typeface="Malgun Gothic"/>
-              </a:rPr>
-              <a:t>100% 탐지</a:t>
-            </a:r>
-          </a:p>
-          <a:p>
-            <a:pPr algn="ctr"/>
-            <a:r>
-              <a:rPr sz="1000" b="0">
-                <a:solidFill>
-                  <a:srgbClr val="D6DAE0"/>
-                </a:solidFill>
-                <a:latin typeface="Calibri"/>
-                <a:ea typeface="Malgun Gothic"/>
-              </a:rPr>
-              <a:t>MITRE ATT&amp;CK® Evaluations 2025</a:t>
-            </a:r>
-          </a:p>
-        </p:txBody>
-      </p:sp>
-      <p:sp>
-        <p:nvSpPr>
-          <p:cNvPr id="56" name="TextBox 55"/>
-          <p:cNvSpPr txBox="1"/>
-          <p:nvPr/>
-        </p:nvSpPr>
-        <p:spPr>
-          <a:xfrm>
-            <a:off x="4246778" y="5120000"/>
-            <a:ext cx="3698138" cy="720000"/>
-          </a:xfrm>
-          <a:prstGeom prst="rect">
-            <a:avLst/>
-          </a:prstGeom>
-          <a:noFill/>
-        </p:spPr>
-        <p:txBody>
-          <a:bodyPr wrap="square" lIns="0" rIns="0" tIns="0" bIns="0" anchor="ctr">
-            <a:spAutoFit/>
-          </a:bodyPr>
-          <a:lstStyle/>
-          <a:p>
-            <a:pPr algn="ctr"/>
-            <a:r>
-              <a:rPr sz="1600" b="1">
-                <a:solidFill>
-                  <a:srgbClr val="FF5A60"/>
-                </a:solidFill>
-                <a:latin typeface="Calibri"/>
-                <a:ea typeface="Malgun Gothic"/>
-              </a:rPr>
-              <a:t>리더</a:t>
-            </a:r>
-          </a:p>
-          <a:p>
-            <a:pPr algn="ctr"/>
-            <a:r>
-              <a:rPr sz="1000" b="0">
-                <a:solidFill>
-                  <a:srgbClr val="D6DAE0"/>
-                </a:solidFill>
-                <a:latin typeface="Calibri"/>
-                <a:ea typeface="Malgun Gothic"/>
-              </a:rPr>
-              <a:t>Gartner® Magic Quadrant™ EPP 부문</a:t>
-            </a:r>
-          </a:p>
-        </p:txBody>
-      </p:sp>
-      <p:sp>
-        <p:nvSpPr>
-          <p:cNvPr id="57" name="TextBox 56"/>
-          <p:cNvSpPr txBox="1"/>
-          <p:nvPr/>
-        </p:nvSpPr>
-        <p:spPr>
-          <a:xfrm>
-            <a:off x="7944916" y="5120000"/>
-            <a:ext cx="3698138" cy="720000"/>
-          </a:xfrm>
-          <a:prstGeom prst="rect">
-            <a:avLst/>
-          </a:prstGeom>
-          <a:noFill/>
-        </p:spPr>
-        <p:txBody>
-          <a:bodyPr wrap="square" lIns="0" rIns="0" tIns="0" bIns="0" anchor="ctr">
-            <a:spAutoFit/>
-          </a:bodyPr>
-          <a:lstStyle/>
-          <a:p>
-            <a:pPr algn="ctr"/>
-            <a:r>
-              <a:rPr sz="1600" b="1">
-                <a:solidFill>
-                  <a:srgbClr val="FF5A60"/>
-                </a:solidFill>
-                <a:latin typeface="Calibri"/>
-                <a:ea typeface="Malgun Gothic"/>
-              </a:rPr>
-              <a:t>랜섬웨어 100% 차단</a:t>
-            </a:r>
-          </a:p>
-          <a:p>
-            <a:pPr algn="ctr"/>
-            <a:r>
-              <a:rPr sz="1000" b="0">
-                <a:solidFill>
-                  <a:srgbClr val="D6DAE0"/>
-                </a:solidFill>
-                <a:latin typeface="Calibri"/>
-                <a:ea typeface="Malgun Gothic"/>
-              </a:rPr>
-              <a:t>SE Labs EDR 랜섬웨어 테스트 2024</a:t>
             </a:r>
           </a:p>
         </p:txBody>
@@ -9990,7 +9114,7 @@
                 <a:ea typeface="Arial" pitchFamily="34" charset="-122"/>
                 <a:cs typeface="Arial" pitchFamily="34" charset="-120"/>
               </a:rPr>
-              <a:t>단일 지원 창구</a:t>
+              <a:t>책임 있는 직접 지원</a:t>
             </a:r>
             <a:endParaRPr lang="en-US" sz="1500" dirty="0"/>
           </a:p>
@@ -10029,7 +9153,7 @@
                 <a:ea typeface="Calibri" pitchFamily="34" charset="-122"/>
                 <a:cs typeface="Calibri" pitchFamily="34" charset="-120"/>
               </a:rPr>
-              <a:t>기술지원, 라이선스, 갱신을 하나의 파트너가 처리하며, 필요 시 SK쉴더스와 CrowdStrike로 연계합니다.</a:t>
+              <a:t>기술지원, 라이선스, 갱신을 시큐코리아가 직접 처리하고, 첫 연락부터 문제 해결까지 끝까지 함께합니다.</a:t>
             </a:r>
             <a:endParaRPr lang="en-US" sz="1200" dirty="0"/>
           </a:p>
@@ -10540,8 +9664,8 @@
         </p:blipFill>
         <p:spPr>
           <a:xfrm>
-            <a:off x="424065" y="4555236"/>
-            <a:ext cx="816077" cy="310244"/>
+            <a:off x="673364" y="4565660"/>
+            <a:ext cx="317480" cy="317480"/>
           </a:xfrm>
           <a:prstGeom prst="rect">
             <a:avLst/>
@@ -10803,7 +9927,7 @@
                 <a:ea typeface="Calibri" pitchFamily="34" charset="-122"/>
                 <a:cs typeface="Calibri" pitchFamily="34" charset="-120"/>
               </a:rPr>
-              <a:t>secukorea@secukorea.com</a:t>
+              <a:t>sales@secukorea.com</a:t>
             </a:r>
             <a:endParaRPr lang="en-US" sz="1400" dirty="0"/>
           </a:p>

--- a/KOR._CrowdStrike_Falcon_Proposal_for_Westin_Resort_Guam_SECUKOREA.pptx
+++ b/KOR._CrowdStrike_Falcon_Proposal_for_Westin_Resort_Guam_SECUKOREA.pptx
@@ -812,7 +812,7 @@
           <a:p>
             <a:r>
               <a:rPr lang="en-US" dirty="0"/>
-              <a:t>도입 후 시큐코리아가 24시간 원격으로 지원하고, 전담 엔지니어가 첫 연락부터 해결까지 직접 책임집니다. 중대한 사고 시에는 CrowdStrike 파트너인 SK쉴더스가 침해사고 대응팀으로 함께 대응합니다.</a:t>
+              <a:t>도입 후 시큐코리아가 24시간 원격으로 지원하고, 전담 엔지니어가 첫 연락부터 해결까지 직접 책임집니다. 필요 시 SK쉴더스로 에스컬레이션하며, CrowdStrike 파트너인 SK쉴더스가 침해사고 대응팀으로 함께 대응합니다.</a:t>
             </a:r>
           </a:p>
         </p:txBody>
@@ -1355,7 +1355,7 @@
                   <a:srgbClr val="E3202A"/>
                 </a:solidFill>
                 <a:latin typeface="Arial" pitchFamily="34" charset="0"/>
-                <a:ea typeface="Arial" pitchFamily="34" charset="-122"/>
+                <a:ea typeface="Malgun Gothic" pitchFamily="34" charset="-122"/>
                 <a:cs typeface="Arial" pitchFamily="34" charset="-120"/>
               </a:rPr>
               <a:t>사업 제안서   |   엔드포인트 보안</a:t>
@@ -1394,7 +1394,7 @@
                   <a:srgbClr val="FFFFFF"/>
                 </a:solidFill>
                 <a:latin typeface="Arial" pitchFamily="34" charset="0"/>
-                <a:ea typeface="Arial" pitchFamily="34" charset="-122"/>
+                <a:ea typeface="Malgun Gothic" pitchFamily="34" charset="-122"/>
                 <a:cs typeface="Arial" pitchFamily="34" charset="-120"/>
               </a:rPr>
               <a:t>웨스틴 리조트 괌을 위한 실시간 엔드포인트 보호</a:t>
@@ -1436,7 +1436,7 @@
                   <a:srgbClr val="FFFFFF"/>
                 </a:solidFill>
                 <a:latin typeface="Calibri" pitchFamily="34" charset="0"/>
-                <a:ea typeface="Calibri" pitchFamily="34" charset="-122"/>
+                <a:ea typeface="Malgun Gothic" pitchFamily="34" charset="-122"/>
                 <a:cs typeface="Calibri" pitchFamily="34" charset="-120"/>
               </a:rPr>
               <a:t>CrowdStrike Falcon® 기반 (EPP / EDR)</a:t>
@@ -1456,7 +1456,7 @@
                   <a:srgbClr val="C9CED6"/>
                 </a:solidFill>
                 <a:latin typeface="Calibri" pitchFamily="34" charset="0"/>
-                <a:ea typeface="Calibri" pitchFamily="34" charset="-122"/>
+                <a:ea typeface="Malgun Gothic" pitchFamily="34" charset="-122"/>
                 <a:cs typeface="Calibri" pitchFamily="34" charset="-120"/>
               </a:rPr>
               <a:t>시큐코리아 보안 제안서</a:t>
@@ -1495,7 +1495,7 @@
                   <a:srgbClr val="E3202A"/>
                 </a:solidFill>
                 <a:latin typeface="Calibri" pitchFamily="34" charset="0"/>
-                <a:ea typeface="Calibri" pitchFamily="34" charset="-122"/>
+                <a:ea typeface="Malgun Gothic" pitchFamily="34" charset="-122"/>
                 <a:cs typeface="Calibri" pitchFamily="34" charset="-120"/>
               </a:rPr>
               <a:t>제안사</a:t>
@@ -1534,21 +1534,10 @@
                   <a:srgbClr val="FFFFFF"/>
                 </a:solidFill>
                 <a:latin typeface="Calibri" pitchFamily="34" charset="0"/>
-                <a:ea typeface="Calibri" pitchFamily="34" charset="-122"/>
+                <a:ea typeface="Malgun Gothic" pitchFamily="34" charset="-122"/>
                 <a:cs typeface="Calibri" pitchFamily="34" charset="-120"/>
               </a:rPr>
-              <a:t>시큐코리아</a:t>
-            </a:r>
-            <a:r>
-              <a:rPr lang="ko-KR" altLang="en-US" sz="1500" dirty="0">
-                <a:solidFill>
-                  <a:srgbClr val="FFFFFF"/>
-                </a:solidFill>
-                <a:latin typeface="Calibri" pitchFamily="34" charset="0"/>
-                <a:ea typeface="Calibri" pitchFamily="34" charset="-122"/>
-                <a:cs typeface="Calibri" pitchFamily="34" charset="-120"/>
-              </a:rPr>
-              <a:t>㈜</a:t>
+              <a:t>시큐코리아㈜</a:t>
             </a:r>
             <a:endParaRPr lang="en-US" sz="1500" dirty="0"/>
           </a:p>
@@ -1584,7 +1573,7 @@
                   <a:srgbClr val="E3202A"/>
                 </a:solidFill>
                 <a:latin typeface="Calibri" pitchFamily="34" charset="0"/>
-                <a:ea typeface="Calibri" pitchFamily="34" charset="-122"/>
+                <a:ea typeface="Malgun Gothic" pitchFamily="34" charset="-122"/>
                 <a:cs typeface="Calibri" pitchFamily="34" charset="-120"/>
               </a:rPr>
               <a:t>고객사</a:t>
@@ -1623,7 +1612,7 @@
                   <a:srgbClr val="FFFFFF"/>
                 </a:solidFill>
                 <a:latin typeface="Calibri" pitchFamily="34" charset="0"/>
-                <a:ea typeface="Calibri" pitchFamily="34" charset="-122"/>
+                <a:ea typeface="Malgun Gothic" pitchFamily="34" charset="-122"/>
                 <a:cs typeface="Calibri" pitchFamily="34" charset="-120"/>
               </a:rPr>
               <a:t>웨스틴 리조트 괌</a:t>
@@ -1662,7 +1651,7 @@
                   <a:srgbClr val="E3202A"/>
                 </a:solidFill>
                 <a:latin typeface="Calibri" pitchFamily="34" charset="0"/>
-                <a:ea typeface="Calibri" pitchFamily="34" charset="-122"/>
+                <a:ea typeface="Malgun Gothic" pitchFamily="34" charset="-122"/>
                 <a:cs typeface="Calibri" pitchFamily="34" charset="-120"/>
               </a:rPr>
               <a:t>제안일</a:t>
@@ -1701,7 +1690,7 @@
                   <a:srgbClr val="FFFFFF"/>
                 </a:solidFill>
                 <a:latin typeface="Calibri" pitchFamily="34" charset="0"/>
-                <a:ea typeface="Calibri" pitchFamily="34" charset="-122"/>
+                <a:ea typeface="Malgun Gothic" pitchFamily="34" charset="-122"/>
                 <a:cs typeface="Calibri" pitchFamily="34" charset="-120"/>
               </a:rPr>
               <a:t>2026년 9월</a:t>
@@ -1740,7 +1729,7 @@
                   <a:srgbClr val="8A93A0"/>
                 </a:solidFill>
                 <a:latin typeface="Calibri" pitchFamily="34" charset="0"/>
-                <a:ea typeface="Calibri" pitchFamily="34" charset="-122"/>
+                <a:ea typeface="Malgun Gothic" pitchFamily="34" charset="-122"/>
                 <a:cs typeface="Calibri" pitchFamily="34" charset="-120"/>
               </a:rPr>
               <a:t>솔루션</a:t>
@@ -1852,7 +1841,7 @@
                   <a:srgbClr val="E3202A"/>
                 </a:solidFill>
                 <a:latin typeface="Arial" pitchFamily="34" charset="0"/>
-                <a:ea typeface="맑은 고딕" pitchFamily="34" charset="-122"/>
+                <a:ea typeface="Malgun Gothic" pitchFamily="34" charset="-122"/>
                 <a:cs typeface="Arial" pitchFamily="34" charset="-120"/>
               </a:rPr>
               <a:t>01   현황</a:t>
@@ -1891,7 +1880,7 @@
                   <a:srgbClr val="151A21"/>
                 </a:solidFill>
                 <a:latin typeface="Arial" pitchFamily="34" charset="0"/>
-                <a:ea typeface="맑은 고딕" pitchFamily="34" charset="-122"/>
+                <a:ea typeface="Malgun Gothic" pitchFamily="34" charset="-122"/>
                 <a:cs typeface="Arial" pitchFamily="34" charset="-120"/>
               </a:rPr>
               <a:t>현재 환경 및 보안 과제</a:t>
@@ -2005,7 +1994,7 @@
                   <a:srgbClr val="151A21"/>
                 </a:solidFill>
                 <a:latin typeface="Arial" pitchFamily="34" charset="0"/>
-                <a:ea typeface="맑은 고딕" pitchFamily="34" charset="-122"/>
+                <a:ea typeface="Malgun Gothic" pitchFamily="34" charset="-122"/>
                 <a:cs typeface="Arial" pitchFamily="34" charset="-120"/>
               </a:rPr>
               <a:t>24시간 무중단 호텔 운영</a:t>
@@ -2044,7 +2033,7 @@
                   <a:srgbClr val="5E6978"/>
                 </a:solidFill>
                 <a:latin typeface="Calibri" pitchFamily="34" charset="0"/>
-                <a:ea typeface="맑은 고딕" pitchFamily="34" charset="-122"/>
+                <a:ea typeface="Malgun Gothic" pitchFamily="34" charset="-122"/>
                 <a:cs typeface="Calibri" pitchFamily="34" charset="-120"/>
               </a:rPr>
               <a:t>고객 개인정보, 결제 처리, 프런트 및 백오피스 시스템은 24시간 가용성과 보호가 유지되어야 합니다.</a:t>
@@ -2134,7 +2123,7 @@
                   <a:srgbClr val="151A21"/>
                 </a:solidFill>
                 <a:latin typeface="Arial" pitchFamily="34" charset="0"/>
-                <a:ea typeface="맑은 고딕" pitchFamily="34" charset="-122"/>
+                <a:ea typeface="Malgun Gothic" pitchFamily="34" charset="-122"/>
                 <a:cs typeface="Arial" pitchFamily="34" charset="-120"/>
               </a:rPr>
               <a:t>제한적인 현장 보안 인력</a:t>
@@ -2173,7 +2162,7 @@
                   <a:srgbClr val="5E6978"/>
                 </a:solidFill>
                 <a:latin typeface="Calibri" pitchFamily="34" charset="0"/>
-                <a:ea typeface="맑은 고딕" pitchFamily="34" charset="-122"/>
+                <a:ea typeface="Malgun Gothic" pitchFamily="34" charset="-122"/>
                 <a:cs typeface="Calibri" pitchFamily="34" charset="-120"/>
               </a:rPr>
               <a:t>전담 보안 운영팀이 없어 수동 패치와 건별 사고 조사를 지속하기 어렵습니다.</a:t>
@@ -2263,7 +2252,7 @@
                   <a:srgbClr val="151A21"/>
                 </a:solidFill>
                 <a:latin typeface="Arial" pitchFamily="34" charset="0"/>
-                <a:ea typeface="맑은 고딕" pitchFamily="34" charset="-122"/>
+                <a:ea typeface="Malgun Gothic" pitchFamily="34" charset="-122"/>
                 <a:cs typeface="Arial" pitchFamily="34" charset="-120"/>
               </a:rPr>
               <a:t>스캔 위주의 보호</a:t>
@@ -2297,48 +2286,15 @@
               <a:buNone/>
             </a:pPr>
             <a:r>
-              <a:rPr lang="ko-KR" sz="1200" dirty="0">
+              <a:rPr lang="en-US" altLang="ko-KR" sz="1200">
                 <a:solidFill>
                   <a:srgbClr val="5E6978"/>
                 </a:solidFill>
                 <a:latin typeface="Calibri" pitchFamily="34" charset="0"/>
-                <a:ea typeface="맑은 고딕" pitchFamily="34" charset="-122"/>
+                <a:ea typeface="Malgun Gothic" pitchFamily="34" charset="-122"/>
                 <a:cs typeface="Calibri" pitchFamily="34" charset="-120"/>
               </a:rPr>
-              <a:t>Nessus는 취약점을 식별하지만 악성코드를 차단하거나 진행 중인 공격을 막지는 못합니다. 모든 후속 조치는 수작업입니다.</a:t>
-            </a:r>
-            <a:r>
-              <a:rPr lang="en-US" altLang="ko-KR" sz="1200" dirty="0">
-                <a:solidFill>
-                  <a:srgbClr val="5E6978"/>
-                </a:solidFill>
-                <a:latin typeface="Calibri" pitchFamily="34" charset="0"/>
-                <a:ea typeface="맑은 고딕" pitchFamily="34" charset="-122"/>
-                <a:cs typeface="Calibri" pitchFamily="34" charset="-120"/>
-              </a:rPr>
-              <a:t> </a:t>
-            </a:r>
-            <a:r>
-              <a:rPr lang="ko-KR" altLang="en-US" sz="1200" dirty="0">
-                <a:solidFill>
-                  <a:srgbClr val="5E6978"/>
-                </a:solidFill>
-                <a:latin typeface="Calibri" pitchFamily="34" charset="0"/>
-                <a:ea typeface="맑은 고딕" pitchFamily="34" charset="-122"/>
-                <a:cs typeface="Calibri" pitchFamily="34" charset="-120"/>
-              </a:rPr>
-              <a:t>추가적으로 스캔과 스캔사이의 무방비 시간이 존재합니다</a:t>
-            </a:r>
-            <a:r>
-              <a:rPr lang="en-US" altLang="ko-KR" sz="1200" dirty="0">
-                <a:solidFill>
-                  <a:srgbClr val="5E6978"/>
-                </a:solidFill>
-                <a:latin typeface="Calibri" pitchFamily="34" charset="0"/>
-                <a:ea typeface="맑은 고딕" pitchFamily="34" charset="-122"/>
-                <a:cs typeface="Calibri" pitchFamily="34" charset="-120"/>
-              </a:rPr>
-              <a:t>.</a:t>
+              <a:t>취약점 스캐너는 취약점을 찾아내지만, 악성코드를 차단하거나 진행 중인 공격을 막지는 못합니다. 모든 후속 조치는 수작업으로 해야 하고, 스캔과 스캔 사이에는 무방비 시간이 생깁니다.</a:t>
             </a:r>
             <a:endParaRPr lang="en-US" sz="1200" dirty="0"/>
           </a:p>
@@ -2425,7 +2381,7 @@
                   <a:srgbClr val="151A21"/>
                 </a:solidFill>
                 <a:latin typeface="Arial" pitchFamily="34" charset="0"/>
-                <a:ea typeface="맑은 고딕" pitchFamily="34" charset="-122"/>
+                <a:ea typeface="Malgun Gothic" pitchFamily="34" charset="-122"/>
                 <a:cs typeface="Arial" pitchFamily="34" charset="-120"/>
               </a:rPr>
               <a:t>공격자에게 가치 높은 표적</a:t>
@@ -2464,10 +2420,54 @@
                   <a:srgbClr val="5E6978"/>
                 </a:solidFill>
                 <a:latin typeface="Calibri" pitchFamily="34" charset="0"/>
-                <a:ea typeface="맑은 고딕" pitchFamily="34" charset="-122"/>
+                <a:ea typeface="Malgun Gothic" pitchFamily="34" charset="-122"/>
                 <a:cs typeface="Calibri" pitchFamily="34" charset="-120"/>
               </a:rPr>
               <a:t>호텔은 결제카드 정보와 고객 신원정보를 보유하고 있어 랜섬웨어와 정보 탈취의 주요 표적이 되며, 이는 브랜드 신뢰도에 직접적인 영향을 줍니다.</a:t>
+            </a:r>
+            <a:r>
+              <a:rPr lang="ko-KR" sz="1200">
+                <a:solidFill>
+                  <a:srgbClr val="5E6978"/>
+                </a:solidFill>
+                <a:latin typeface="Calibri" pitchFamily="34" charset="0"/>
+                <a:ea typeface="Malgun Gothic" pitchFamily="34" charset="-122"/>
+                <a:cs typeface="Calibri" pitchFamily="34" charset="-120"/>
+              </a:rPr>
+              <a:t/>
+            </a:r>
+            <a:r>
+              <a:rPr lang="en-US" altLang="ko-KR" sz="1200">
+                <a:solidFill>
+                  <a:srgbClr val="5E6978"/>
+                </a:solidFill>
+                <a:latin typeface="Calibri" pitchFamily="34" charset="0"/>
+                <a:ea typeface="Malgun Gothic" pitchFamily="34" charset="-122"/>
+                <a:cs typeface="Calibri" pitchFamily="34" charset="-120"/>
+              </a:rPr>
+              <a:t/>
+            </a:r>
+            <a:r>
+              <a:rPr lang="ko-KR" sz="1200">
+                <a:solidFill>
+                  <a:srgbClr val="5E6978"/>
+                </a:solidFill>
+                <a:latin typeface="Calibri" pitchFamily="34" charset="0"/>
+                <a:ea typeface="Malgun Gothic" pitchFamily="34" charset="-122"/>
+                <a:cs typeface="Calibri" pitchFamily="34" charset="-120"/>
+              </a:rPr>
+              <a:t/>
+            </a:r>
+            <a:r>
+              <a:rPr lang="ko-KR" sz="1200" dirty="0">
+                <a:solidFill>
+                  <a:srgbClr val="5E6978"/>
+                </a:solidFill>
+                <a:latin typeface="Calibri" pitchFamily="34" charset="0"/>
+                <a:ea typeface="Malgun Gothic" pitchFamily="34" charset="-122"/>
+                <a:cs typeface="Calibri" pitchFamily="34" charset="-120"/>
+              </a:rPr>
+              <a:t/>
             </a:r>
             <a:endParaRPr lang="en-US" sz="1200" dirty="0"/>
           </a:p>
@@ -2530,7 +2530,7 @@
                   <a:srgbClr val="E3202A"/>
                 </a:solidFill>
                 <a:latin typeface="Calibri" pitchFamily="34" charset="0"/>
-                <a:ea typeface="맑은 고딕" pitchFamily="34" charset="-122"/>
+                <a:ea typeface="Malgun Gothic" pitchFamily="34" charset="-122"/>
                 <a:cs typeface="Calibri" pitchFamily="34" charset="-120"/>
               </a:rPr>
               <a:t>리조트에 필요한 것</a:t>
@@ -2593,7 +2593,7 @@
                   <a:srgbClr val="FFFFFF"/>
                 </a:solidFill>
                 <a:latin typeface="Calibri" pitchFamily="34" charset="0"/>
-                <a:ea typeface="맑은 고딕" pitchFamily="34" charset="-122"/>
+                <a:ea typeface="Malgun Gothic" pitchFamily="34" charset="-122"/>
                 <a:cs typeface="Calibri" pitchFamily="34" charset="-120"/>
               </a:rPr>
               <a:t>악성코드·랜섬웨어 자동 차단</a:t>
@@ -2656,7 +2656,7 @@
                   <a:srgbClr val="FFFFFF"/>
                 </a:solidFill>
                 <a:latin typeface="Calibri" pitchFamily="34" charset="0"/>
-                <a:ea typeface="맑은 고딕" pitchFamily="34" charset="-122"/>
+                <a:ea typeface="Malgun Gothic" pitchFamily="34" charset="-122"/>
                 <a:cs typeface="Calibri" pitchFamily="34" charset="-120"/>
               </a:rPr>
               <a:t>공격의 실시간 탐지 및 격리</a:t>
@@ -2719,7 +2719,7 @@
                   <a:srgbClr val="FFFFFF"/>
                 </a:solidFill>
                 <a:latin typeface="Calibri" pitchFamily="34" charset="0"/>
-                <a:ea typeface="맑은 고딕" pitchFamily="34" charset="-122"/>
+                <a:ea typeface="Malgun Gothic" pitchFamily="34" charset="-122"/>
                 <a:cs typeface="Calibri" pitchFamily="34" charset="-120"/>
               </a:rPr>
               <a:t>IT팀의 일상 업무 부담 최소화</a:t>
@@ -2782,7 +2782,7 @@
                   <a:srgbClr val="FFFFFF"/>
                 </a:solidFill>
                 <a:latin typeface="Calibri" pitchFamily="34" charset="0"/>
-                <a:ea typeface="맑은 고딕" pitchFamily="34" charset="-122"/>
+                <a:ea typeface="Malgun Gothic" pitchFamily="34" charset="-122"/>
                 <a:cs typeface="Calibri" pitchFamily="34" charset="-120"/>
               </a:rPr>
               <a:t>24시간 전문가 지원</a:t>
@@ -2845,7 +2845,7 @@
                   <a:srgbClr val="FFFFFF"/>
                 </a:solidFill>
                 <a:latin typeface="Calibri" pitchFamily="34" charset="0"/>
-                <a:ea typeface="맑은 고딕" pitchFamily="34" charset="-122"/>
+                <a:ea typeface="Malgun Gothic" pitchFamily="34" charset="-122"/>
                 <a:cs typeface="Calibri" pitchFamily="34" charset="-120"/>
               </a:rPr>
               <a:t>경영진 및 감사를 위한 명확한 보고</a:t>
@@ -2884,7 +2884,7 @@
                   <a:srgbClr val="FFFFFF"/>
                 </a:solidFill>
                 <a:latin typeface="Calibri" pitchFamily="34" charset="0"/>
-                <a:ea typeface="맑은 고딕" pitchFamily="34" charset="-122"/>
+                <a:ea typeface="Malgun Gothic" pitchFamily="34" charset="-122"/>
                 <a:cs typeface="Calibri" pitchFamily="34" charset="-120"/>
               </a:rPr>
               <a:t>목표는 더 많은 보고서가 아니라, 더 적은 사고입니다.</a:t>
@@ -2923,7 +2923,7 @@
                   <a:srgbClr val="5E6978"/>
                 </a:solidFill>
                 <a:latin typeface="Calibri" pitchFamily="34" charset="0"/>
-                <a:ea typeface="맑은 고딕" pitchFamily="34" charset="-122"/>
+                <a:ea typeface="Malgun Gothic" pitchFamily="34" charset="-122"/>
                 <a:cs typeface="Calibri" pitchFamily="34" charset="-120"/>
               </a:rPr>
               <a:t>02   |   CrowdStrike Falcon 제안서  ·  웨스틴 리조트 괌</a:t>
@@ -3019,7 +3019,7 @@
                   <a:srgbClr val="E3202A"/>
                 </a:solidFill>
                 <a:latin typeface="Arial" pitchFamily="34" charset="0"/>
-                <a:ea typeface="Arial" pitchFamily="34" charset="-122"/>
+                <a:ea typeface="Malgun Gothic" pitchFamily="34" charset="-122"/>
                 <a:cs typeface="Arial" pitchFamily="34" charset="-120"/>
               </a:rPr>
               <a:t>02   보안 공격 트렌드</a:t>
@@ -3058,7 +3058,7 @@
                   <a:srgbClr val="FFFFFF"/>
                 </a:solidFill>
                 <a:latin typeface="Arial" pitchFamily="34" charset="0"/>
-                <a:ea typeface="Arial" pitchFamily="34" charset="-122"/>
+                <a:ea typeface="Malgun Gothic" pitchFamily="34" charset="-122"/>
                 <a:cs typeface="Arial" pitchFamily="34" charset="-120"/>
               </a:rPr>
               <a:t>사이버 공격은 이제 몇 초 만에 퍼집니다</a:t>
@@ -3148,7 +3148,7 @@
                   <a:srgbClr val="E3202A"/>
                 </a:solidFill>
                 <a:latin typeface="Arial" pitchFamily="34" charset="0"/>
-                <a:ea typeface="Arial" pitchFamily="34" charset="-122"/>
+                <a:ea typeface="Malgun Gothic" pitchFamily="34" charset="-122"/>
                 <a:cs typeface="Arial" pitchFamily="34" charset="-120"/>
               </a:rPr>
               <a:t>27초</a:t>
@@ -3187,7 +3187,7 @@
                   <a:srgbClr val="C9CED6"/>
                 </a:solidFill>
                 <a:latin typeface="Calibri" pitchFamily="34" charset="0"/>
-                <a:ea typeface="Calibri" pitchFamily="34" charset="-122"/>
+                <a:ea typeface="Malgun Gothic" pitchFamily="34" charset="-122"/>
                 <a:cs typeface="Calibri" pitchFamily="34" charset="-120"/>
               </a:rPr>
               <a:t>해커가 PC 한 대에서 다른 시스템으로 퍼진 역대 최단 시간 (평균 29분)</a:t>
@@ -3253,7 +3253,7 @@
                   <a:srgbClr val="E3202A"/>
                 </a:solidFill>
                 <a:latin typeface="Arial" pitchFamily="34" charset="0"/>
-                <a:ea typeface="Arial" pitchFamily="34" charset="-122"/>
+                <a:ea typeface="Malgun Gothic" pitchFamily="34" charset="-122"/>
                 <a:cs typeface="Arial" pitchFamily="34" charset="-120"/>
               </a:rPr>
               <a:t>89%</a:t>
@@ -3292,7 +3292,7 @@
                   <a:srgbClr val="C9CED6"/>
                 </a:solidFill>
                 <a:latin typeface="Calibri" pitchFamily="34" charset="0"/>
-                <a:ea typeface="Calibri" pitchFamily="34" charset="-122"/>
+                <a:ea typeface="Malgun Gothic" pitchFamily="34" charset="-122"/>
                 <a:cs typeface="Calibri" pitchFamily="34" charset="-120"/>
               </a:rPr>
               <a:t>AI를 활용한 해커 공격의 전년 대비 증가율 (2025년)</a:t>
@@ -3358,7 +3358,7 @@
                   <a:srgbClr val="E3202A"/>
                 </a:solidFill>
                 <a:latin typeface="Arial" pitchFamily="34" charset="0"/>
-                <a:ea typeface="Arial" pitchFamily="34" charset="-122"/>
+                <a:ea typeface="Malgun Gothic" pitchFamily="34" charset="-122"/>
                 <a:cs typeface="Arial" pitchFamily="34" charset="-120"/>
               </a:rPr>
               <a:t>42%</a:t>
@@ -3397,7 +3397,7 @@
                   <a:srgbClr val="C9CED6"/>
                 </a:solidFill>
                 <a:latin typeface="Calibri" pitchFamily="34" charset="0"/>
-                <a:ea typeface="Calibri" pitchFamily="34" charset="-122"/>
+                <a:ea typeface="Malgun Gothic" pitchFamily="34" charset="-122"/>
                 <a:cs typeface="Calibri" pitchFamily="34" charset="-120"/>
               </a:rPr>
               <a:t>공개 전 보안 허점(제로데이)을 노린 공격의 전년 대비 증가율</a:t>
@@ -3463,7 +3463,7 @@
                   <a:srgbClr val="E3202A"/>
                 </a:solidFill>
                 <a:latin typeface="Arial" pitchFamily="34" charset="0"/>
-                <a:ea typeface="Arial" pitchFamily="34" charset="-122"/>
+                <a:ea typeface="Malgun Gothic" pitchFamily="34" charset="-122"/>
                 <a:cs typeface="Arial" pitchFamily="34" charset="-120"/>
               </a:rPr>
               <a:t>78%</a:t>
@@ -3502,7 +3502,7 @@
                   <a:srgbClr val="C9CED6"/>
                 </a:solidFill>
                 <a:latin typeface="Calibri" pitchFamily="34" charset="0"/>
-                <a:ea typeface="Calibri" pitchFamily="34" charset="-122"/>
+                <a:ea typeface="Malgun Gothic" pitchFamily="34" charset="-122"/>
                 <a:cs typeface="Calibri" pitchFamily="34" charset="-120"/>
               </a:rPr>
               <a:t>설문 기업 1,100곳 중 지난 1년간 랜섬웨어 공격을 받은 비율</a:t>
@@ -3541,7 +3541,7 @@
                   <a:srgbClr val="FFFFFF"/>
                 </a:solidFill>
                 <a:latin typeface="Calibri" pitchFamily="34" charset="0"/>
-                <a:ea typeface="Calibri" pitchFamily="34" charset="-122"/>
+                <a:ea typeface="Malgun Gothic" pitchFamily="34" charset="-122"/>
                 <a:cs typeface="Calibri" pitchFamily="34" charset="-120"/>
               </a:rPr>
               <a:t>리조트에 주는 의미</a:t>
@@ -3631,7 +3631,7 @@
                   <a:srgbClr val="FFFFFF"/>
                 </a:solidFill>
                 <a:latin typeface="Arial" pitchFamily="34" charset="0"/>
-                <a:ea typeface="Arial" pitchFamily="34" charset="-122"/>
+                <a:ea typeface="Malgun Gothic" pitchFamily="34" charset="-122"/>
                 <a:cs typeface="Arial" pitchFamily="34" charset="-120"/>
               </a:rPr>
               <a:t>새롭고 알려지지 않은 공격</a:t>
@@ -3670,7 +3670,7 @@
                   <a:srgbClr val="C9CED6"/>
                 </a:solidFill>
                 <a:latin typeface="Calibri" pitchFamily="34" charset="0"/>
-                <a:ea typeface="Calibri" pitchFamily="34" charset="-122"/>
+                <a:ea typeface="Malgun Gothic" pitchFamily="34" charset="-122"/>
                 <a:cs typeface="Calibri" pitchFamily="34" charset="-120"/>
               </a:rPr>
               <a:t>새로운 공격은 대응책이 나오기 전에 들어옵니다. 행위를 감시하는 보호만이 막을 수 있습니다.</a:t>
@@ -3760,7 +3760,7 @@
                   <a:srgbClr val="FFFFFF"/>
                 </a:solidFill>
                 <a:latin typeface="Arial" pitchFamily="34" charset="0"/>
-                <a:ea typeface="Arial" pitchFamily="34" charset="-122"/>
+                <a:ea typeface="Malgun Gothic" pitchFamily="34" charset="-122"/>
                 <a:cs typeface="Arial" pitchFamily="34" charset="-120"/>
               </a:rPr>
               <a:t>몇 주가 아닌 몇 초</a:t>
@@ -3799,7 +3799,7 @@
                   <a:srgbClr val="C9CED6"/>
                 </a:solidFill>
                 <a:latin typeface="Calibri" pitchFamily="34" charset="0"/>
-                <a:ea typeface="Calibri" pitchFamily="34" charset="-122"/>
+                <a:ea typeface="Malgun Gothic" pitchFamily="34" charset="-122"/>
                 <a:cs typeface="Calibri" pitchFamily="34" charset="-120"/>
               </a:rPr>
               <a:t>보호되지 않은 PC는 몇 초 만에 뚫리고, 공격이 다른 시스템으로 번집니다.</a:t>
@@ -3889,7 +3889,7 @@
                   <a:srgbClr val="FFFFFF"/>
                 </a:solidFill>
                 <a:latin typeface="Arial" pitchFamily="34" charset="0"/>
-                <a:ea typeface="Arial" pitchFamily="34" charset="-122"/>
+                <a:ea typeface="Malgun Gothic" pitchFamily="34" charset="-122"/>
                 <a:cs typeface="Arial" pitchFamily="34" charset="-120"/>
               </a:rPr>
               <a:t>몸값 지불은 해결책이 아님</a:t>
@@ -3928,7 +3928,7 @@
                   <a:srgbClr val="C9CED6"/>
                 </a:solidFill>
                 <a:latin typeface="Calibri" pitchFamily="34" charset="0"/>
-                <a:ea typeface="Calibri" pitchFamily="34" charset="-122"/>
+                <a:ea typeface="Malgun Gothic" pitchFamily="34" charset="-122"/>
                 <a:cs typeface="Calibri" pitchFamily="34" charset="-120"/>
               </a:rPr>
               <a:t>몸값을 낸 피해자의 83%가 다시 공격받았고, 93%는 결국 데이터를 도난당했습니다.</a:t>
@@ -3967,7 +3967,7 @@
                   <a:srgbClr val="7D8794"/>
                 </a:solidFill>
                 <a:latin typeface="Calibri" pitchFamily="34" charset="0"/>
-                <a:ea typeface="Calibri" pitchFamily="34" charset="-122"/>
+                <a:ea typeface="Malgun Gothic" pitchFamily="34" charset="-122"/>
                 <a:cs typeface="Calibri" pitchFamily="34" charset="-120"/>
               </a:rPr>
               <a:t>출처: CrowdStrike 2026 Global Threat Report (2025년 데이터); CrowdStrike 2025 State of Ransomware Survey (보안 책임자 1,100명).</a:t>
@@ -4006,7 +4006,7 @@
                   <a:srgbClr val="8A93A0"/>
                 </a:solidFill>
                 <a:latin typeface="Calibri" pitchFamily="34" charset="0"/>
-                <a:ea typeface="Calibri" pitchFamily="34" charset="-122"/>
+                <a:ea typeface="Malgun Gothic" pitchFamily="34" charset="-122"/>
                 <a:cs typeface="Calibri" pitchFamily="34" charset="-120"/>
               </a:rPr>
               <a:t>03   |   CrowdStrike Falcon 제안서  ·  웨스틴 리조트 괌</a:t>
@@ -4102,7 +4102,7 @@
                   <a:srgbClr val="E3202A"/>
                 </a:solidFill>
                 <a:latin typeface="Arial" pitchFamily="34" charset="0"/>
-                <a:ea typeface="Arial" pitchFamily="34" charset="-122"/>
+                <a:ea typeface="Malgun Gothic" pitchFamily="34" charset="-122"/>
                 <a:cs typeface="Arial" pitchFamily="34" charset="-120"/>
               </a:rPr>
               <a:t>03   쉽게 이해하기</a:t>
@@ -4141,7 +4141,7 @@
                   <a:srgbClr val="151A21"/>
                 </a:solidFill>
                 <a:latin typeface="Arial" pitchFamily="34" charset="0"/>
-                <a:ea typeface="Arial" pitchFamily="34" charset="-122"/>
+                <a:ea typeface="Malgun Gothic" pitchFamily="34" charset="-122"/>
                 <a:cs typeface="Arial" pitchFamily="34" charset="-120"/>
               </a:rPr>
               <a:t>정기 안전점검 vs. 24시간 보안팀</a:t>
@@ -4282,7 +4282,7 @@
                   <a:srgbClr val="5D6B7E"/>
                 </a:solidFill>
                 <a:latin typeface="Calibri" pitchFamily="34" charset="0"/>
-                <a:ea typeface="Calibri" pitchFamily="34" charset="-122"/>
+                <a:ea typeface="Malgun Gothic" pitchFamily="34" charset="-122"/>
                 <a:cs typeface="Calibri" pitchFamily="34" charset="-120"/>
               </a:rPr>
               <a:t>NESSUS</a:t>
@@ -4321,7 +4321,7 @@
                   <a:srgbClr val="151A21"/>
                 </a:solidFill>
                 <a:latin typeface="Arial" pitchFamily="34" charset="0"/>
-                <a:ea typeface="Arial" pitchFamily="34" charset="-122"/>
+                <a:ea typeface="Malgun Gothic" pitchFamily="34" charset="-122"/>
                 <a:cs typeface="Arial" pitchFamily="34" charset="-120"/>
               </a:rPr>
               <a:t>소방 안전점검</a:t>
@@ -4360,7 +4360,7 @@
                   <a:srgbClr val="5E6978"/>
                 </a:solidFill>
                 <a:latin typeface="Calibri" pitchFamily="34" charset="0"/>
-                <a:ea typeface="Calibri" pitchFamily="34" charset="-122"/>
+                <a:ea typeface="Malgun Gothic" pitchFamily="34" charset="-122"/>
                 <a:cs typeface="Calibri" pitchFamily="34" charset="-120"/>
               </a:rPr>
               <a:t>점검원이 정해진 날 건물을 돌며 고칠 곳을 적어 보고서를 건넵니다. 유용하지만, 실제로 불이 났을 때 점검원은 그 자리에 없습니다.</a:t>
@@ -4423,7 +4423,7 @@
                   <a:srgbClr val="151A21"/>
                 </a:solidFill>
                 <a:latin typeface="Calibri" pitchFamily="34" charset="0"/>
-                <a:ea typeface="Calibri" pitchFamily="34" charset="-122"/>
+                <a:ea typeface="Malgun Gothic" pitchFamily="34" charset="-122"/>
                 <a:cs typeface="Calibri" pitchFamily="34" charset="-120"/>
               </a:rPr>
               <a:t>알려진 문제 발견</a:t>
@@ -4486,7 +4486,7 @@
                   <a:srgbClr val="151A21"/>
                 </a:solidFill>
                 <a:latin typeface="Calibri" pitchFamily="34" charset="0"/>
-                <a:ea typeface="Calibri" pitchFamily="34" charset="-122"/>
+                <a:ea typeface="Malgun Gothic" pitchFamily="34" charset="-122"/>
                 <a:cs typeface="Calibri" pitchFamily="34" charset="-120"/>
               </a:rPr>
               <a:t>정해진 일정에 보고</a:t>
@@ -4549,7 +4549,7 @@
                   <a:srgbClr val="151A21"/>
                 </a:solidFill>
                 <a:latin typeface="Calibri" pitchFamily="34" charset="0"/>
-                <a:ea typeface="Calibri" pitchFamily="34" charset="-122"/>
+                <a:ea typeface="Malgun Gothic" pitchFamily="34" charset="-122"/>
                 <a:cs typeface="Calibri" pitchFamily="34" charset="-120"/>
               </a:rPr>
               <a:t>조치는 고객 몫</a:t>
@@ -4666,7 +4666,7 @@
                   <a:srgbClr val="E3202A"/>
                 </a:solidFill>
                 <a:latin typeface="Calibri" pitchFamily="34" charset="0"/>
-                <a:ea typeface="Calibri" pitchFamily="34" charset="-122"/>
+                <a:ea typeface="Malgun Gothic" pitchFamily="34" charset="-122"/>
                 <a:cs typeface="Calibri" pitchFamily="34" charset="-120"/>
               </a:rPr>
               <a:t>CROWDSTRIKE FALCON</a:t>
@@ -4705,7 +4705,7 @@
                   <a:srgbClr val="151A21"/>
                 </a:solidFill>
                 <a:latin typeface="Arial" pitchFamily="34" charset="0"/>
-                <a:ea typeface="Arial" pitchFamily="34" charset="-122"/>
+                <a:ea typeface="Malgun Gothic" pitchFamily="34" charset="-122"/>
                 <a:cs typeface="Arial" pitchFamily="34" charset="-120"/>
               </a:rPr>
               <a:t>화재감지기, 스프링클러 &amp; 24시간 보안팀</a:t>
@@ -4744,52 +4744,11 @@
                   <a:srgbClr val="5E6978"/>
                 </a:solidFill>
                 <a:latin typeface="Calibri" pitchFamily="34" charset="0"/>
-                <a:ea typeface="Calibri" pitchFamily="34" charset="-122"/>
+                <a:ea typeface="Malgun Gothic" pitchFamily="34" charset="-122"/>
                 <a:cs typeface="Calibri" pitchFamily="34" charset="-120"/>
               </a:rPr>
-              <a:t>모든 PC의 센서가 위험을 즉시 포착해 자동으로 막고, 24시간 대기 중인 전문가에게 </a:t>
-            </a:r>
-            <a:r>
-              <a:rPr lang="en-US" sz="1250" dirty="0" err="1">
-                <a:solidFill>
-                  <a:srgbClr val="5E6978"/>
-                </a:solidFill>
-                <a:latin typeface="Calibri" pitchFamily="34" charset="0"/>
-                <a:ea typeface="Calibri" pitchFamily="34" charset="-122"/>
-                <a:cs typeface="Calibri" pitchFamily="34" charset="-120"/>
-              </a:rPr>
-              <a:t>바로</a:t>
-            </a:r>
-            <a:r>
-              <a:rPr lang="en-US" sz="1250" dirty="0">
-                <a:solidFill>
-                  <a:srgbClr val="5E6978"/>
-                </a:solidFill>
-                <a:latin typeface="Calibri" pitchFamily="34" charset="0"/>
-                <a:ea typeface="Calibri" pitchFamily="34" charset="-122"/>
-                <a:cs typeface="Calibri" pitchFamily="34" charset="-120"/>
-              </a:rPr>
-              <a:t> </a:t>
-            </a:r>
-            <a:r>
-              <a:rPr lang="en-US" sz="1250" dirty="0" err="1">
-                <a:solidFill>
-                  <a:srgbClr val="5E6978"/>
-                </a:solidFill>
-                <a:latin typeface="Calibri" pitchFamily="34" charset="0"/>
-                <a:ea typeface="Calibri" pitchFamily="34" charset="-122"/>
-                <a:cs typeface="Calibri" pitchFamily="34" charset="-120"/>
-              </a:rPr>
-              <a:t>알립니다</a:t>
-            </a:r>
-            <a:endParaRPr lang="en-US" sz="1250" dirty="0">
-              <a:solidFill>
-                <a:srgbClr val="5E6978"/>
-              </a:solidFill>
-              <a:latin typeface="Calibri" pitchFamily="34" charset="0"/>
-              <a:ea typeface="Calibri" pitchFamily="34" charset="-122"/>
-              <a:cs typeface="Calibri" pitchFamily="34" charset="-120"/>
-            </a:endParaRPr>
+              <a:t>모든 PC의 센서가 위험을 즉시 포착해 자동으로 막고, 24시간 대기 중인 전문가에게 바로 알립니다.</a:t>
+            </a:r>
           </a:p>
         </p:txBody>
       </p:sp>
@@ -4847,7 +4806,7 @@
                   <a:srgbClr val="151A21"/>
                 </a:solidFill>
                 <a:latin typeface="Calibri" pitchFamily="34" charset="0"/>
-                <a:ea typeface="Calibri" pitchFamily="34" charset="-122"/>
+                <a:ea typeface="Malgun Gothic" pitchFamily="34" charset="-122"/>
                 <a:cs typeface="Calibri" pitchFamily="34" charset="-120"/>
               </a:rPr>
               <a:t>위협 즉시 탐지</a:t>
@@ -4910,7 +4869,7 @@
                   <a:srgbClr val="151A21"/>
                 </a:solidFill>
                 <a:latin typeface="Calibri" pitchFamily="34" charset="0"/>
-                <a:ea typeface="Calibri" pitchFamily="34" charset="-122"/>
+                <a:ea typeface="Malgun Gothic" pitchFamily="34" charset="-122"/>
                 <a:cs typeface="Calibri" pitchFamily="34" charset="-120"/>
               </a:rPr>
               <a:t>공격 자동 차단</a:t>
@@ -4973,7 +4932,7 @@
                   <a:srgbClr val="151A21"/>
                 </a:solidFill>
                 <a:latin typeface="Calibri" pitchFamily="34" charset="0"/>
-                <a:ea typeface="Calibri" pitchFamily="34" charset="-122"/>
+                <a:ea typeface="Malgun Gothic" pitchFamily="34" charset="-122"/>
                 <a:cs typeface="Calibri" pitchFamily="34" charset="-120"/>
               </a:rPr>
               <a:t>전문가 24시간 대응</a:t>
@@ -5037,7 +4996,7 @@
                   <a:srgbClr val="FFFFFF"/>
                 </a:solidFill>
                 <a:latin typeface="Arial" pitchFamily="34" charset="0"/>
-                <a:ea typeface="Arial" pitchFamily="34" charset="-122"/>
+                <a:ea typeface="Malgun Gothic" pitchFamily="34" charset="-122"/>
                 <a:cs typeface="Arial" pitchFamily="34" charset="-120"/>
               </a:rPr>
               <a:t>VS</a:t>
@@ -5076,7 +5035,7 @@
                   <a:srgbClr val="5D6B7E"/>
                 </a:solidFill>
                 <a:latin typeface="Calibri" pitchFamily="34" charset="0"/>
-                <a:ea typeface="Calibri" pitchFamily="34" charset="-122"/>
+                <a:ea typeface="Malgun Gothic" pitchFamily="34" charset="-122"/>
                 <a:cs typeface="Calibri" pitchFamily="34" charset="-120"/>
               </a:rPr>
               <a:t>Nessus</a:t>
@@ -5087,73 +5046,29 @@
                   <a:srgbClr val="5E6978"/>
                 </a:solidFill>
                 <a:latin typeface="Calibri" pitchFamily="34" charset="0"/>
-                <a:ea typeface="Calibri" pitchFamily="34" charset="-122"/>
+                <a:ea typeface="Malgun Gothic" pitchFamily="34" charset="-122"/>
                 <a:cs typeface="Calibri" pitchFamily="34" charset="-120"/>
               </a:rPr>
-              <a:t>는 무엇이 </a:t>
-            </a:r>
-            <a:r>
-              <a:rPr lang="en-US" sz="1600">
+              <a:t>는 무엇이 문제인지 알려만주고,  </a:t>
+            </a:r>
+            <a:r>
+              <a:rPr lang="en-US" sz="1600" b="1" dirty="0">
+                <a:solidFill>
+                  <a:srgbClr val="E3202A"/>
+                </a:solidFill>
+                <a:latin typeface="Calibri" pitchFamily="34" charset="0"/>
+                <a:ea typeface="Malgun Gothic" pitchFamily="34" charset="-122"/>
+                <a:cs typeface="Calibri" pitchFamily="34" charset="-120"/>
+              </a:rPr>
+              <a:t>Falcon</a:t>
+            </a:r>
+            <a:r>
+              <a:rPr lang="en-US" sz="1600" dirty="0">
                 <a:solidFill>
                   <a:srgbClr val="5E6978"/>
                 </a:solidFill>
                 <a:latin typeface="Calibri" pitchFamily="34" charset="0"/>
-                <a:ea typeface="Calibri" pitchFamily="34" charset="-122"/>
-                <a:cs typeface="Calibri" pitchFamily="34" charset="-120"/>
-              </a:rPr>
-              <a:t>문제인지 알려</a:t>
-            </a:r>
-            <a:r>
-              <a:rPr lang="ko-KR" altLang="en-US" sz="1600">
-                <a:solidFill>
-                  <a:srgbClr val="5E6978"/>
-                </a:solidFill>
-                <a:latin typeface="Calibri" pitchFamily="34" charset="0"/>
-                <a:ea typeface="Calibri" pitchFamily="34" charset="-122"/>
-                <a:cs typeface="Calibri" pitchFamily="34" charset="-120"/>
-              </a:rPr>
-              <a:t>만</a:t>
-            </a:r>
-            <a:r>
-              <a:rPr lang="en-US" sz="1600">
-                <a:solidFill>
-                  <a:srgbClr val="5E6978"/>
-                </a:solidFill>
-                <a:latin typeface="Calibri" pitchFamily="34" charset="0"/>
-                <a:ea typeface="Calibri" pitchFamily="34" charset="-122"/>
-                <a:cs typeface="Calibri" pitchFamily="34" charset="-120"/>
-              </a:rPr>
-              <a:t>주고</a:t>
-            </a:r>
-            <a:r>
-              <a:rPr lang="en-US" sz="1600" dirty="0">
-                <a:solidFill>
-                  <a:srgbClr val="5E6978"/>
-                </a:solidFill>
-                <a:latin typeface="Calibri" pitchFamily="34" charset="0"/>
-                <a:ea typeface="Calibri" pitchFamily="34" charset="-122"/>
-                <a:cs typeface="Calibri" pitchFamily="34" charset="-120"/>
-              </a:rPr>
-              <a:t>,  </a:t>
-            </a:r>
-            <a:r>
-              <a:rPr lang="en-US" sz="1600" b="1" dirty="0">
-                <a:solidFill>
-                  <a:srgbClr val="E3202A"/>
-                </a:solidFill>
-                <a:latin typeface="Calibri" pitchFamily="34" charset="0"/>
-                <a:ea typeface="Calibri" pitchFamily="34" charset="-122"/>
-                <a:cs typeface="Calibri" pitchFamily="34" charset="-120"/>
-              </a:rPr>
-              <a:t>Falcon</a:t>
-            </a:r>
-            <a:r>
-              <a:rPr lang="en-US" sz="1600" dirty="0">
-                <a:solidFill>
-                  <a:srgbClr val="5E6978"/>
-                </a:solidFill>
-                <a:latin typeface="Calibri" pitchFamily="34" charset="0"/>
-                <a:ea typeface="Calibri" pitchFamily="34" charset="-122"/>
+                <a:ea typeface="Malgun Gothic" pitchFamily="34" charset="-122"/>
                 <a:cs typeface="Calibri" pitchFamily="34" charset="-120"/>
               </a:rPr>
               <a:t>은 24시간 공격을 막아냅니다.</a:t>
@@ -5192,7 +5107,7 @@
                   <a:srgbClr val="5E6978"/>
                 </a:solidFill>
                 <a:latin typeface="Calibri" pitchFamily="34" charset="0"/>
-                <a:ea typeface="Calibri" pitchFamily="34" charset="-122"/>
+                <a:ea typeface="Malgun Gothic" pitchFamily="34" charset="-122"/>
                 <a:cs typeface="Calibri" pitchFamily="34" charset="-120"/>
               </a:rPr>
               <a:t>04   |   CrowdStrike Falcon 제안서  ·  웨스틴 리조트 괌</a:t>
@@ -5288,7 +5203,7 @@
                   <a:srgbClr val="E3202A"/>
                 </a:solidFill>
                 <a:latin typeface="Arial" pitchFamily="34" charset="0"/>
-                <a:ea typeface="Arial" pitchFamily="34" charset="-122"/>
+                <a:ea typeface="Malgun Gothic" pitchFamily="34" charset="-122"/>
                 <a:cs typeface="Arial" pitchFamily="34" charset="-120"/>
               </a:rPr>
               <a:t>04   기능 비교</a:t>
@@ -5327,7 +5242,7 @@
                   <a:srgbClr val="151A21"/>
                 </a:solidFill>
                 <a:latin typeface="Arial" pitchFamily="34" charset="0"/>
-                <a:ea typeface="Arial" pitchFamily="34" charset="-122"/>
+                <a:ea typeface="Malgun Gothic" pitchFamily="34" charset="-122"/>
                 <a:cs typeface="Arial" pitchFamily="34" charset="-120"/>
               </a:rPr>
               <a:t>한눈에 비교: Nessus vs. CrowdStrike Falcon</a:t>
@@ -5420,14 +5335,14 @@
                             <a:srgbClr val="FFFFFF"/>
                           </a:solidFill>
                           <a:latin typeface="Arial" pitchFamily="34" charset="0"/>
-                          <a:ea typeface="Arial" pitchFamily="34" charset="-122"/>
+                          <a:ea typeface="Malgun Gothic" pitchFamily="34" charset="-122"/>
                           <a:cs typeface="Arial" pitchFamily="34" charset="-120"/>
                         </a:rPr>
                         <a:t> </a:t>
                       </a:r>
                       <a:endParaRPr lang="en-US" sz="1450" dirty="0">
                         <a:latin typeface="Arial" charset="0"/>
-                        <a:ea typeface="Arial" charset="0"/>
+                        <a:ea typeface="Malgun Gothic" charset="0"/>
                         <a:cs typeface="Arial" charset="0"/>
                       </a:endParaRPr>
                     </a:p>
@@ -5488,14 +5403,14 @@
                             <a:srgbClr val="FFFFFF"/>
                           </a:solidFill>
                           <a:latin typeface="Arial" pitchFamily="34" charset="0"/>
-                          <a:ea typeface="Arial" pitchFamily="34" charset="-122"/>
+                          <a:ea typeface="Malgun Gothic" pitchFamily="34" charset="-122"/>
                           <a:cs typeface="Arial" pitchFamily="34" charset="-120"/>
                         </a:rPr>
                         <a:t>Nessus</a:t>
                       </a:r>
                       <a:endParaRPr lang="en-US" sz="1450" dirty="0">
                         <a:latin typeface="Arial" charset="0"/>
-                        <a:ea typeface="Arial" charset="0"/>
+                        <a:ea typeface="Malgun Gothic" charset="0"/>
                         <a:cs typeface="Arial" charset="0"/>
                       </a:endParaRPr>
                     </a:p>
@@ -5556,14 +5471,14 @@
                             <a:srgbClr val="FFFFFF"/>
                           </a:solidFill>
                           <a:latin typeface="Arial" pitchFamily="34" charset="0"/>
-                          <a:ea typeface="Arial" pitchFamily="34" charset="-122"/>
+                          <a:ea typeface="Malgun Gothic" pitchFamily="34" charset="-122"/>
                           <a:cs typeface="Arial" pitchFamily="34" charset="-120"/>
                         </a:rPr>
                         <a:t>CrowdStrike Falcon</a:t>
                       </a:r>
                       <a:endParaRPr lang="en-US" sz="1450" dirty="0">
                         <a:latin typeface="Arial" charset="0"/>
-                        <a:ea typeface="Arial" charset="0"/>
+                        <a:ea typeface="Malgun Gothic" charset="0"/>
                         <a:cs typeface="Arial" charset="0"/>
                       </a:endParaRPr>
                     </a:p>
@@ -5631,14 +5546,14 @@
                             <a:srgbClr val="151A21"/>
                           </a:solidFill>
                           <a:latin typeface="Calibri" pitchFamily="34" charset="0"/>
-                          <a:ea typeface="Calibri" pitchFamily="34" charset="-122"/>
+                          <a:ea typeface="Malgun Gothic" pitchFamily="34" charset="-122"/>
                           <a:cs typeface="Calibri" pitchFamily="34" charset="-120"/>
                         </a:rPr>
                         <a:t>하는 일</a:t>
                       </a:r>
                       <a:endParaRPr lang="en-US" sz="1400" dirty="0">
                         <a:latin typeface="Calibri" charset="0"/>
-                        <a:ea typeface="Calibri" charset="0"/>
+                        <a:ea typeface="Malgun Gothic" charset="0"/>
                         <a:cs typeface="Calibri" charset="0"/>
                       </a:endParaRPr>
                     </a:p>
@@ -5699,14 +5614,14 @@
                             <a:srgbClr val="5D6B7E"/>
                           </a:solidFill>
                           <a:latin typeface="Calibri" pitchFamily="34" charset="0"/>
-                          <a:ea typeface="Calibri" pitchFamily="34" charset="-122"/>
+                          <a:ea typeface="Malgun Gothic" pitchFamily="34" charset="-122"/>
                           <a:cs typeface="Calibri" pitchFamily="34" charset="-120"/>
                         </a:rPr>
                         <a:t>취약점을 찾아 보고</a:t>
                       </a:r>
                       <a:endParaRPr lang="en-US" sz="1400" dirty="0">
                         <a:latin typeface="Calibri" charset="0"/>
-                        <a:ea typeface="Calibri" charset="0"/>
+                        <a:ea typeface="Malgun Gothic" charset="0"/>
                         <a:cs typeface="Calibri" charset="0"/>
                       </a:endParaRPr>
                     </a:p>
@@ -5764,7 +5679,7 @@
                             <a:srgbClr val="E3202A"/>
                           </a:solidFill>
                           <a:latin typeface="Calibri" pitchFamily="34" charset="0"/>
-                          <a:ea typeface="Calibri" pitchFamily="34" charset="-122"/>
+                          <a:ea typeface="Malgun Gothic" pitchFamily="34" charset="-122"/>
                           <a:cs typeface="Calibri" pitchFamily="34" charset="-120"/>
                         </a:rPr>
                         <a:t>공격 차단</a:t>
@@ -5775,14 +5690,14 @@
                             <a:srgbClr val="151A21"/>
                           </a:solidFill>
                           <a:latin typeface="Calibri" pitchFamily="34" charset="0"/>
-                          <a:ea typeface="Calibri" pitchFamily="34" charset="-122"/>
+                          <a:ea typeface="Malgun Gothic" pitchFamily="34" charset="-122"/>
                           <a:cs typeface="Calibri" pitchFamily="34" charset="-120"/>
                         </a:rPr>
                         <a:t>  — 모든 PC와 서버에서</a:t>
                       </a:r>
                       <a:endParaRPr lang="en-US" sz="1400" dirty="0">
                         <a:latin typeface="Calibri" charset="0"/>
-                        <a:ea typeface="Calibri" charset="0"/>
+                        <a:ea typeface="Malgun Gothic" charset="0"/>
                         <a:cs typeface="Calibri" charset="0"/>
                       </a:endParaRPr>
                     </a:p>
@@ -5847,14 +5762,14 @@
                             <a:srgbClr val="151A21"/>
                           </a:solidFill>
                           <a:latin typeface="Calibri" pitchFamily="34" charset="0"/>
-                          <a:ea typeface="Calibri" pitchFamily="34" charset="-122"/>
+                          <a:ea typeface="Malgun Gothic" pitchFamily="34" charset="-122"/>
                           <a:cs typeface="Calibri" pitchFamily="34" charset="-120"/>
                         </a:rPr>
                         <a:t>보호 시점</a:t>
                       </a:r>
                       <a:endParaRPr lang="en-US" sz="1400" dirty="0">
                         <a:latin typeface="Calibri" charset="0"/>
-                        <a:ea typeface="Calibri" charset="0"/>
+                        <a:ea typeface="Malgun Gothic" charset="0"/>
                         <a:cs typeface="Calibri" charset="0"/>
                       </a:endParaRPr>
                     </a:p>
@@ -5915,14 +5830,14 @@
                             <a:srgbClr val="5D6B7E"/>
                           </a:solidFill>
                           <a:latin typeface="Calibri" pitchFamily="34" charset="0"/>
-                          <a:ea typeface="Calibri" pitchFamily="34" charset="-122"/>
+                          <a:ea typeface="Malgun Gothic" pitchFamily="34" charset="-122"/>
                           <a:cs typeface="Calibri" pitchFamily="34" charset="-120"/>
                         </a:rPr>
                         <a:t>정해진 스캔 날에만</a:t>
                       </a:r>
                       <a:endParaRPr lang="en-US" sz="1400" dirty="0">
                         <a:latin typeface="Calibri" charset="0"/>
-                        <a:ea typeface="Calibri" charset="0"/>
+                        <a:ea typeface="Malgun Gothic" charset="0"/>
                         <a:cs typeface="Calibri" charset="0"/>
                       </a:endParaRPr>
                     </a:p>
@@ -5980,7 +5895,7 @@
                             <a:srgbClr val="E3202A"/>
                           </a:solidFill>
                           <a:latin typeface="Calibri" pitchFamily="34" charset="0"/>
-                          <a:ea typeface="Calibri" pitchFamily="34" charset="-122"/>
+                          <a:ea typeface="Malgun Gothic" pitchFamily="34" charset="-122"/>
                           <a:cs typeface="Calibri" pitchFamily="34" charset="-120"/>
                         </a:rPr>
                         <a:t>매 순간</a:t>
@@ -5991,14 +5906,14 @@
                             <a:srgbClr val="151A21"/>
                           </a:solidFill>
                           <a:latin typeface="Calibri" pitchFamily="34" charset="0"/>
-                          <a:ea typeface="Calibri" pitchFamily="34" charset="-122"/>
+                          <a:ea typeface="Malgun Gothic" pitchFamily="34" charset="-122"/>
                           <a:cs typeface="Calibri" pitchFamily="34" charset="-120"/>
                         </a:rPr>
                         <a:t>  — 연중무휴 24시간</a:t>
                       </a:r>
                       <a:endParaRPr lang="en-US" sz="1400" dirty="0">
                         <a:latin typeface="Calibri" charset="0"/>
-                        <a:ea typeface="Calibri" charset="0"/>
+                        <a:ea typeface="Malgun Gothic" charset="0"/>
                         <a:cs typeface="Calibri" charset="0"/>
                       </a:endParaRPr>
                     </a:p>
@@ -6063,14 +5978,14 @@
                             <a:srgbClr val="151A21"/>
                           </a:solidFill>
                           <a:latin typeface="Calibri" pitchFamily="34" charset="0"/>
-                          <a:ea typeface="Calibri" pitchFamily="34" charset="-122"/>
+                          <a:ea typeface="Malgun Gothic" pitchFamily="34" charset="-122"/>
                           <a:cs typeface="Calibri" pitchFamily="34" charset="-120"/>
                         </a:rPr>
                         <a:t>바이러스·랜섬웨어</a:t>
                       </a:r>
                       <a:endParaRPr lang="en-US" sz="1400" dirty="0">
                         <a:latin typeface="Calibri" charset="0"/>
-                        <a:ea typeface="Calibri" charset="0"/>
+                        <a:ea typeface="Malgun Gothic" charset="0"/>
                         <a:cs typeface="Calibri" charset="0"/>
                       </a:endParaRPr>
                     </a:p>
@@ -6131,14 +6046,14 @@
                             <a:srgbClr val="5D6B7E"/>
                           </a:solidFill>
                           <a:latin typeface="Calibri" pitchFamily="34" charset="0"/>
-                          <a:ea typeface="Calibri" pitchFamily="34" charset="-122"/>
+                          <a:ea typeface="Malgun Gothic" pitchFamily="34" charset="-122"/>
                           <a:cs typeface="Calibri" pitchFamily="34" charset="-120"/>
                         </a:rPr>
                         <a:t>차단 불가</a:t>
                       </a:r>
                       <a:endParaRPr lang="en-US" sz="1400" dirty="0">
                         <a:latin typeface="Calibri" charset="0"/>
-                        <a:ea typeface="Calibri" charset="0"/>
+                        <a:ea typeface="Malgun Gothic" charset="0"/>
                         <a:cs typeface="Calibri" charset="0"/>
                       </a:endParaRPr>
                     </a:p>
@@ -6196,7 +6111,7 @@
                             <a:srgbClr val="E3202A"/>
                           </a:solidFill>
                           <a:latin typeface="Calibri" pitchFamily="34" charset="0"/>
-                          <a:ea typeface="Calibri" pitchFamily="34" charset="-122"/>
+                          <a:ea typeface="Malgun Gothic" pitchFamily="34" charset="-122"/>
                           <a:cs typeface="Calibri" pitchFamily="34" charset="-120"/>
                         </a:rPr>
                         <a:t>자동 차단</a:t>
@@ -6207,14 +6122,14 @@
                             <a:srgbClr val="151A21"/>
                           </a:solidFill>
                           <a:latin typeface="Calibri" pitchFamily="34" charset="0"/>
-                          <a:ea typeface="Calibri" pitchFamily="34" charset="-122"/>
+                          <a:ea typeface="Malgun Gothic" pitchFamily="34" charset="-122"/>
                           <a:cs typeface="Calibri" pitchFamily="34" charset="-120"/>
                         </a:rPr>
                         <a:t>  — 독립 테스트에서 랜섬웨어 100% 차단</a:t>
                       </a:r>
                       <a:endParaRPr lang="en-US" sz="1400" dirty="0">
                         <a:latin typeface="Calibri" charset="0"/>
-                        <a:ea typeface="Calibri" charset="0"/>
+                        <a:ea typeface="Malgun Gothic" charset="0"/>
                         <a:cs typeface="Calibri" charset="0"/>
                       </a:endParaRPr>
                     </a:p>
@@ -6279,14 +6194,14 @@
                             <a:srgbClr val="151A21"/>
                           </a:solidFill>
                           <a:latin typeface="Calibri" pitchFamily="34" charset="0"/>
-                          <a:ea typeface="Calibri" pitchFamily="34" charset="-122"/>
+                          <a:ea typeface="Malgun Gothic" pitchFamily="34" charset="-122"/>
                           <a:cs typeface="Calibri" pitchFamily="34" charset="-120"/>
                         </a:rPr>
                         <a:t>공격 발생 시</a:t>
                       </a:r>
                       <a:endParaRPr lang="en-US" sz="1400" dirty="0">
                         <a:latin typeface="Calibri" charset="0"/>
-                        <a:ea typeface="Calibri" charset="0"/>
+                        <a:ea typeface="Malgun Gothic" charset="0"/>
                         <a:cs typeface="Calibri" charset="0"/>
                       </a:endParaRPr>
                     </a:p>
@@ -6347,14 +6262,14 @@
                             <a:srgbClr val="5D6B7E"/>
                           </a:solidFill>
                           <a:latin typeface="Calibri" pitchFamily="34" charset="0"/>
-                          <a:ea typeface="Calibri" pitchFamily="34" charset="-122"/>
+                          <a:ea typeface="Malgun Gothic" pitchFamily="34" charset="-122"/>
                           <a:cs typeface="Calibri" pitchFamily="34" charset="-120"/>
                         </a:rPr>
                         <a:t>알아채지 못함</a:t>
                       </a:r>
                       <a:endParaRPr lang="en-US" sz="1400" dirty="0">
                         <a:latin typeface="Calibri" charset="0"/>
-                        <a:ea typeface="Calibri" charset="0"/>
+                        <a:ea typeface="Malgun Gothic" charset="0"/>
                         <a:cs typeface="Calibri" charset="0"/>
                       </a:endParaRPr>
                     </a:p>
@@ -6412,7 +6327,7 @@
                             <a:srgbClr val="E3202A"/>
                           </a:solidFill>
                           <a:latin typeface="Calibri" pitchFamily="34" charset="0"/>
-                          <a:ea typeface="Calibri" pitchFamily="34" charset="-122"/>
+                          <a:ea typeface="Malgun Gothic" pitchFamily="34" charset="-122"/>
                           <a:cs typeface="Calibri" pitchFamily="34" charset="-120"/>
                         </a:rPr>
                         <a:t>탐지 및 격리</a:t>
@@ -6423,14 +6338,14 @@
                             <a:srgbClr val="151A21"/>
                           </a:solidFill>
                           <a:latin typeface="Calibri" pitchFamily="34" charset="0"/>
-                          <a:ea typeface="Calibri" pitchFamily="34" charset="-122"/>
+                          <a:ea typeface="Malgun Gothic" pitchFamily="34" charset="-122"/>
                           <a:cs typeface="Calibri" pitchFamily="34" charset="-120"/>
                         </a:rPr>
                         <a:t>  — 감염 PC를 클릭 한 번으로 격리</a:t>
                       </a:r>
                       <a:endParaRPr lang="en-US" sz="1400" dirty="0">
                         <a:latin typeface="Calibri" charset="0"/>
-                        <a:ea typeface="Calibri" charset="0"/>
+                        <a:ea typeface="Malgun Gothic" charset="0"/>
                         <a:cs typeface="Calibri" charset="0"/>
                       </a:endParaRPr>
                     </a:p>
@@ -6495,14 +6410,14 @@
                             <a:srgbClr val="151A21"/>
                           </a:solidFill>
                           <a:latin typeface="Calibri" pitchFamily="34" charset="0"/>
-                          <a:ea typeface="Calibri" pitchFamily="34" charset="-122"/>
+                          <a:ea typeface="Malgun Gothic" pitchFamily="34" charset="-122"/>
                           <a:cs typeface="Calibri" pitchFamily="34" charset="-120"/>
                         </a:rPr>
                         <a:t>전문가 지원</a:t>
                       </a:r>
                       <a:endParaRPr lang="en-US" sz="1400" dirty="0">
                         <a:latin typeface="Calibri" charset="0"/>
-                        <a:ea typeface="Calibri" charset="0"/>
+                        <a:ea typeface="Malgun Gothic" charset="0"/>
                         <a:cs typeface="Calibri" charset="0"/>
                       </a:endParaRPr>
                     </a:p>
@@ -6563,14 +6478,14 @@
                             <a:srgbClr val="5D6B7E"/>
                           </a:solidFill>
                           <a:latin typeface="Calibri" pitchFamily="34" charset="0"/>
-                          <a:ea typeface="Calibri" pitchFamily="34" charset="-122"/>
+                          <a:ea typeface="Malgun Gothic" pitchFamily="34" charset="-122"/>
                           <a:cs typeface="Calibri" pitchFamily="34" charset="-120"/>
                         </a:rPr>
                         <a:t>미포함</a:t>
                       </a:r>
                       <a:endParaRPr lang="en-US" sz="1400" dirty="0">
                         <a:latin typeface="Calibri" charset="0"/>
-                        <a:ea typeface="Calibri" charset="0"/>
+                        <a:ea typeface="Malgun Gothic" charset="0"/>
                         <a:cs typeface="Calibri" charset="0"/>
                       </a:endParaRPr>
                     </a:p>
@@ -6628,7 +6543,7 @@
                             <a:srgbClr val="E3202A"/>
                           </a:solidFill>
                           <a:latin typeface="Calibri" pitchFamily="34" charset="0"/>
-                          <a:ea typeface="Calibri" pitchFamily="34" charset="-122"/>
+                          <a:ea typeface="Malgun Gothic" pitchFamily="34" charset="-122"/>
                           <a:cs typeface="Calibri" pitchFamily="34" charset="-120"/>
                         </a:rPr>
                         <a:t>포함</a:t>
@@ -6639,14 +6554,14 @@
                             <a:srgbClr val="151A21"/>
                           </a:solidFill>
                           <a:latin typeface="Calibri" pitchFamily="34" charset="0"/>
-                          <a:ea typeface="Calibri" pitchFamily="34" charset="-122"/>
+                          <a:ea typeface="Malgun Gothic" pitchFamily="34" charset="-122"/>
                           <a:cs typeface="Calibri" pitchFamily="34" charset="-120"/>
                         </a:rPr>
                         <a:t>  — 시큐코리아 24시간 지원, SK쉴더스 연계</a:t>
                       </a:r>
                       <a:endParaRPr lang="en-US" sz="1400" dirty="0">
                         <a:latin typeface="Calibri" charset="0"/>
-                        <a:ea typeface="Calibri" charset="0"/>
+                        <a:ea typeface="Malgun Gothic" charset="0"/>
                         <a:cs typeface="Calibri" charset="0"/>
                       </a:endParaRPr>
                     </a:p>
@@ -6711,14 +6626,14 @@
                             <a:srgbClr val="151A21"/>
                           </a:solidFill>
                           <a:latin typeface="Calibri" pitchFamily="34" charset="0"/>
-                          <a:ea typeface="Calibri" pitchFamily="34" charset="-122"/>
+                          <a:ea typeface="Malgun Gothic" pitchFamily="34" charset="-122"/>
                           <a:cs typeface="Calibri" pitchFamily="34" charset="-120"/>
                         </a:rPr>
                         <a:t>IT팀 업무 부담</a:t>
                       </a:r>
                       <a:endParaRPr lang="en-US" sz="1400" dirty="0">
                         <a:latin typeface="Calibri" charset="0"/>
-                        <a:ea typeface="Calibri" charset="0"/>
+                        <a:ea typeface="Malgun Gothic" charset="0"/>
                         <a:cs typeface="Calibri" charset="0"/>
                       </a:endParaRPr>
                     </a:p>
@@ -6779,14 +6694,14 @@
                             <a:srgbClr val="5D6B7E"/>
                           </a:solidFill>
                           <a:latin typeface="Calibri" pitchFamily="34" charset="0"/>
-                          <a:ea typeface="Calibri" pitchFamily="34" charset="-122"/>
+                          <a:ea typeface="Malgun Gothic" pitchFamily="34" charset="-122"/>
                           <a:cs typeface="Calibri" pitchFamily="34" charset="-120"/>
                         </a:rPr>
                         <a:t>높음 — 모든 항목을 수작업으로 조치</a:t>
                       </a:r>
                       <a:endParaRPr lang="en-US" sz="1400" dirty="0">
                         <a:latin typeface="Calibri" charset="0"/>
-                        <a:ea typeface="Calibri" charset="0"/>
+                        <a:ea typeface="Malgun Gothic" charset="0"/>
                         <a:cs typeface="Calibri" charset="0"/>
                       </a:endParaRPr>
                     </a:p>
@@ -6844,7 +6759,7 @@
                             <a:srgbClr val="E3202A"/>
                           </a:solidFill>
                           <a:latin typeface="Calibri" pitchFamily="34" charset="0"/>
-                          <a:ea typeface="Calibri" pitchFamily="34" charset="-122"/>
+                          <a:ea typeface="Malgun Gothic" pitchFamily="34" charset="-122"/>
                           <a:cs typeface="Calibri" pitchFamily="34" charset="-120"/>
                         </a:rPr>
                         <a:t>낮음</a:t>
@@ -6855,14 +6770,14 @@
                             <a:srgbClr val="151A21"/>
                           </a:solidFill>
                           <a:latin typeface="Calibri" pitchFamily="34" charset="0"/>
-                          <a:ea typeface="Calibri" pitchFamily="34" charset="-122"/>
+                          <a:ea typeface="Malgun Gothic" pitchFamily="34" charset="-122"/>
                           <a:cs typeface="Calibri" pitchFamily="34" charset="-120"/>
                         </a:rPr>
                         <a:t>  — 보호가 자동으로 이뤄짐</a:t>
                       </a:r>
                       <a:endParaRPr lang="en-US" sz="1400" dirty="0">
                         <a:latin typeface="Calibri" charset="0"/>
-                        <a:ea typeface="Calibri" charset="0"/>
+                        <a:ea typeface="Malgun Gothic" charset="0"/>
                         <a:cs typeface="Calibri" charset="0"/>
                       </a:endParaRPr>
                     </a:p>
@@ -6946,7 +6861,7 @@
                   <a:srgbClr val="5E6978"/>
                 </a:solidFill>
                 <a:latin typeface="Calibri" pitchFamily="34" charset="0"/>
-                <a:ea typeface="Calibri" pitchFamily="34" charset="-122"/>
+                <a:ea typeface="Malgun Gothic" pitchFamily="34" charset="-122"/>
                 <a:cs typeface="Calibri" pitchFamily="34" charset="-120"/>
               </a:rPr>
               <a:t>05   |   CrowdStrike Falcon 제안서  ·  웨스틴 리조트 괌</a:t>
@@ -7042,7 +6957,7 @@
                   <a:srgbClr val="E3202A"/>
                 </a:solidFill>
                 <a:latin typeface="Arial" pitchFamily="34" charset="0"/>
-                <a:ea typeface="Arial" pitchFamily="34" charset="-122"/>
+                <a:ea typeface="Malgun Gothic" pitchFamily="34" charset="-122"/>
                 <a:cs typeface="Arial" pitchFamily="34" charset="-120"/>
               </a:rPr>
               <a:t>05   기대 효과</a:t>
@@ -7081,7 +6996,7 @@
                   <a:srgbClr val="151A21"/>
                 </a:solidFill>
                 <a:latin typeface="Arial" pitchFamily="34" charset="0"/>
-                <a:ea typeface="Arial" pitchFamily="34" charset="-122"/>
+                <a:ea typeface="Malgun Gothic" pitchFamily="34" charset="-122"/>
                 <a:cs typeface="Arial" pitchFamily="34" charset="-120"/>
               </a:rPr>
               <a:t>무방비 상태에서 상시 보호로</a:t>
@@ -7171,7 +7086,7 @@
                   <a:srgbClr val="5D6B7E"/>
                 </a:solidFill>
                 <a:latin typeface="Calibri" pitchFamily="34" charset="0"/>
-                <a:ea typeface="Calibri" pitchFamily="34" charset="-122"/>
+                <a:ea typeface="Malgun Gothic" pitchFamily="34" charset="-122"/>
                 <a:cs typeface="Calibri" pitchFamily="34" charset="-120"/>
               </a:rPr>
               <a:t>현재  ·  엔드포인트 보안 없음</a:t>
@@ -7234,7 +7149,7 @@
                   <a:srgbClr val="151A21"/>
                 </a:solidFill>
                 <a:latin typeface="Calibri" pitchFamily="34" charset="0"/>
-                <a:ea typeface="Calibri" pitchFamily="34" charset="-122"/>
+                <a:ea typeface="Malgun Gothic" pitchFamily="34" charset="-122"/>
                 <a:cs typeface="Calibri" pitchFamily="34" charset="-120"/>
               </a:rPr>
               <a:t>악성코드·랜섬웨어 방어 없음</a:t>
@@ -7297,7 +7212,7 @@
                   <a:srgbClr val="151A21"/>
                 </a:solidFill>
                 <a:latin typeface="Calibri" pitchFamily="34" charset="0"/>
-                <a:ea typeface="Calibri" pitchFamily="34" charset="-122"/>
+                <a:ea typeface="Malgun Gothic" pitchFamily="34" charset="-122"/>
                 <a:cs typeface="Calibri" pitchFamily="34" charset="-120"/>
               </a:rPr>
               <a:t>PC에서 무슨 일이 일어나는지 알 수 없음</a:t>
@@ -7360,7 +7275,7 @@
                   <a:srgbClr val="151A21"/>
                 </a:solidFill>
                 <a:latin typeface="Calibri" pitchFamily="34" charset="0"/>
-                <a:ea typeface="Calibri" pitchFamily="34" charset="-122"/>
+                <a:ea typeface="Malgun Gothic" pitchFamily="34" charset="-122"/>
                 <a:cs typeface="Calibri" pitchFamily="34" charset="-120"/>
               </a:rPr>
               <a:t>사고 발생 시 건별 수작업 대응</a:t>
@@ -7423,7 +7338,7 @@
                   <a:srgbClr val="151A21"/>
                 </a:solidFill>
                 <a:latin typeface="Calibri" pitchFamily="34" charset="0"/>
-                <a:ea typeface="Calibri" pitchFamily="34" charset="-122"/>
+                <a:ea typeface="Malgun Gothic" pitchFamily="34" charset="-122"/>
                 <a:cs typeface="Calibri" pitchFamily="34" charset="-120"/>
               </a:rPr>
               <a:t>진행 중인 공격을 막을 방법 없음</a:t>
@@ -7486,7 +7401,7 @@
                   <a:srgbClr val="151A21"/>
                 </a:solidFill>
                 <a:latin typeface="Calibri" pitchFamily="34" charset="0"/>
-                <a:ea typeface="Calibri" pitchFamily="34" charset="-122"/>
+                <a:ea typeface="Malgun Gothic" pitchFamily="34" charset="-122"/>
                 <a:cs typeface="Calibri" pitchFamily="34" charset="-120"/>
               </a:rPr>
               <a:t>경영진이 보안 현황을 파악하기 어려움</a:t>
@@ -7576,7 +7491,7 @@
                   <a:srgbClr val="E3202A"/>
                 </a:solidFill>
                 <a:latin typeface="Calibri" pitchFamily="34" charset="0"/>
-                <a:ea typeface="Calibri" pitchFamily="34" charset="-122"/>
+                <a:ea typeface="Malgun Gothic" pitchFamily="34" charset="-122"/>
                 <a:cs typeface="Calibri" pitchFamily="34" charset="-120"/>
               </a:rPr>
               <a:t>도입 후  ·  CROWDSTRIKE FALCON</a:t>
@@ -7639,7 +7554,7 @@
                   <a:srgbClr val="FFFFFF"/>
                 </a:solidFill>
                 <a:latin typeface="Calibri" pitchFamily="34" charset="0"/>
-                <a:ea typeface="Calibri" pitchFamily="34" charset="-122"/>
+                <a:ea typeface="Malgun Gothic" pitchFamily="34" charset="-122"/>
                 <a:cs typeface="Calibri" pitchFamily="34" charset="-120"/>
               </a:rPr>
               <a:t>모든 PC·서버 실시간 차단</a:t>
@@ -7702,7 +7617,7 @@
                   <a:srgbClr val="FFFFFF"/>
                 </a:solidFill>
                 <a:latin typeface="Calibri" pitchFamily="34" charset="0"/>
-                <a:ea typeface="Calibri" pitchFamily="34" charset="-122"/>
+                <a:ea typeface="Malgun Gothic" pitchFamily="34" charset="-122"/>
                 <a:cs typeface="Calibri" pitchFamily="34" charset="-120"/>
               </a:rPr>
               <a:t>24시간 상시 모니터링</a:t>
@@ -7765,7 +7680,7 @@
                   <a:srgbClr val="FFFFFF"/>
                 </a:solidFill>
                 <a:latin typeface="Calibri" pitchFamily="34" charset="0"/>
-                <a:ea typeface="Calibri" pitchFamily="34" charset="-122"/>
+                <a:ea typeface="Malgun Gothic" pitchFamily="34" charset="-122"/>
                 <a:cs typeface="Calibri" pitchFamily="34" charset="-120"/>
               </a:rPr>
               <a:t>자동 격리 및 대응</a:t>
@@ -7828,7 +7743,7 @@
                   <a:srgbClr val="FFFFFF"/>
                 </a:solidFill>
                 <a:latin typeface="Calibri" pitchFamily="34" charset="0"/>
-                <a:ea typeface="Calibri" pitchFamily="34" charset="-122"/>
+                <a:ea typeface="Malgun Gothic" pitchFamily="34" charset="-122"/>
                 <a:cs typeface="Calibri" pitchFamily="34" charset="-120"/>
               </a:rPr>
               <a:t>검증된 랜섬웨어 보호</a:t>
@@ -7891,7 +7806,7 @@
                   <a:srgbClr val="FFFFFF"/>
                 </a:solidFill>
                 <a:latin typeface="Calibri" pitchFamily="34" charset="0"/>
-                <a:ea typeface="Calibri" pitchFamily="34" charset="-122"/>
+                <a:ea typeface="Malgun Gothic" pitchFamily="34" charset="-122"/>
                 <a:cs typeface="Calibri" pitchFamily="34" charset="-120"/>
               </a:rPr>
               <a:t>한눈에 보는 대시보드와 경영진 보고</a:t>
@@ -8015,7 +7930,7 @@
                   <a:srgbClr val="151A21"/>
                 </a:solidFill>
                 <a:latin typeface="Arial" pitchFamily="34" charset="0"/>
-                <a:ea typeface="Arial" pitchFamily="34" charset="-122"/>
+                <a:ea typeface="Malgun Gothic" pitchFamily="34" charset="-122"/>
                 <a:cs typeface="Arial" pitchFamily="34" charset="-120"/>
               </a:rPr>
               <a:t>고객 신뢰 보호</a:t>
@@ -8054,7 +7969,7 @@
                   <a:srgbClr val="5E6978"/>
                 </a:solidFill>
                 <a:latin typeface="Calibri" pitchFamily="34" charset="0"/>
-                <a:ea typeface="Calibri" pitchFamily="34" charset="-122"/>
+                <a:ea typeface="Malgun Gothic" pitchFamily="34" charset="-122"/>
                 <a:cs typeface="Calibri" pitchFamily="34" charset="-120"/>
               </a:rPr>
               <a:t>고객 정보와 결제 안전 확보</a:t>
@@ -8178,7 +8093,7 @@
                   <a:srgbClr val="151A21"/>
                 </a:solidFill>
                 <a:latin typeface="Arial" pitchFamily="34" charset="0"/>
-                <a:ea typeface="Arial" pitchFamily="34" charset="-122"/>
+                <a:ea typeface="Malgun Gothic" pitchFamily="34" charset="-122"/>
                 <a:cs typeface="Arial" pitchFamily="34" charset="-120"/>
               </a:rPr>
               <a:t>비즈니스 연속성</a:t>
@@ -8217,7 +8132,7 @@
                   <a:srgbClr val="5E6978"/>
                 </a:solidFill>
                 <a:latin typeface="Calibri" pitchFamily="34" charset="0"/>
-                <a:ea typeface="Calibri" pitchFamily="34" charset="-122"/>
+                <a:ea typeface="Malgun Gothic" pitchFamily="34" charset="-122"/>
                 <a:cs typeface="Calibri" pitchFamily="34" charset="-120"/>
               </a:rPr>
               <a:t>프런트 데스크·백오피스 중단 방지</a:t>
@@ -8341,7 +8256,7 @@
                   <a:srgbClr val="151A21"/>
                 </a:solidFill>
                 <a:latin typeface="Arial" pitchFamily="34" charset="0"/>
-                <a:ea typeface="Arial" pitchFamily="34" charset="-122"/>
+                <a:ea typeface="Malgun Gothic" pitchFamily="34" charset="-122"/>
                 <a:cs typeface="Arial" pitchFamily="34" charset="-120"/>
               </a:rPr>
               <a:t>IT 업무 부담 경감</a:t>
@@ -8380,7 +8295,7 @@
                   <a:srgbClr val="5E6978"/>
                 </a:solidFill>
                 <a:latin typeface="Calibri" pitchFamily="34" charset="0"/>
-                <a:ea typeface="Calibri" pitchFamily="34" charset="-122"/>
+                <a:ea typeface="Malgun Gothic" pitchFamily="34" charset="-122"/>
                 <a:cs typeface="Calibri" pitchFamily="34" charset="-120"/>
               </a:rPr>
               <a:t>자동화 + 시큐코리아 24시간 지원</a:t>
@@ -8504,7 +8419,7 @@
                   <a:srgbClr val="151A21"/>
                 </a:solidFill>
                 <a:latin typeface="Arial" pitchFamily="34" charset="0"/>
-                <a:ea typeface="Arial" pitchFamily="34" charset="-122"/>
+                <a:ea typeface="Malgun Gothic" pitchFamily="34" charset="-122"/>
                 <a:cs typeface="Arial" pitchFamily="34" charset="-120"/>
               </a:rPr>
               <a:t>컴플라이언스 대응</a:t>
@@ -8543,7 +8458,7 @@
                   <a:srgbClr val="5E6978"/>
                 </a:solidFill>
                 <a:latin typeface="Calibri" pitchFamily="34" charset="0"/>
-                <a:ea typeface="Calibri" pitchFamily="34" charset="-122"/>
+                <a:ea typeface="Malgun Gothic" pitchFamily="34" charset="-122"/>
                 <a:cs typeface="Calibri" pitchFamily="34" charset="-120"/>
               </a:rPr>
               <a:t>PCI DSS 및 개인정보보호 요건 지원</a:t>
@@ -8582,7 +8497,7 @@
                   <a:srgbClr val="5E6978"/>
                 </a:solidFill>
                 <a:latin typeface="Calibri" pitchFamily="34" charset="0"/>
-                <a:ea typeface="Calibri" pitchFamily="34" charset="-122"/>
+                <a:ea typeface="Malgun Gothic" pitchFamily="34" charset="-122"/>
                 <a:cs typeface="Calibri" pitchFamily="34" charset="-120"/>
               </a:rPr>
               <a:t>06   |   CrowdStrike Falcon 제안서  ·  웨스틴 리조트 괌</a:t>
@@ -8724,7 +8639,7 @@
                   <a:srgbClr val="E3202A"/>
                 </a:solidFill>
                 <a:latin typeface="Arial" pitchFamily="34" charset="0"/>
-                <a:ea typeface="Arial" pitchFamily="34" charset="-122"/>
+                <a:ea typeface="Malgun Gothic" pitchFamily="34" charset="-122"/>
                 <a:cs typeface="Arial" pitchFamily="34" charset="-120"/>
               </a:rPr>
               <a:t>06   기술지원</a:t>
@@ -8763,7 +8678,7 @@
                   <a:srgbClr val="151A21"/>
                 </a:solidFill>
                 <a:latin typeface="Arial" pitchFamily="34" charset="0"/>
-                <a:ea typeface="Arial" pitchFamily="34" charset="-122"/>
+                <a:ea typeface="Malgun Gothic" pitchFamily="34" charset="-122"/>
                 <a:cs typeface="Arial" pitchFamily="34" charset="-120"/>
               </a:rPr>
               <a:t>시큐코리아 24시간 기술지원</a:t>
@@ -8877,7 +8792,7 @@
                   <a:srgbClr val="151A21"/>
                 </a:solidFill>
                 <a:latin typeface="Arial" pitchFamily="34" charset="0"/>
-                <a:ea typeface="Arial" pitchFamily="34" charset="-122"/>
+                <a:ea typeface="Malgun Gothic" pitchFamily="34" charset="-122"/>
                 <a:cs typeface="Arial" pitchFamily="34" charset="-120"/>
               </a:rPr>
               <a:t>해외 사업장 특화 24시간 원격 지원</a:t>
@@ -8916,7 +8831,7 @@
                   <a:srgbClr val="5E6978"/>
                 </a:solidFill>
                 <a:latin typeface="Calibri" pitchFamily="34" charset="0"/>
-                <a:ea typeface="Calibri" pitchFamily="34" charset="-122"/>
+                <a:ea typeface="Malgun Gothic" pitchFamily="34" charset="-122"/>
                 <a:cs typeface="Calibri" pitchFamily="34" charset="-120"/>
               </a:rPr>
               <a:t>해외 사업장에 맞춘 24시간 원격 지원으로, 시차나 현지 업무시간과 관계없이 언제든 도움을 받을 수 있습니다.</a:t>
@@ -9006,7 +8921,7 @@
                   <a:srgbClr val="151A21"/>
                 </a:solidFill>
                 <a:latin typeface="Arial" pitchFamily="34" charset="0"/>
-                <a:ea typeface="Arial" pitchFamily="34" charset="-122"/>
+                <a:ea typeface="Malgun Gothic" pitchFamily="34" charset="-122"/>
                 <a:cs typeface="Arial" pitchFamily="34" charset="-120"/>
               </a:rPr>
               <a:t>전담 엔지니어 매칭</a:t>
@@ -9045,7 +8960,7 @@
                   <a:srgbClr val="5E6978"/>
                 </a:solidFill>
                 <a:latin typeface="Calibri" pitchFamily="34" charset="0"/>
-                <a:ea typeface="Calibri" pitchFamily="34" charset="-122"/>
+                <a:ea typeface="Malgun Gothic" pitchFamily="34" charset="-122"/>
                 <a:cs typeface="Calibri" pitchFamily="34" charset="-120"/>
               </a:rPr>
               <a:t>시큐코리아 전담 엔지니어가 리조트 IT팀의 일원처럼 시스템을 깊이 이해하고, 일상 요청을 빠르고 일관되게 처리합니다.</a:t>
@@ -9111,7 +9026,7 @@
                   <a:srgbClr val="151A21"/>
                 </a:solidFill>
                 <a:latin typeface="Arial" pitchFamily="34" charset="0"/>
-                <a:ea typeface="Arial" pitchFamily="34" charset="-122"/>
+                <a:ea typeface="Malgun Gothic" pitchFamily="34" charset="-122"/>
                 <a:cs typeface="Arial" pitchFamily="34" charset="-120"/>
               </a:rPr>
               <a:t>책임 있는 직접 지원</a:t>
@@ -9150,10 +9065,21 @@
                   <a:srgbClr val="5E6978"/>
                 </a:solidFill>
                 <a:latin typeface="Calibri" pitchFamily="34" charset="0"/>
-                <a:ea typeface="Calibri" pitchFamily="34" charset="-122"/>
+                <a:ea typeface="Malgun Gothic" pitchFamily="34" charset="-122"/>
                 <a:cs typeface="Calibri" pitchFamily="34" charset="-120"/>
               </a:rPr>
-              <a:t>기술지원, 라이선스, 갱신을 시큐코리아가 직접 처리하고, 첫 연락부터 문제 해결까지 끝까지 함께합니다.</a:t>
+              <a:t>기술지원, 라이선스, 갱신을 시큐코리아가 직접 처리하고, 첫 연락부터 문제 해결까지 끝까지 함께합니다. 필요 시 SK쉴더스로 에스컬레이션합니다.</a:t>
+            </a:r>
+            <a:r>
+              <a:rPr lang="en-US" sz="1200">
+                <a:solidFill>
+                  <a:srgbClr val="5E6978"/>
+                </a:solidFill>
+                <a:latin typeface="Calibri" pitchFamily="34" charset="0"/>
+                <a:ea typeface="Malgun Gothic" pitchFamily="34" charset="-122"/>
+                <a:cs typeface="Calibri" pitchFamily="34" charset="-120"/>
+              </a:rPr>
+              <a:t/>
             </a:r>
             <a:endParaRPr lang="en-US" sz="1200" dirty="0"/>
           </a:p>
@@ -9216,7 +9142,7 @@
                   <a:srgbClr val="E3202A"/>
                 </a:solidFill>
                 <a:latin typeface="Calibri" pitchFamily="34" charset="0"/>
-                <a:ea typeface="Calibri" pitchFamily="34" charset="-122"/>
+                <a:ea typeface="Malgun Gothic" pitchFamily="34" charset="-122"/>
                 <a:cs typeface="Calibri" pitchFamily="34" charset="-120"/>
               </a:rPr>
               <a:t>전문 지원 연계  ·  SK쉴더스</a:t>
@@ -9279,7 +9205,7 @@
                   <a:srgbClr val="FFFFFF"/>
                 </a:solidFill>
                 <a:latin typeface="Calibri" pitchFamily="34" charset="0"/>
-                <a:ea typeface="Calibri" pitchFamily="34" charset="-122"/>
+                <a:ea typeface="Malgun Gothic" pitchFamily="34" charset="-122"/>
                 <a:cs typeface="Calibri" pitchFamily="34" charset="-120"/>
               </a:rPr>
               <a:t>침해사고 대응 전문가 24시간 대응</a:t>
@@ -9342,7 +9268,7 @@
                   <a:srgbClr val="FFFFFF"/>
                 </a:solidFill>
                 <a:latin typeface="Calibri" pitchFamily="34" charset="0"/>
-                <a:ea typeface="Calibri" pitchFamily="34" charset="-122"/>
+                <a:ea typeface="Malgun Gothic" pitchFamily="34" charset="-122"/>
                 <a:cs typeface="Calibri" pitchFamily="34" charset="-120"/>
               </a:rPr>
               <a:t>Critical 이벤트 시 30분 내 유선 연락, 2시간 내 초동 조치 (SLA)</a:t>
@@ -9405,7 +9331,7 @@
                   <a:srgbClr val="FFFFFF"/>
                 </a:solidFill>
                 <a:latin typeface="Calibri" pitchFamily="34" charset="0"/>
-                <a:ea typeface="Calibri" pitchFamily="34" charset="-122"/>
+                <a:ea typeface="Malgun Gothic" pitchFamily="34" charset="-122"/>
                 <a:cs typeface="Calibri" pitchFamily="34" charset="-120"/>
               </a:rPr>
               <a:t>사고 발생 시 심층 조사</a:t>
@@ -9468,7 +9394,7 @@
                   <a:srgbClr val="FFFFFF"/>
                 </a:solidFill>
                 <a:latin typeface="Calibri" pitchFamily="34" charset="0"/>
-                <a:ea typeface="Calibri" pitchFamily="34" charset="-122"/>
+                <a:ea typeface="Malgun Gothic" pitchFamily="34" charset="-122"/>
                 <a:cs typeface="Calibri" pitchFamily="34" charset="-120"/>
               </a:rPr>
               <a:t>중대 보안 경보 정밀 분석</a:t>
@@ -9531,7 +9457,7 @@
                   <a:srgbClr val="FFFFFF"/>
                 </a:solidFill>
                 <a:latin typeface="Calibri" pitchFamily="34" charset="0"/>
-                <a:ea typeface="Calibri" pitchFamily="34" charset="-122"/>
+                <a:ea typeface="Malgun Gothic" pitchFamily="34" charset="-122"/>
                 <a:cs typeface="Calibri" pitchFamily="34" charset="-120"/>
               </a:rPr>
               <a:t>경험 많은 전문가의 악성코드 분석</a:t>
@@ -9570,7 +9496,7 @@
                   <a:srgbClr val="FFFFFF"/>
                 </a:solidFill>
                 <a:latin typeface="Calibri" pitchFamily="34" charset="0"/>
-                <a:ea typeface="Calibri" pitchFamily="34" charset="-122"/>
+                <a:ea typeface="Malgun Gothic" pitchFamily="34" charset="-122"/>
                 <a:cs typeface="Calibri" pitchFamily="34" charset="-120"/>
               </a:rPr>
               <a:t>필요 시 CrowdStrike 파트너 SK쉴더스가 함께 대응합니다.</a:t>
@@ -9609,7 +9535,7 @@
                   <a:srgbClr val="5E6978"/>
                 </a:solidFill>
                 <a:latin typeface="Calibri" pitchFamily="34" charset="0"/>
-                <a:ea typeface="Calibri" pitchFamily="34" charset="-122"/>
+                <a:ea typeface="Malgun Gothic" pitchFamily="34" charset="-122"/>
                 <a:cs typeface="Calibri" pitchFamily="34" charset="-120"/>
               </a:rPr>
               <a:t>07   |   CrowdStrike Falcon 제안서  ·  웨스틴 리조트 괌</a:t>
@@ -9783,7 +9709,7 @@
                   <a:srgbClr val="E3202A"/>
                 </a:solidFill>
                 <a:latin typeface="Calibri" pitchFamily="34" charset="0"/>
-                <a:ea typeface="Calibri" pitchFamily="34" charset="-122"/>
+                <a:ea typeface="Malgun Gothic" pitchFamily="34" charset="-122"/>
                 <a:cs typeface="Calibri" pitchFamily="34" charset="-120"/>
               </a:rPr>
               <a:t>Q &amp; A</a:t>
@@ -9822,7 +9748,7 @@
                   <a:srgbClr val="FFFFFF"/>
                 </a:solidFill>
                 <a:latin typeface="Arial" pitchFamily="34" charset="0"/>
-                <a:ea typeface="Arial" pitchFamily="34" charset="-122"/>
+                <a:ea typeface="Malgun Gothic" pitchFamily="34" charset="-122"/>
                 <a:cs typeface="Arial" pitchFamily="34" charset="-120"/>
               </a:rPr>
               <a:t>감사합니다</a:t>
@@ -9861,7 +9787,7 @@
                   <a:srgbClr val="C9CED6"/>
                 </a:solidFill>
                 <a:latin typeface="Calibri" pitchFamily="34" charset="0"/>
-                <a:ea typeface="Calibri" pitchFamily="34" charset="-122"/>
+                <a:ea typeface="Malgun Gothic" pitchFamily="34" charset="-122"/>
                 <a:cs typeface="Calibri" pitchFamily="34" charset="-120"/>
               </a:rPr>
               <a:t>CrowdStrike Falcon으로 완성하는 웨스틴 리조트 괌의 실시간 엔드포인트 보호.</a:t>
@@ -9924,7 +9850,7 @@
                   <a:srgbClr val="FFFFFF"/>
                 </a:solidFill>
                 <a:latin typeface="Calibri" pitchFamily="34" charset="0"/>
-                <a:ea typeface="Calibri" pitchFamily="34" charset="-122"/>
+                <a:ea typeface="Malgun Gothic" pitchFamily="34" charset="-122"/>
                 <a:cs typeface="Calibri" pitchFamily="34" charset="-120"/>
               </a:rPr>
               <a:t>sales@secukorea.com</a:t>
@@ -9987,7 +9913,7 @@
                   <a:srgbClr val="FFFFFF"/>
                 </a:solidFill>
                 <a:latin typeface="Calibri" pitchFamily="34" charset="0"/>
-                <a:ea typeface="Calibri" pitchFamily="34" charset="-122"/>
+                <a:ea typeface="Malgun Gothic" pitchFamily="34" charset="-122"/>
                 <a:cs typeface="Calibri" pitchFamily="34" charset="-120"/>
               </a:rPr>
               <a:t>+82-2-3400-0877</a:t>
@@ -10050,7 +9976,7 @@
                   <a:srgbClr val="FFFFFF"/>
                 </a:solidFill>
                 <a:latin typeface="Calibri" pitchFamily="34" charset="0"/>
-                <a:ea typeface="Calibri" pitchFamily="34" charset="-122"/>
+                <a:ea typeface="Malgun Gothic" pitchFamily="34" charset="-122"/>
                 <a:cs typeface="Calibri" pitchFamily="34" charset="-120"/>
               </a:rPr>
               <a:t>www.secukorea.com</a:t>
@@ -10089,7 +10015,7 @@
                   <a:srgbClr val="8A93A0"/>
                 </a:solidFill>
                 <a:latin typeface="Calibri" pitchFamily="34" charset="0"/>
-                <a:ea typeface="Calibri" pitchFamily="34" charset="-122"/>
+                <a:ea typeface="Malgun Gothic" pitchFamily="34" charset="-122"/>
                 <a:cs typeface="Calibri" pitchFamily="34" charset="-120"/>
               </a:rPr>
               <a:t>솔루션</a:t>
